--- a/image/UI design/가로모드.pptx
+++ b/image/UI design/가로모드.pptx
@@ -2,12 +2,17 @@
 <file path=ppt/presentation.xml><?xml version="1.0" encoding="utf-8"?>
 <p:presentation xmlns:a="http://schemas.openxmlformats.org/drawingml/2006/main" xmlns:r="http://schemas.openxmlformats.org/officeDocument/2006/relationships" xmlns:p="http://schemas.openxmlformats.org/presentationml/2006/main" saveSubsetFonts="1">
   <p:sldMasterIdLst>
-    <p:sldMasterId id="2147483660" r:id="rId1"/>
+    <p:sldMasterId id="2147483672" r:id="rId1"/>
   </p:sldMasterIdLst>
   <p:sldIdLst>
-    <p:sldId id="256" r:id="rId2"/>
+    <p:sldId id="261" r:id="rId2"/>
+    <p:sldId id="258" r:id="rId3"/>
+    <p:sldId id="259" r:id="rId4"/>
+    <p:sldId id="257" r:id="rId5"/>
+    <p:sldId id="260" r:id="rId6"/>
+    <p:sldId id="256" r:id="rId7"/>
   </p:sldIdLst>
-  <p:sldSz cx="9144000" cy="6858000" type="screen4x3"/>
+  <p:sldSz cx="6840538" cy="5129213"/>
   <p:notesSz cx="6858000" cy="9144000"/>
   <p:defaultTextStyle>
     <a:defPPr>
@@ -107,12 +112,32 @@
   <p:extLst>
     <p:ext uri="{EFAFB233-063F-42B5-8137-9DF3F51BA10A}">
       <p15:sldGuideLst xmlns:p15="http://schemas.microsoft.com/office/powerpoint/2012/main">
-        <p15:guide id="1" orient="horz" pos="2160" userDrawn="1">
+        <p15:guide id="1" orient="horz" pos="1616" userDrawn="1">
           <p15:clr>
             <a:srgbClr val="A4A3A4"/>
           </p15:clr>
         </p15:guide>
-        <p15:guide id="2" pos="2880" userDrawn="1">
+        <p15:guide id="2" pos="2155" userDrawn="1">
+          <p15:clr>
+            <a:srgbClr val="A4A3A4"/>
+          </p15:clr>
+        </p15:guide>
+        <p15:guide id="3" pos="317" userDrawn="1">
+          <p15:clr>
+            <a:srgbClr val="A4A3A4"/>
+          </p15:clr>
+        </p15:guide>
+        <p15:guide id="4" pos="3992" userDrawn="1">
+          <p15:clr>
+            <a:srgbClr val="A4A3A4"/>
+          </p15:clr>
+        </p15:guide>
+        <p15:guide id="5" orient="horz" pos="2908" userDrawn="1">
+          <p15:clr>
+            <a:srgbClr val="A4A3A4"/>
+          </p15:clr>
+        </p15:guide>
+        <p15:guide id="6" orient="horz" pos="323" userDrawn="1">
           <p15:clr>
             <a:srgbClr val="A4A3A4"/>
           </p15:clr>
@@ -152,15 +177,15 @@
         </p:nvSpPr>
         <p:spPr>
           <a:xfrm>
-            <a:off x="685800" y="1122363"/>
-            <a:ext cx="7772400" cy="2387600"/>
+            <a:off x="513041" y="839434"/>
+            <a:ext cx="5814457" cy="1785726"/>
           </a:xfrm>
         </p:spPr>
         <p:txBody>
           <a:bodyPr anchor="b"/>
           <a:lstStyle>
             <a:lvl1pPr algn="ctr">
-              <a:defRPr sz="6000"/>
+              <a:defRPr sz="4487"/>
             </a:lvl1pPr>
           </a:lstStyle>
           <a:p>
@@ -184,8 +209,8 @@
         </p:nvSpPr>
         <p:spPr>
           <a:xfrm>
-            <a:off x="1143000" y="3602038"/>
-            <a:ext cx="6858000" cy="1655762"/>
+            <a:off x="855067" y="2694025"/>
+            <a:ext cx="5130404" cy="1238372"/>
           </a:xfrm>
         </p:spPr>
         <p:txBody>
@@ -193,39 +218,39 @@
           <a:lstStyle>
             <a:lvl1pPr marL="0" indent="0" algn="ctr">
               <a:buNone/>
-              <a:defRPr sz="2400"/>
+              <a:defRPr sz="1795"/>
             </a:lvl1pPr>
-            <a:lvl2pPr marL="457200" indent="0" algn="ctr">
+            <a:lvl2pPr marL="341940" indent="0" algn="ctr">
               <a:buNone/>
-              <a:defRPr sz="2000"/>
+              <a:defRPr sz="1496"/>
             </a:lvl2pPr>
-            <a:lvl3pPr marL="914400" indent="0" algn="ctr">
+            <a:lvl3pPr marL="683880" indent="0" algn="ctr">
               <a:buNone/>
-              <a:defRPr sz="1800"/>
+              <a:defRPr sz="1346"/>
             </a:lvl3pPr>
-            <a:lvl4pPr marL="1371600" indent="0" algn="ctr">
+            <a:lvl4pPr marL="1025820" indent="0" algn="ctr">
               <a:buNone/>
-              <a:defRPr sz="1600"/>
+              <a:defRPr sz="1197"/>
             </a:lvl4pPr>
-            <a:lvl5pPr marL="1828800" indent="0" algn="ctr">
+            <a:lvl5pPr marL="1367760" indent="0" algn="ctr">
               <a:buNone/>
-              <a:defRPr sz="1600"/>
+              <a:defRPr sz="1197"/>
             </a:lvl5pPr>
-            <a:lvl6pPr marL="2286000" indent="0" algn="ctr">
+            <a:lvl6pPr marL="1709699" indent="0" algn="ctr">
               <a:buNone/>
-              <a:defRPr sz="1600"/>
+              <a:defRPr sz="1197"/>
             </a:lvl6pPr>
-            <a:lvl7pPr marL="2743200" indent="0" algn="ctr">
+            <a:lvl7pPr marL="2051639" indent="0" algn="ctr">
               <a:buNone/>
-              <a:defRPr sz="1600"/>
+              <a:defRPr sz="1197"/>
             </a:lvl7pPr>
-            <a:lvl8pPr marL="3200400" indent="0" algn="ctr">
+            <a:lvl8pPr marL="2393579" indent="0" algn="ctr">
               <a:buNone/>
-              <a:defRPr sz="1600"/>
+              <a:defRPr sz="1197"/>
             </a:lvl8pPr>
-            <a:lvl9pPr marL="3657600" indent="0" algn="ctr">
+            <a:lvl9pPr marL="2735519" indent="0" algn="ctr">
               <a:buNone/>
-              <a:defRPr sz="1600"/>
+              <a:defRPr sz="1197"/>
             </a:lvl9pPr>
           </a:lstStyle>
           <a:p>
@@ -254,7 +279,7 @@
           <a:p>
             <a:fld id="{1A3091CC-9A4A-4231-880F-2FC0A80364C2}" type="datetimeFigureOut">
               <a:rPr lang="ko-KR" altLang="en-US" smtClean="0"/>
-              <a:t>2026-08-13</a:t>
+              <a:t>2026-08-14</a:t>
             </a:fld>
             <a:endParaRPr lang="ko-KR" altLang="en-US"/>
           </a:p>
@@ -305,7 +330,7 @@
     </p:spTree>
     <p:extLst>
       <p:ext uri="{BB962C8B-B14F-4D97-AF65-F5344CB8AC3E}">
-        <p14:creationId xmlns:p14="http://schemas.microsoft.com/office/powerpoint/2010/main" val="1674593283"/>
+        <p14:creationId xmlns:p14="http://schemas.microsoft.com/office/powerpoint/2010/main" val="515767541"/>
       </p:ext>
     </p:extLst>
   </p:cSld>
@@ -424,7 +449,7 @@
           <a:p>
             <a:fld id="{1A3091CC-9A4A-4231-880F-2FC0A80364C2}" type="datetimeFigureOut">
               <a:rPr lang="ko-KR" altLang="en-US" smtClean="0"/>
-              <a:t>2026-08-13</a:t>
+              <a:t>2026-08-14</a:t>
             </a:fld>
             <a:endParaRPr lang="ko-KR" altLang="en-US"/>
           </a:p>
@@ -475,7 +500,7 @@
     </p:spTree>
     <p:extLst>
       <p:ext uri="{BB962C8B-B14F-4D97-AF65-F5344CB8AC3E}">
-        <p14:creationId xmlns:p14="http://schemas.microsoft.com/office/powerpoint/2010/main" val="1820229510"/>
+        <p14:creationId xmlns:p14="http://schemas.microsoft.com/office/powerpoint/2010/main" val="1196372065"/>
       </p:ext>
     </p:extLst>
   </p:cSld>
@@ -514,8 +539,8 @@
         </p:nvSpPr>
         <p:spPr>
           <a:xfrm>
-            <a:off x="6543675" y="365125"/>
-            <a:ext cx="1971675" cy="5811838"/>
+            <a:off x="4895260" y="273083"/>
+            <a:ext cx="1474991" cy="4346771"/>
           </a:xfrm>
         </p:spPr>
         <p:txBody>
@@ -542,8 +567,8 @@
         </p:nvSpPr>
         <p:spPr>
           <a:xfrm>
-            <a:off x="628650" y="365125"/>
-            <a:ext cx="5800725" cy="5811838"/>
+            <a:off x="470288" y="273083"/>
+            <a:ext cx="4339466" cy="4346771"/>
           </a:xfrm>
         </p:spPr>
         <p:txBody>
@@ -604,7 +629,7 @@
           <a:p>
             <a:fld id="{1A3091CC-9A4A-4231-880F-2FC0A80364C2}" type="datetimeFigureOut">
               <a:rPr lang="ko-KR" altLang="en-US" smtClean="0"/>
-              <a:t>2026-08-13</a:t>
+              <a:t>2026-08-14</a:t>
             </a:fld>
             <a:endParaRPr lang="ko-KR" altLang="en-US"/>
           </a:p>
@@ -655,7 +680,7 @@
     </p:spTree>
     <p:extLst>
       <p:ext uri="{BB962C8B-B14F-4D97-AF65-F5344CB8AC3E}">
-        <p14:creationId xmlns:p14="http://schemas.microsoft.com/office/powerpoint/2010/main" val="3871094114"/>
+        <p14:creationId xmlns:p14="http://schemas.microsoft.com/office/powerpoint/2010/main" val="3893488959"/>
       </p:ext>
     </p:extLst>
   </p:cSld>
@@ -774,7 +799,7 @@
           <a:p>
             <a:fld id="{1A3091CC-9A4A-4231-880F-2FC0A80364C2}" type="datetimeFigureOut">
               <a:rPr lang="ko-KR" altLang="en-US" smtClean="0"/>
-              <a:t>2026-08-13</a:t>
+              <a:t>2026-08-14</a:t>
             </a:fld>
             <a:endParaRPr lang="ko-KR" altLang="en-US"/>
           </a:p>
@@ -825,7 +850,7 @@
     </p:spTree>
     <p:extLst>
       <p:ext uri="{BB962C8B-B14F-4D97-AF65-F5344CB8AC3E}">
-        <p14:creationId xmlns:p14="http://schemas.microsoft.com/office/powerpoint/2010/main" val="222571816"/>
+        <p14:creationId xmlns:p14="http://schemas.microsoft.com/office/powerpoint/2010/main" val="1475631121"/>
       </p:ext>
     </p:extLst>
   </p:cSld>
@@ -864,15 +889,15 @@
         </p:nvSpPr>
         <p:spPr>
           <a:xfrm>
-            <a:off x="623888" y="1709739"/>
-            <a:ext cx="7886700" cy="2852737"/>
+            <a:off x="466725" y="1278743"/>
+            <a:ext cx="5899964" cy="2133610"/>
           </a:xfrm>
         </p:spPr>
         <p:txBody>
           <a:bodyPr anchor="b"/>
           <a:lstStyle>
             <a:lvl1pPr>
-              <a:defRPr sz="6000"/>
+              <a:defRPr sz="4487"/>
             </a:lvl1pPr>
           </a:lstStyle>
           <a:p>
@@ -896,8 +921,8 @@
         </p:nvSpPr>
         <p:spPr>
           <a:xfrm>
-            <a:off x="623888" y="4589464"/>
-            <a:ext cx="7886700" cy="1500187"/>
+            <a:off x="466725" y="3432537"/>
+            <a:ext cx="5899964" cy="1122015"/>
           </a:xfrm>
         </p:spPr>
         <p:txBody>
@@ -905,7 +930,7 @@
           <a:lstStyle>
             <a:lvl1pPr marL="0" indent="0">
               <a:buNone/>
-              <a:defRPr sz="2400">
+              <a:defRPr sz="1795">
                 <a:solidFill>
                   <a:schemeClr val="tx1">
                     <a:tint val="82000"/>
@@ -913,9 +938,9 @@
                 </a:solidFill>
               </a:defRPr>
             </a:lvl1pPr>
-            <a:lvl2pPr marL="457200" indent="0">
+            <a:lvl2pPr marL="341940" indent="0">
               <a:buNone/>
-              <a:defRPr sz="2000">
+              <a:defRPr sz="1496">
                 <a:solidFill>
                   <a:schemeClr val="tx1">
                     <a:tint val="82000"/>
@@ -923,9 +948,9 @@
                 </a:solidFill>
               </a:defRPr>
             </a:lvl2pPr>
-            <a:lvl3pPr marL="914400" indent="0">
+            <a:lvl3pPr marL="683880" indent="0">
               <a:buNone/>
-              <a:defRPr sz="1800">
+              <a:defRPr sz="1346">
                 <a:solidFill>
                   <a:schemeClr val="tx1">
                     <a:tint val="82000"/>
@@ -933,9 +958,9 @@
                 </a:solidFill>
               </a:defRPr>
             </a:lvl3pPr>
-            <a:lvl4pPr marL="1371600" indent="0">
+            <a:lvl4pPr marL="1025820" indent="0">
               <a:buNone/>
-              <a:defRPr sz="1600">
+              <a:defRPr sz="1197">
                 <a:solidFill>
                   <a:schemeClr val="tx1">
                     <a:tint val="82000"/>
@@ -943,9 +968,9 @@
                 </a:solidFill>
               </a:defRPr>
             </a:lvl4pPr>
-            <a:lvl5pPr marL="1828800" indent="0">
+            <a:lvl5pPr marL="1367760" indent="0">
               <a:buNone/>
-              <a:defRPr sz="1600">
+              <a:defRPr sz="1197">
                 <a:solidFill>
                   <a:schemeClr val="tx1">
                     <a:tint val="82000"/>
@@ -953,9 +978,9 @@
                 </a:solidFill>
               </a:defRPr>
             </a:lvl5pPr>
-            <a:lvl6pPr marL="2286000" indent="0">
+            <a:lvl6pPr marL="1709699" indent="0">
               <a:buNone/>
-              <a:defRPr sz="1600">
+              <a:defRPr sz="1197">
                 <a:solidFill>
                   <a:schemeClr val="tx1">
                     <a:tint val="82000"/>
@@ -963,9 +988,9 @@
                 </a:solidFill>
               </a:defRPr>
             </a:lvl6pPr>
-            <a:lvl7pPr marL="2743200" indent="0">
+            <a:lvl7pPr marL="2051639" indent="0">
               <a:buNone/>
-              <a:defRPr sz="1600">
+              <a:defRPr sz="1197">
                 <a:solidFill>
                   <a:schemeClr val="tx1">
                     <a:tint val="82000"/>
@@ -973,9 +998,9 @@
                 </a:solidFill>
               </a:defRPr>
             </a:lvl7pPr>
-            <a:lvl8pPr marL="3200400" indent="0">
+            <a:lvl8pPr marL="2393579" indent="0">
               <a:buNone/>
-              <a:defRPr sz="1600">
+              <a:defRPr sz="1197">
                 <a:solidFill>
                   <a:schemeClr val="tx1">
                     <a:tint val="82000"/>
@@ -983,9 +1008,9 @@
                 </a:solidFill>
               </a:defRPr>
             </a:lvl8pPr>
-            <a:lvl9pPr marL="3657600" indent="0">
+            <a:lvl9pPr marL="2735519" indent="0">
               <a:buNone/>
-              <a:defRPr sz="1600">
+              <a:defRPr sz="1197">
                 <a:solidFill>
                   <a:schemeClr val="tx1">
                     <a:tint val="82000"/>
@@ -1020,7 +1045,7 @@
           <a:p>
             <a:fld id="{1A3091CC-9A4A-4231-880F-2FC0A80364C2}" type="datetimeFigureOut">
               <a:rPr lang="ko-KR" altLang="en-US" smtClean="0"/>
-              <a:t>2026-08-13</a:t>
+              <a:t>2026-08-14</a:t>
             </a:fld>
             <a:endParaRPr lang="ko-KR" altLang="en-US"/>
           </a:p>
@@ -1071,7 +1096,7 @@
     </p:spTree>
     <p:extLst>
       <p:ext uri="{BB962C8B-B14F-4D97-AF65-F5344CB8AC3E}">
-        <p14:creationId xmlns:p14="http://schemas.microsoft.com/office/powerpoint/2010/main" val="2195561289"/>
+        <p14:creationId xmlns:p14="http://schemas.microsoft.com/office/powerpoint/2010/main" val="3869370755"/>
       </p:ext>
     </p:extLst>
   </p:cSld>
@@ -1133,8 +1158,8 @@
         </p:nvSpPr>
         <p:spPr>
           <a:xfrm>
-            <a:off x="628650" y="1825625"/>
-            <a:ext cx="3886200" cy="4351338"/>
+            <a:off x="470287" y="1365415"/>
+            <a:ext cx="2907229" cy="3254439"/>
           </a:xfrm>
         </p:spPr>
         <p:txBody>
@@ -1190,8 +1215,8 @@
         </p:nvSpPr>
         <p:spPr>
           <a:xfrm>
-            <a:off x="4629150" y="1825625"/>
-            <a:ext cx="3886200" cy="4351338"/>
+            <a:off x="3463022" y="1365415"/>
+            <a:ext cx="2907229" cy="3254439"/>
           </a:xfrm>
         </p:spPr>
         <p:txBody>
@@ -1252,7 +1277,7 @@
           <a:p>
             <a:fld id="{1A3091CC-9A4A-4231-880F-2FC0A80364C2}" type="datetimeFigureOut">
               <a:rPr lang="ko-KR" altLang="en-US" smtClean="0"/>
-              <a:t>2026-08-13</a:t>
+              <a:t>2026-08-14</a:t>
             </a:fld>
             <a:endParaRPr lang="ko-KR" altLang="en-US"/>
           </a:p>
@@ -1303,7 +1328,7 @@
     </p:spTree>
     <p:extLst>
       <p:ext uri="{BB962C8B-B14F-4D97-AF65-F5344CB8AC3E}">
-        <p14:creationId xmlns:p14="http://schemas.microsoft.com/office/powerpoint/2010/main" val="2395664455"/>
+        <p14:creationId xmlns:p14="http://schemas.microsoft.com/office/powerpoint/2010/main" val="2211333653"/>
       </p:ext>
     </p:extLst>
   </p:cSld>
@@ -1342,8 +1367,8 @@
         </p:nvSpPr>
         <p:spPr>
           <a:xfrm>
-            <a:off x="629841" y="365126"/>
-            <a:ext cx="7886700" cy="1325563"/>
+            <a:off x="471178" y="273084"/>
+            <a:ext cx="5899964" cy="991411"/>
           </a:xfrm>
         </p:spPr>
         <p:txBody>
@@ -1370,8 +1395,8 @@
         </p:nvSpPr>
         <p:spPr>
           <a:xfrm>
-            <a:off x="629842" y="1681163"/>
-            <a:ext cx="3868340" cy="823912"/>
+            <a:off x="471179" y="1257370"/>
+            <a:ext cx="2893868" cy="616218"/>
           </a:xfrm>
         </p:spPr>
         <p:txBody>
@@ -1379,39 +1404,39 @@
           <a:lstStyle>
             <a:lvl1pPr marL="0" indent="0">
               <a:buNone/>
-              <a:defRPr sz="2400" b="1"/>
+              <a:defRPr sz="1795" b="1"/>
             </a:lvl1pPr>
-            <a:lvl2pPr marL="457200" indent="0">
+            <a:lvl2pPr marL="341940" indent="0">
               <a:buNone/>
-              <a:defRPr sz="2000" b="1"/>
+              <a:defRPr sz="1496" b="1"/>
             </a:lvl2pPr>
-            <a:lvl3pPr marL="914400" indent="0">
+            <a:lvl3pPr marL="683880" indent="0">
               <a:buNone/>
-              <a:defRPr sz="1800" b="1"/>
+              <a:defRPr sz="1346" b="1"/>
             </a:lvl3pPr>
-            <a:lvl4pPr marL="1371600" indent="0">
+            <a:lvl4pPr marL="1025820" indent="0">
               <a:buNone/>
-              <a:defRPr sz="1600" b="1"/>
+              <a:defRPr sz="1197" b="1"/>
             </a:lvl4pPr>
-            <a:lvl5pPr marL="1828800" indent="0">
+            <a:lvl5pPr marL="1367760" indent="0">
               <a:buNone/>
-              <a:defRPr sz="1600" b="1"/>
+              <a:defRPr sz="1197" b="1"/>
             </a:lvl5pPr>
-            <a:lvl6pPr marL="2286000" indent="0">
+            <a:lvl6pPr marL="1709699" indent="0">
               <a:buNone/>
-              <a:defRPr sz="1600" b="1"/>
+              <a:defRPr sz="1197" b="1"/>
             </a:lvl6pPr>
-            <a:lvl7pPr marL="2743200" indent="0">
+            <a:lvl7pPr marL="2051639" indent="0">
               <a:buNone/>
-              <a:defRPr sz="1600" b="1"/>
+              <a:defRPr sz="1197" b="1"/>
             </a:lvl7pPr>
-            <a:lvl8pPr marL="3200400" indent="0">
+            <a:lvl8pPr marL="2393579" indent="0">
               <a:buNone/>
-              <a:defRPr sz="1600" b="1"/>
+              <a:defRPr sz="1197" b="1"/>
             </a:lvl8pPr>
-            <a:lvl9pPr marL="3657600" indent="0">
+            <a:lvl9pPr marL="2735519" indent="0">
               <a:buNone/>
-              <a:defRPr sz="1600" b="1"/>
+              <a:defRPr sz="1197" b="1"/>
             </a:lvl9pPr>
           </a:lstStyle>
           <a:p>
@@ -1435,8 +1460,8 @@
         </p:nvSpPr>
         <p:spPr>
           <a:xfrm>
-            <a:off x="629842" y="2505075"/>
-            <a:ext cx="3868340" cy="3684588"/>
+            <a:off x="471179" y="1873588"/>
+            <a:ext cx="2893868" cy="2755765"/>
           </a:xfrm>
         </p:spPr>
         <p:txBody>
@@ -1492,8 +1517,8 @@
         </p:nvSpPr>
         <p:spPr>
           <a:xfrm>
-            <a:off x="4629150" y="1681163"/>
-            <a:ext cx="3887391" cy="823912"/>
+            <a:off x="3463023" y="1257370"/>
+            <a:ext cx="2908120" cy="616218"/>
           </a:xfrm>
         </p:spPr>
         <p:txBody>
@@ -1501,39 +1526,39 @@
           <a:lstStyle>
             <a:lvl1pPr marL="0" indent="0">
               <a:buNone/>
-              <a:defRPr sz="2400" b="1"/>
+              <a:defRPr sz="1795" b="1"/>
             </a:lvl1pPr>
-            <a:lvl2pPr marL="457200" indent="0">
+            <a:lvl2pPr marL="341940" indent="0">
               <a:buNone/>
-              <a:defRPr sz="2000" b="1"/>
+              <a:defRPr sz="1496" b="1"/>
             </a:lvl2pPr>
-            <a:lvl3pPr marL="914400" indent="0">
+            <a:lvl3pPr marL="683880" indent="0">
               <a:buNone/>
-              <a:defRPr sz="1800" b="1"/>
+              <a:defRPr sz="1346" b="1"/>
             </a:lvl3pPr>
-            <a:lvl4pPr marL="1371600" indent="0">
+            <a:lvl4pPr marL="1025820" indent="0">
               <a:buNone/>
-              <a:defRPr sz="1600" b="1"/>
+              <a:defRPr sz="1197" b="1"/>
             </a:lvl4pPr>
-            <a:lvl5pPr marL="1828800" indent="0">
+            <a:lvl5pPr marL="1367760" indent="0">
               <a:buNone/>
-              <a:defRPr sz="1600" b="1"/>
+              <a:defRPr sz="1197" b="1"/>
             </a:lvl5pPr>
-            <a:lvl6pPr marL="2286000" indent="0">
+            <a:lvl6pPr marL="1709699" indent="0">
               <a:buNone/>
-              <a:defRPr sz="1600" b="1"/>
+              <a:defRPr sz="1197" b="1"/>
             </a:lvl6pPr>
-            <a:lvl7pPr marL="2743200" indent="0">
+            <a:lvl7pPr marL="2051639" indent="0">
               <a:buNone/>
-              <a:defRPr sz="1600" b="1"/>
+              <a:defRPr sz="1197" b="1"/>
             </a:lvl7pPr>
-            <a:lvl8pPr marL="3200400" indent="0">
+            <a:lvl8pPr marL="2393579" indent="0">
               <a:buNone/>
-              <a:defRPr sz="1600" b="1"/>
+              <a:defRPr sz="1197" b="1"/>
             </a:lvl8pPr>
-            <a:lvl9pPr marL="3657600" indent="0">
+            <a:lvl9pPr marL="2735519" indent="0">
               <a:buNone/>
-              <a:defRPr sz="1600" b="1"/>
+              <a:defRPr sz="1197" b="1"/>
             </a:lvl9pPr>
           </a:lstStyle>
           <a:p>
@@ -1557,8 +1582,8 @@
         </p:nvSpPr>
         <p:spPr>
           <a:xfrm>
-            <a:off x="4629150" y="2505075"/>
-            <a:ext cx="3887391" cy="3684588"/>
+            <a:off x="3463023" y="1873588"/>
+            <a:ext cx="2908120" cy="2755765"/>
           </a:xfrm>
         </p:spPr>
         <p:txBody>
@@ -1619,7 +1644,7 @@
           <a:p>
             <a:fld id="{1A3091CC-9A4A-4231-880F-2FC0A80364C2}" type="datetimeFigureOut">
               <a:rPr lang="ko-KR" altLang="en-US" smtClean="0"/>
-              <a:t>2026-08-13</a:t>
+              <a:t>2026-08-14</a:t>
             </a:fld>
             <a:endParaRPr lang="ko-KR" altLang="en-US"/>
           </a:p>
@@ -1670,7 +1695,7 @@
     </p:spTree>
     <p:extLst>
       <p:ext uri="{BB962C8B-B14F-4D97-AF65-F5344CB8AC3E}">
-        <p14:creationId xmlns:p14="http://schemas.microsoft.com/office/powerpoint/2010/main" val="878173912"/>
+        <p14:creationId xmlns:p14="http://schemas.microsoft.com/office/powerpoint/2010/main" val="3283862759"/>
       </p:ext>
     </p:extLst>
   </p:cSld>
@@ -1737,7 +1762,7 @@
           <a:p>
             <a:fld id="{1A3091CC-9A4A-4231-880F-2FC0A80364C2}" type="datetimeFigureOut">
               <a:rPr lang="ko-KR" altLang="en-US" smtClean="0"/>
-              <a:t>2026-08-13</a:t>
+              <a:t>2026-08-14</a:t>
             </a:fld>
             <a:endParaRPr lang="ko-KR" altLang="en-US"/>
           </a:p>
@@ -1788,7 +1813,7 @@
     </p:spTree>
     <p:extLst>
       <p:ext uri="{BB962C8B-B14F-4D97-AF65-F5344CB8AC3E}">
-        <p14:creationId xmlns:p14="http://schemas.microsoft.com/office/powerpoint/2010/main" val="3879032387"/>
+        <p14:creationId xmlns:p14="http://schemas.microsoft.com/office/powerpoint/2010/main" val="2572451714"/>
       </p:ext>
     </p:extLst>
   </p:cSld>
@@ -1832,7 +1857,7 @@
           <a:p>
             <a:fld id="{1A3091CC-9A4A-4231-880F-2FC0A80364C2}" type="datetimeFigureOut">
               <a:rPr lang="ko-KR" altLang="en-US" smtClean="0"/>
-              <a:t>2026-08-13</a:t>
+              <a:t>2026-08-14</a:t>
             </a:fld>
             <a:endParaRPr lang="ko-KR" altLang="en-US"/>
           </a:p>
@@ -1883,7 +1908,7 @@
     </p:spTree>
     <p:extLst>
       <p:ext uri="{BB962C8B-B14F-4D97-AF65-F5344CB8AC3E}">
-        <p14:creationId xmlns:p14="http://schemas.microsoft.com/office/powerpoint/2010/main" val="3426740213"/>
+        <p14:creationId xmlns:p14="http://schemas.microsoft.com/office/powerpoint/2010/main" val="1490646609"/>
       </p:ext>
     </p:extLst>
   </p:cSld>
@@ -1922,15 +1947,15 @@
         </p:nvSpPr>
         <p:spPr>
           <a:xfrm>
-            <a:off x="629841" y="457200"/>
-            <a:ext cx="2949178" cy="1600200"/>
+            <a:off x="471178" y="341948"/>
+            <a:ext cx="2206252" cy="1196816"/>
           </a:xfrm>
         </p:spPr>
         <p:txBody>
           <a:bodyPr anchor="b"/>
           <a:lstStyle>
             <a:lvl1pPr>
-              <a:defRPr sz="3200"/>
+              <a:defRPr sz="2393"/>
             </a:lvl1pPr>
           </a:lstStyle>
           <a:p>
@@ -1954,39 +1979,39 @@
         </p:nvSpPr>
         <p:spPr>
           <a:xfrm>
-            <a:off x="3887391" y="987426"/>
-            <a:ext cx="4629150" cy="4873625"/>
+            <a:off x="2908120" y="738513"/>
+            <a:ext cx="3463022" cy="3645066"/>
           </a:xfrm>
         </p:spPr>
         <p:txBody>
           <a:bodyPr/>
           <a:lstStyle>
             <a:lvl1pPr>
-              <a:defRPr sz="3200"/>
+              <a:defRPr sz="2393"/>
             </a:lvl1pPr>
             <a:lvl2pPr>
-              <a:defRPr sz="2800"/>
+              <a:defRPr sz="2094"/>
             </a:lvl2pPr>
             <a:lvl3pPr>
-              <a:defRPr sz="2400"/>
+              <a:defRPr sz="1795"/>
             </a:lvl3pPr>
             <a:lvl4pPr>
-              <a:defRPr sz="2000"/>
+              <a:defRPr sz="1496"/>
             </a:lvl4pPr>
             <a:lvl5pPr>
-              <a:defRPr sz="2000"/>
+              <a:defRPr sz="1496"/>
             </a:lvl5pPr>
             <a:lvl6pPr>
-              <a:defRPr sz="2000"/>
+              <a:defRPr sz="1496"/>
             </a:lvl6pPr>
             <a:lvl7pPr>
-              <a:defRPr sz="2000"/>
+              <a:defRPr sz="1496"/>
             </a:lvl7pPr>
             <a:lvl8pPr>
-              <a:defRPr sz="2000"/>
+              <a:defRPr sz="1496"/>
             </a:lvl8pPr>
             <a:lvl9pPr>
-              <a:defRPr sz="2000"/>
+              <a:defRPr sz="1496"/>
             </a:lvl9pPr>
           </a:lstStyle>
           <a:p>
@@ -2039,8 +2064,8 @@
         </p:nvSpPr>
         <p:spPr>
           <a:xfrm>
-            <a:off x="629841" y="2057400"/>
-            <a:ext cx="2949178" cy="3811588"/>
+            <a:off x="471178" y="1538764"/>
+            <a:ext cx="2206252" cy="2850750"/>
           </a:xfrm>
         </p:spPr>
         <p:txBody>
@@ -2048,39 +2073,39 @@
           <a:lstStyle>
             <a:lvl1pPr marL="0" indent="0">
               <a:buNone/>
-              <a:defRPr sz="1600"/>
+              <a:defRPr sz="1197"/>
             </a:lvl1pPr>
-            <a:lvl2pPr marL="457200" indent="0">
+            <a:lvl2pPr marL="341940" indent="0">
               <a:buNone/>
-              <a:defRPr sz="1400"/>
+              <a:defRPr sz="1047"/>
             </a:lvl2pPr>
-            <a:lvl3pPr marL="914400" indent="0">
+            <a:lvl3pPr marL="683880" indent="0">
               <a:buNone/>
-              <a:defRPr sz="1200"/>
+              <a:defRPr sz="897"/>
             </a:lvl3pPr>
-            <a:lvl4pPr marL="1371600" indent="0">
+            <a:lvl4pPr marL="1025820" indent="0">
               <a:buNone/>
-              <a:defRPr sz="1000"/>
+              <a:defRPr sz="748"/>
             </a:lvl4pPr>
-            <a:lvl5pPr marL="1828800" indent="0">
+            <a:lvl5pPr marL="1367760" indent="0">
               <a:buNone/>
-              <a:defRPr sz="1000"/>
+              <a:defRPr sz="748"/>
             </a:lvl5pPr>
-            <a:lvl6pPr marL="2286000" indent="0">
+            <a:lvl6pPr marL="1709699" indent="0">
               <a:buNone/>
-              <a:defRPr sz="1000"/>
+              <a:defRPr sz="748"/>
             </a:lvl6pPr>
-            <a:lvl7pPr marL="2743200" indent="0">
+            <a:lvl7pPr marL="2051639" indent="0">
               <a:buNone/>
-              <a:defRPr sz="1000"/>
+              <a:defRPr sz="748"/>
             </a:lvl7pPr>
-            <a:lvl8pPr marL="3200400" indent="0">
+            <a:lvl8pPr marL="2393579" indent="0">
               <a:buNone/>
-              <a:defRPr sz="1000"/>
+              <a:defRPr sz="748"/>
             </a:lvl8pPr>
-            <a:lvl9pPr marL="3657600" indent="0">
+            <a:lvl9pPr marL="2735519" indent="0">
               <a:buNone/>
-              <a:defRPr sz="1000"/>
+              <a:defRPr sz="748"/>
             </a:lvl9pPr>
           </a:lstStyle>
           <a:p>
@@ -2109,7 +2134,7 @@
           <a:p>
             <a:fld id="{1A3091CC-9A4A-4231-880F-2FC0A80364C2}" type="datetimeFigureOut">
               <a:rPr lang="ko-KR" altLang="en-US" smtClean="0"/>
-              <a:t>2026-08-13</a:t>
+              <a:t>2026-08-14</a:t>
             </a:fld>
             <a:endParaRPr lang="ko-KR" altLang="en-US"/>
           </a:p>
@@ -2160,7 +2185,7 @@
     </p:spTree>
     <p:extLst>
       <p:ext uri="{BB962C8B-B14F-4D97-AF65-F5344CB8AC3E}">
-        <p14:creationId xmlns:p14="http://schemas.microsoft.com/office/powerpoint/2010/main" val="438233696"/>
+        <p14:creationId xmlns:p14="http://schemas.microsoft.com/office/powerpoint/2010/main" val="1227187329"/>
       </p:ext>
     </p:extLst>
   </p:cSld>
@@ -2199,15 +2224,15 @@
         </p:nvSpPr>
         <p:spPr>
           <a:xfrm>
-            <a:off x="629841" y="457200"/>
-            <a:ext cx="2949178" cy="1600200"/>
+            <a:off x="471178" y="341948"/>
+            <a:ext cx="2206252" cy="1196816"/>
           </a:xfrm>
         </p:spPr>
         <p:txBody>
           <a:bodyPr anchor="b"/>
           <a:lstStyle>
             <a:lvl1pPr>
-              <a:defRPr sz="3200"/>
+              <a:defRPr sz="2393"/>
             </a:lvl1pPr>
           </a:lstStyle>
           <a:p>
@@ -2231,8 +2256,8 @@
         </p:nvSpPr>
         <p:spPr>
           <a:xfrm>
-            <a:off x="3887391" y="987426"/>
-            <a:ext cx="4629150" cy="4873625"/>
+            <a:off x="2908120" y="738513"/>
+            <a:ext cx="3463022" cy="3645066"/>
           </a:xfrm>
         </p:spPr>
         <p:txBody>
@@ -2240,39 +2265,39 @@
           <a:lstStyle>
             <a:lvl1pPr marL="0" indent="0">
               <a:buNone/>
-              <a:defRPr sz="3200"/>
+              <a:defRPr sz="2393"/>
             </a:lvl1pPr>
-            <a:lvl2pPr marL="457200" indent="0">
+            <a:lvl2pPr marL="341940" indent="0">
               <a:buNone/>
-              <a:defRPr sz="2800"/>
+              <a:defRPr sz="2094"/>
             </a:lvl2pPr>
-            <a:lvl3pPr marL="914400" indent="0">
+            <a:lvl3pPr marL="683880" indent="0">
               <a:buNone/>
-              <a:defRPr sz="2400"/>
+              <a:defRPr sz="1795"/>
             </a:lvl3pPr>
-            <a:lvl4pPr marL="1371600" indent="0">
+            <a:lvl4pPr marL="1025820" indent="0">
               <a:buNone/>
-              <a:defRPr sz="2000"/>
+              <a:defRPr sz="1496"/>
             </a:lvl4pPr>
-            <a:lvl5pPr marL="1828800" indent="0">
+            <a:lvl5pPr marL="1367760" indent="0">
               <a:buNone/>
-              <a:defRPr sz="2000"/>
+              <a:defRPr sz="1496"/>
             </a:lvl5pPr>
-            <a:lvl6pPr marL="2286000" indent="0">
+            <a:lvl6pPr marL="1709699" indent="0">
               <a:buNone/>
-              <a:defRPr sz="2000"/>
+              <a:defRPr sz="1496"/>
             </a:lvl6pPr>
-            <a:lvl7pPr marL="2743200" indent="0">
+            <a:lvl7pPr marL="2051639" indent="0">
               <a:buNone/>
-              <a:defRPr sz="2000"/>
+              <a:defRPr sz="1496"/>
             </a:lvl7pPr>
-            <a:lvl8pPr marL="3200400" indent="0">
+            <a:lvl8pPr marL="2393579" indent="0">
               <a:buNone/>
-              <a:defRPr sz="2000"/>
+              <a:defRPr sz="1496"/>
             </a:lvl8pPr>
-            <a:lvl9pPr marL="3657600" indent="0">
+            <a:lvl9pPr marL="2735519" indent="0">
               <a:buNone/>
-              <a:defRPr sz="2000"/>
+              <a:defRPr sz="1496"/>
             </a:lvl9pPr>
           </a:lstStyle>
           <a:p>
@@ -2296,8 +2321,8 @@
         </p:nvSpPr>
         <p:spPr>
           <a:xfrm>
-            <a:off x="629841" y="2057400"/>
-            <a:ext cx="2949178" cy="3811588"/>
+            <a:off x="471178" y="1538764"/>
+            <a:ext cx="2206252" cy="2850750"/>
           </a:xfrm>
         </p:spPr>
         <p:txBody>
@@ -2305,39 +2330,39 @@
           <a:lstStyle>
             <a:lvl1pPr marL="0" indent="0">
               <a:buNone/>
-              <a:defRPr sz="1600"/>
+              <a:defRPr sz="1197"/>
             </a:lvl1pPr>
-            <a:lvl2pPr marL="457200" indent="0">
+            <a:lvl2pPr marL="341940" indent="0">
               <a:buNone/>
-              <a:defRPr sz="1400"/>
+              <a:defRPr sz="1047"/>
             </a:lvl2pPr>
-            <a:lvl3pPr marL="914400" indent="0">
+            <a:lvl3pPr marL="683880" indent="0">
               <a:buNone/>
-              <a:defRPr sz="1200"/>
+              <a:defRPr sz="897"/>
             </a:lvl3pPr>
-            <a:lvl4pPr marL="1371600" indent="0">
+            <a:lvl4pPr marL="1025820" indent="0">
               <a:buNone/>
-              <a:defRPr sz="1000"/>
+              <a:defRPr sz="748"/>
             </a:lvl4pPr>
-            <a:lvl5pPr marL="1828800" indent="0">
+            <a:lvl5pPr marL="1367760" indent="0">
               <a:buNone/>
-              <a:defRPr sz="1000"/>
+              <a:defRPr sz="748"/>
             </a:lvl5pPr>
-            <a:lvl6pPr marL="2286000" indent="0">
+            <a:lvl6pPr marL="1709699" indent="0">
               <a:buNone/>
-              <a:defRPr sz="1000"/>
+              <a:defRPr sz="748"/>
             </a:lvl6pPr>
-            <a:lvl7pPr marL="2743200" indent="0">
+            <a:lvl7pPr marL="2051639" indent="0">
               <a:buNone/>
-              <a:defRPr sz="1000"/>
+              <a:defRPr sz="748"/>
             </a:lvl7pPr>
-            <a:lvl8pPr marL="3200400" indent="0">
+            <a:lvl8pPr marL="2393579" indent="0">
               <a:buNone/>
-              <a:defRPr sz="1000"/>
+              <a:defRPr sz="748"/>
             </a:lvl8pPr>
-            <a:lvl9pPr marL="3657600" indent="0">
+            <a:lvl9pPr marL="2735519" indent="0">
               <a:buNone/>
-              <a:defRPr sz="1000"/>
+              <a:defRPr sz="748"/>
             </a:lvl9pPr>
           </a:lstStyle>
           <a:p>
@@ -2366,7 +2391,7 @@
           <a:p>
             <a:fld id="{1A3091CC-9A4A-4231-880F-2FC0A80364C2}" type="datetimeFigureOut">
               <a:rPr lang="ko-KR" altLang="en-US" smtClean="0"/>
-              <a:t>2026-08-13</a:t>
+              <a:t>2026-08-14</a:t>
             </a:fld>
             <a:endParaRPr lang="ko-KR" altLang="en-US"/>
           </a:p>
@@ -2417,7 +2442,7 @@
     </p:spTree>
     <p:extLst>
       <p:ext uri="{BB962C8B-B14F-4D97-AF65-F5344CB8AC3E}">
-        <p14:creationId xmlns:p14="http://schemas.microsoft.com/office/powerpoint/2010/main" val="1269677336"/>
+        <p14:creationId xmlns:p14="http://schemas.microsoft.com/office/powerpoint/2010/main" val="2591854488"/>
       </p:ext>
     </p:extLst>
   </p:cSld>
@@ -2461,8 +2486,8 @@
         </p:nvSpPr>
         <p:spPr>
           <a:xfrm>
-            <a:off x="628650" y="365126"/>
-            <a:ext cx="7886700" cy="1325563"/>
+            <a:off x="470287" y="273084"/>
+            <a:ext cx="5899964" cy="991411"/>
           </a:xfrm>
           <a:prstGeom prst="rect">
             <a:avLst/>
@@ -2494,8 +2519,8 @@
         </p:nvSpPr>
         <p:spPr>
           <a:xfrm>
-            <a:off x="628650" y="1825625"/>
-            <a:ext cx="7886700" cy="4351338"/>
+            <a:off x="470287" y="1365415"/>
+            <a:ext cx="5899964" cy="3254439"/>
           </a:xfrm>
           <a:prstGeom prst="rect">
             <a:avLst/>
@@ -2556,8 +2581,8 @@
         </p:nvSpPr>
         <p:spPr>
           <a:xfrm>
-            <a:off x="628650" y="6356351"/>
-            <a:ext cx="2057400" cy="365125"/>
+            <a:off x="470287" y="4754022"/>
+            <a:ext cx="1539121" cy="273083"/>
           </a:xfrm>
           <a:prstGeom prst="rect">
             <a:avLst/>
@@ -2567,7 +2592,7 @@
           <a:bodyPr vert="horz" lIns="91440" tIns="45720" rIns="91440" bIns="45720" rtlCol="0" anchor="ctr"/>
           <a:lstStyle>
             <a:lvl1pPr algn="l">
-              <a:defRPr sz="1200">
+              <a:defRPr sz="897">
                 <a:solidFill>
                   <a:schemeClr val="tx1">
                     <a:tint val="82000"/>
@@ -2579,7 +2604,7 @@
           <a:p>
             <a:fld id="{1A3091CC-9A4A-4231-880F-2FC0A80364C2}" type="datetimeFigureOut">
               <a:rPr lang="ko-KR" altLang="en-US" smtClean="0"/>
-              <a:t>2026-08-13</a:t>
+              <a:t>2026-08-14</a:t>
             </a:fld>
             <a:endParaRPr lang="ko-KR" altLang="en-US"/>
           </a:p>
@@ -2597,8 +2622,8 @@
         </p:nvSpPr>
         <p:spPr>
           <a:xfrm>
-            <a:off x="3028950" y="6356351"/>
-            <a:ext cx="3086100" cy="365125"/>
+            <a:off x="2265928" y="4754022"/>
+            <a:ext cx="2308682" cy="273083"/>
           </a:xfrm>
           <a:prstGeom prst="rect">
             <a:avLst/>
@@ -2608,7 +2633,7 @@
           <a:bodyPr vert="horz" lIns="91440" tIns="45720" rIns="91440" bIns="45720" rtlCol="0" anchor="ctr"/>
           <a:lstStyle>
             <a:lvl1pPr algn="ctr">
-              <a:defRPr sz="1200">
+              <a:defRPr sz="897">
                 <a:solidFill>
                   <a:schemeClr val="tx1">
                     <a:tint val="82000"/>
@@ -2634,8 +2659,8 @@
         </p:nvSpPr>
         <p:spPr>
           <a:xfrm>
-            <a:off x="6457950" y="6356351"/>
-            <a:ext cx="2057400" cy="365125"/>
+            <a:off x="4831130" y="4754022"/>
+            <a:ext cx="1539121" cy="273083"/>
           </a:xfrm>
           <a:prstGeom prst="rect">
             <a:avLst/>
@@ -2645,7 +2670,7 @@
           <a:bodyPr vert="horz" lIns="91440" tIns="45720" rIns="91440" bIns="45720" rtlCol="0" anchor="ctr"/>
           <a:lstStyle>
             <a:lvl1pPr algn="r">
-              <a:defRPr sz="1200">
+              <a:defRPr sz="897">
                 <a:solidFill>
                   <a:schemeClr val="tx1">
                     <a:tint val="82000"/>
@@ -2666,27 +2691,27 @@
     </p:spTree>
     <p:extLst>
       <p:ext uri="{BB962C8B-B14F-4D97-AF65-F5344CB8AC3E}">
-        <p14:creationId xmlns:p14="http://schemas.microsoft.com/office/powerpoint/2010/main" val="2122788098"/>
+        <p14:creationId xmlns:p14="http://schemas.microsoft.com/office/powerpoint/2010/main" val="1152121568"/>
       </p:ext>
     </p:extLst>
   </p:cSld>
   <p:clrMap bg1="lt1" tx1="dk1" bg2="lt2" tx2="dk2" accent1="accent1" accent2="accent2" accent3="accent3" accent4="accent4" accent5="accent5" accent6="accent6" hlink="hlink" folHlink="folHlink"/>
   <p:sldLayoutIdLst>
-    <p:sldLayoutId id="2147483661" r:id="rId1"/>
-    <p:sldLayoutId id="2147483662" r:id="rId2"/>
-    <p:sldLayoutId id="2147483663" r:id="rId3"/>
-    <p:sldLayoutId id="2147483664" r:id="rId4"/>
-    <p:sldLayoutId id="2147483665" r:id="rId5"/>
-    <p:sldLayoutId id="2147483666" r:id="rId6"/>
-    <p:sldLayoutId id="2147483667" r:id="rId7"/>
-    <p:sldLayoutId id="2147483668" r:id="rId8"/>
-    <p:sldLayoutId id="2147483669" r:id="rId9"/>
-    <p:sldLayoutId id="2147483670" r:id="rId10"/>
-    <p:sldLayoutId id="2147483671" r:id="rId11"/>
+    <p:sldLayoutId id="2147483673" r:id="rId1"/>
+    <p:sldLayoutId id="2147483674" r:id="rId2"/>
+    <p:sldLayoutId id="2147483675" r:id="rId3"/>
+    <p:sldLayoutId id="2147483676" r:id="rId4"/>
+    <p:sldLayoutId id="2147483677" r:id="rId5"/>
+    <p:sldLayoutId id="2147483678" r:id="rId6"/>
+    <p:sldLayoutId id="2147483679" r:id="rId7"/>
+    <p:sldLayoutId id="2147483680" r:id="rId8"/>
+    <p:sldLayoutId id="2147483681" r:id="rId9"/>
+    <p:sldLayoutId id="2147483682" r:id="rId10"/>
+    <p:sldLayoutId id="2147483683" r:id="rId11"/>
   </p:sldLayoutIdLst>
   <p:txStyles>
     <p:titleStyle>
-      <a:lvl1pPr algn="l" defTabSz="914400" rtl="0" eaLnBrk="1" latinLnBrk="1" hangingPunct="1">
+      <a:lvl1pPr algn="l" defTabSz="683880" rtl="0" eaLnBrk="1" latinLnBrk="1" hangingPunct="1">
         <a:lnSpc>
           <a:spcPct val="90000"/>
         </a:lnSpc>
@@ -2694,7 +2719,7 @@
           <a:spcPct val="0"/>
         </a:spcBef>
         <a:buNone/>
-        <a:defRPr sz="4400" kern="1200">
+        <a:defRPr sz="3291" kern="1200">
           <a:solidFill>
             <a:schemeClr val="tx1"/>
           </a:solidFill>
@@ -2705,16 +2730,16 @@
       </a:lvl1pPr>
     </p:titleStyle>
     <p:bodyStyle>
-      <a:lvl1pPr marL="228600" indent="-228600" algn="l" defTabSz="914400" rtl="0" eaLnBrk="1" latinLnBrk="1" hangingPunct="1">
+      <a:lvl1pPr marL="170970" indent="-170970" algn="l" defTabSz="683880" rtl="0" eaLnBrk="1" latinLnBrk="1" hangingPunct="1">
         <a:lnSpc>
           <a:spcPct val="90000"/>
         </a:lnSpc>
         <a:spcBef>
-          <a:spcPts val="1000"/>
+          <a:spcPts val="748"/>
         </a:spcBef>
         <a:buFont typeface="Arial" panose="020B0604020202020204" pitchFamily="34" charset="0"/>
         <a:buChar char="•"/>
-        <a:defRPr sz="2800" kern="1200">
+        <a:defRPr sz="2094" kern="1200">
           <a:solidFill>
             <a:schemeClr val="tx1"/>
           </a:solidFill>
@@ -2723,16 +2748,16 @@
           <a:cs typeface="+mn-cs"/>
         </a:defRPr>
       </a:lvl1pPr>
-      <a:lvl2pPr marL="685800" indent="-228600" algn="l" defTabSz="914400" rtl="0" eaLnBrk="1" latinLnBrk="1" hangingPunct="1">
+      <a:lvl2pPr marL="512910" indent="-170970" algn="l" defTabSz="683880" rtl="0" eaLnBrk="1" latinLnBrk="1" hangingPunct="1">
         <a:lnSpc>
           <a:spcPct val="90000"/>
         </a:lnSpc>
         <a:spcBef>
-          <a:spcPts val="500"/>
+          <a:spcPts val="374"/>
         </a:spcBef>
         <a:buFont typeface="Arial" panose="020B0604020202020204" pitchFamily="34" charset="0"/>
         <a:buChar char="•"/>
-        <a:defRPr sz="2400" kern="1200">
+        <a:defRPr sz="1795" kern="1200">
           <a:solidFill>
             <a:schemeClr val="tx1"/>
           </a:solidFill>
@@ -2741,16 +2766,16 @@
           <a:cs typeface="+mn-cs"/>
         </a:defRPr>
       </a:lvl2pPr>
-      <a:lvl3pPr marL="1143000" indent="-228600" algn="l" defTabSz="914400" rtl="0" eaLnBrk="1" latinLnBrk="1" hangingPunct="1">
+      <a:lvl3pPr marL="854850" indent="-170970" algn="l" defTabSz="683880" rtl="0" eaLnBrk="1" latinLnBrk="1" hangingPunct="1">
         <a:lnSpc>
           <a:spcPct val="90000"/>
         </a:lnSpc>
         <a:spcBef>
-          <a:spcPts val="500"/>
+          <a:spcPts val="374"/>
         </a:spcBef>
         <a:buFont typeface="Arial" panose="020B0604020202020204" pitchFamily="34" charset="0"/>
         <a:buChar char="•"/>
-        <a:defRPr sz="2000" kern="1200">
+        <a:defRPr sz="1496" kern="1200">
           <a:solidFill>
             <a:schemeClr val="tx1"/>
           </a:solidFill>
@@ -2759,16 +2784,16 @@
           <a:cs typeface="+mn-cs"/>
         </a:defRPr>
       </a:lvl3pPr>
-      <a:lvl4pPr marL="1600200" indent="-228600" algn="l" defTabSz="914400" rtl="0" eaLnBrk="1" latinLnBrk="1" hangingPunct="1">
+      <a:lvl4pPr marL="1196790" indent="-170970" algn="l" defTabSz="683880" rtl="0" eaLnBrk="1" latinLnBrk="1" hangingPunct="1">
         <a:lnSpc>
           <a:spcPct val="90000"/>
         </a:lnSpc>
         <a:spcBef>
-          <a:spcPts val="500"/>
+          <a:spcPts val="374"/>
         </a:spcBef>
         <a:buFont typeface="Arial" panose="020B0604020202020204" pitchFamily="34" charset="0"/>
         <a:buChar char="•"/>
-        <a:defRPr sz="1800" kern="1200">
+        <a:defRPr sz="1346" kern="1200">
           <a:solidFill>
             <a:schemeClr val="tx1"/>
           </a:solidFill>
@@ -2777,16 +2802,16 @@
           <a:cs typeface="+mn-cs"/>
         </a:defRPr>
       </a:lvl4pPr>
-      <a:lvl5pPr marL="2057400" indent="-228600" algn="l" defTabSz="914400" rtl="0" eaLnBrk="1" latinLnBrk="1" hangingPunct="1">
+      <a:lvl5pPr marL="1538729" indent="-170970" algn="l" defTabSz="683880" rtl="0" eaLnBrk="1" latinLnBrk="1" hangingPunct="1">
         <a:lnSpc>
           <a:spcPct val="90000"/>
         </a:lnSpc>
         <a:spcBef>
-          <a:spcPts val="500"/>
+          <a:spcPts val="374"/>
         </a:spcBef>
         <a:buFont typeface="Arial" panose="020B0604020202020204" pitchFamily="34" charset="0"/>
         <a:buChar char="•"/>
-        <a:defRPr sz="1800" kern="1200">
+        <a:defRPr sz="1346" kern="1200">
           <a:solidFill>
             <a:schemeClr val="tx1"/>
           </a:solidFill>
@@ -2795,16 +2820,16 @@
           <a:cs typeface="+mn-cs"/>
         </a:defRPr>
       </a:lvl5pPr>
-      <a:lvl6pPr marL="2514600" indent="-228600" algn="l" defTabSz="914400" rtl="0" eaLnBrk="1" latinLnBrk="1" hangingPunct="1">
+      <a:lvl6pPr marL="1880669" indent="-170970" algn="l" defTabSz="683880" rtl="0" eaLnBrk="1" latinLnBrk="1" hangingPunct="1">
         <a:lnSpc>
           <a:spcPct val="90000"/>
         </a:lnSpc>
         <a:spcBef>
-          <a:spcPts val="500"/>
+          <a:spcPts val="374"/>
         </a:spcBef>
         <a:buFont typeface="Arial" panose="020B0604020202020204" pitchFamily="34" charset="0"/>
         <a:buChar char="•"/>
-        <a:defRPr sz="1800" kern="1200">
+        <a:defRPr sz="1346" kern="1200">
           <a:solidFill>
             <a:schemeClr val="tx1"/>
           </a:solidFill>
@@ -2813,16 +2838,16 @@
           <a:cs typeface="+mn-cs"/>
         </a:defRPr>
       </a:lvl6pPr>
-      <a:lvl7pPr marL="2971800" indent="-228600" algn="l" defTabSz="914400" rtl="0" eaLnBrk="1" latinLnBrk="1" hangingPunct="1">
+      <a:lvl7pPr marL="2222609" indent="-170970" algn="l" defTabSz="683880" rtl="0" eaLnBrk="1" latinLnBrk="1" hangingPunct="1">
         <a:lnSpc>
           <a:spcPct val="90000"/>
         </a:lnSpc>
         <a:spcBef>
-          <a:spcPts val="500"/>
+          <a:spcPts val="374"/>
         </a:spcBef>
         <a:buFont typeface="Arial" panose="020B0604020202020204" pitchFamily="34" charset="0"/>
         <a:buChar char="•"/>
-        <a:defRPr sz="1800" kern="1200">
+        <a:defRPr sz="1346" kern="1200">
           <a:solidFill>
             <a:schemeClr val="tx1"/>
           </a:solidFill>
@@ -2831,16 +2856,16 @@
           <a:cs typeface="+mn-cs"/>
         </a:defRPr>
       </a:lvl7pPr>
-      <a:lvl8pPr marL="3429000" indent="-228600" algn="l" defTabSz="914400" rtl="0" eaLnBrk="1" latinLnBrk="1" hangingPunct="1">
+      <a:lvl8pPr marL="2564549" indent="-170970" algn="l" defTabSz="683880" rtl="0" eaLnBrk="1" latinLnBrk="1" hangingPunct="1">
         <a:lnSpc>
           <a:spcPct val="90000"/>
         </a:lnSpc>
         <a:spcBef>
-          <a:spcPts val="500"/>
+          <a:spcPts val="374"/>
         </a:spcBef>
         <a:buFont typeface="Arial" panose="020B0604020202020204" pitchFamily="34" charset="0"/>
         <a:buChar char="•"/>
-        <a:defRPr sz="1800" kern="1200">
+        <a:defRPr sz="1346" kern="1200">
           <a:solidFill>
             <a:schemeClr val="tx1"/>
           </a:solidFill>
@@ -2849,16 +2874,16 @@
           <a:cs typeface="+mn-cs"/>
         </a:defRPr>
       </a:lvl8pPr>
-      <a:lvl9pPr marL="3886200" indent="-228600" algn="l" defTabSz="914400" rtl="0" eaLnBrk="1" latinLnBrk="1" hangingPunct="1">
+      <a:lvl9pPr marL="2906489" indent="-170970" algn="l" defTabSz="683880" rtl="0" eaLnBrk="1" latinLnBrk="1" hangingPunct="1">
         <a:lnSpc>
           <a:spcPct val="90000"/>
         </a:lnSpc>
         <a:spcBef>
-          <a:spcPts val="500"/>
+          <a:spcPts val="374"/>
         </a:spcBef>
         <a:buFont typeface="Arial" panose="020B0604020202020204" pitchFamily="34" charset="0"/>
         <a:buChar char="•"/>
-        <a:defRPr sz="1800" kern="1200">
+        <a:defRPr sz="1346" kern="1200">
           <a:solidFill>
             <a:schemeClr val="tx1"/>
           </a:solidFill>
@@ -2872,8 +2897,8 @@
       <a:defPPr>
         <a:defRPr lang="en-US"/>
       </a:defPPr>
-      <a:lvl1pPr marL="0" algn="l" defTabSz="914400" rtl="0" eaLnBrk="1" latinLnBrk="1" hangingPunct="1">
-        <a:defRPr sz="1800" kern="1200">
+      <a:lvl1pPr marL="0" algn="l" defTabSz="683880" rtl="0" eaLnBrk="1" latinLnBrk="1" hangingPunct="1">
+        <a:defRPr sz="1346" kern="1200">
           <a:solidFill>
             <a:schemeClr val="tx1"/>
           </a:solidFill>
@@ -2882,8 +2907,8 @@
           <a:cs typeface="+mn-cs"/>
         </a:defRPr>
       </a:lvl1pPr>
-      <a:lvl2pPr marL="457200" algn="l" defTabSz="914400" rtl="0" eaLnBrk="1" latinLnBrk="1" hangingPunct="1">
-        <a:defRPr sz="1800" kern="1200">
+      <a:lvl2pPr marL="341940" algn="l" defTabSz="683880" rtl="0" eaLnBrk="1" latinLnBrk="1" hangingPunct="1">
+        <a:defRPr sz="1346" kern="1200">
           <a:solidFill>
             <a:schemeClr val="tx1"/>
           </a:solidFill>
@@ -2892,8 +2917,8 @@
           <a:cs typeface="+mn-cs"/>
         </a:defRPr>
       </a:lvl2pPr>
-      <a:lvl3pPr marL="914400" algn="l" defTabSz="914400" rtl="0" eaLnBrk="1" latinLnBrk="1" hangingPunct="1">
-        <a:defRPr sz="1800" kern="1200">
+      <a:lvl3pPr marL="683880" algn="l" defTabSz="683880" rtl="0" eaLnBrk="1" latinLnBrk="1" hangingPunct="1">
+        <a:defRPr sz="1346" kern="1200">
           <a:solidFill>
             <a:schemeClr val="tx1"/>
           </a:solidFill>
@@ -2902,8 +2927,8 @@
           <a:cs typeface="+mn-cs"/>
         </a:defRPr>
       </a:lvl3pPr>
-      <a:lvl4pPr marL="1371600" algn="l" defTabSz="914400" rtl="0" eaLnBrk="1" latinLnBrk="1" hangingPunct="1">
-        <a:defRPr sz="1800" kern="1200">
+      <a:lvl4pPr marL="1025820" algn="l" defTabSz="683880" rtl="0" eaLnBrk="1" latinLnBrk="1" hangingPunct="1">
+        <a:defRPr sz="1346" kern="1200">
           <a:solidFill>
             <a:schemeClr val="tx1"/>
           </a:solidFill>
@@ -2912,8 +2937,8 @@
           <a:cs typeface="+mn-cs"/>
         </a:defRPr>
       </a:lvl4pPr>
-      <a:lvl5pPr marL="1828800" algn="l" defTabSz="914400" rtl="0" eaLnBrk="1" latinLnBrk="1" hangingPunct="1">
-        <a:defRPr sz="1800" kern="1200">
+      <a:lvl5pPr marL="1367760" algn="l" defTabSz="683880" rtl="0" eaLnBrk="1" latinLnBrk="1" hangingPunct="1">
+        <a:defRPr sz="1346" kern="1200">
           <a:solidFill>
             <a:schemeClr val="tx1"/>
           </a:solidFill>
@@ -2922,8 +2947,8 @@
           <a:cs typeface="+mn-cs"/>
         </a:defRPr>
       </a:lvl5pPr>
-      <a:lvl6pPr marL="2286000" algn="l" defTabSz="914400" rtl="0" eaLnBrk="1" latinLnBrk="1" hangingPunct="1">
-        <a:defRPr sz="1800" kern="1200">
+      <a:lvl6pPr marL="1709699" algn="l" defTabSz="683880" rtl="0" eaLnBrk="1" latinLnBrk="1" hangingPunct="1">
+        <a:defRPr sz="1346" kern="1200">
           <a:solidFill>
             <a:schemeClr val="tx1"/>
           </a:solidFill>
@@ -2932,8 +2957,8 @@
           <a:cs typeface="+mn-cs"/>
         </a:defRPr>
       </a:lvl6pPr>
-      <a:lvl7pPr marL="2743200" algn="l" defTabSz="914400" rtl="0" eaLnBrk="1" latinLnBrk="1" hangingPunct="1">
-        <a:defRPr sz="1800" kern="1200">
+      <a:lvl7pPr marL="2051639" algn="l" defTabSz="683880" rtl="0" eaLnBrk="1" latinLnBrk="1" hangingPunct="1">
+        <a:defRPr sz="1346" kern="1200">
           <a:solidFill>
             <a:schemeClr val="tx1"/>
           </a:solidFill>
@@ -2942,8 +2967,8 @@
           <a:cs typeface="+mn-cs"/>
         </a:defRPr>
       </a:lvl7pPr>
-      <a:lvl8pPr marL="3200400" algn="l" defTabSz="914400" rtl="0" eaLnBrk="1" latinLnBrk="1" hangingPunct="1">
-        <a:defRPr sz="1800" kern="1200">
+      <a:lvl8pPr marL="2393579" algn="l" defTabSz="683880" rtl="0" eaLnBrk="1" latinLnBrk="1" hangingPunct="1">
+        <a:defRPr sz="1346" kern="1200">
           <a:solidFill>
             <a:schemeClr val="tx1"/>
           </a:solidFill>
@@ -2952,8 +2977,8 @@
           <a:cs typeface="+mn-cs"/>
         </a:defRPr>
       </a:lvl8pPr>
-      <a:lvl9pPr marL="3657600" algn="l" defTabSz="914400" rtl="0" eaLnBrk="1" latinLnBrk="1" hangingPunct="1">
-        <a:defRPr sz="1800" kern="1200">
+      <a:lvl9pPr marL="2735519" algn="l" defTabSz="683880" rtl="0" eaLnBrk="1" latinLnBrk="1" hangingPunct="1">
+        <a:defRPr sz="1346" kern="1200">
           <a:solidFill>
             <a:schemeClr val="tx1"/>
           </a:solidFill>
@@ -2968,6 +2993,2308 @@
 </file>
 
 <file path=ppt/slides/slide1.xml><?xml version="1.0" encoding="utf-8"?>
+<p:sld xmlns:a="http://schemas.openxmlformats.org/drawingml/2006/main" xmlns:r="http://schemas.openxmlformats.org/officeDocument/2006/relationships" xmlns:p="http://schemas.openxmlformats.org/presentationml/2006/main">
+  <p:cSld>
+    <p:spTree>
+      <p:nvGrpSpPr>
+        <p:cNvPr id="1" name="">
+          <a:extLst>
+            <a:ext uri="{FF2B5EF4-FFF2-40B4-BE49-F238E27FC236}">
+              <a16:creationId xmlns:a16="http://schemas.microsoft.com/office/drawing/2014/main" id="{D40AE6E7-1334-FB9C-03E5-5CD9936752E4}"/>
+            </a:ext>
+          </a:extLst>
+        </p:cNvPr>
+        <p:cNvGrpSpPr/>
+        <p:nvPr/>
+      </p:nvGrpSpPr>
+      <p:grpSpPr>
+        <a:xfrm>
+          <a:off x="0" y="0"/>
+          <a:ext cx="0" cy="0"/>
+          <a:chOff x="0" y="0"/>
+          <a:chExt cx="0" cy="0"/>
+        </a:xfrm>
+      </p:grpSpPr>
+      <p:sp>
+        <p:nvSpPr>
+          <p:cNvPr id="3" name="직사각형 2">
+            <a:extLst>
+              <a:ext uri="{FF2B5EF4-FFF2-40B4-BE49-F238E27FC236}">
+                <a16:creationId xmlns:a16="http://schemas.microsoft.com/office/drawing/2014/main" id="{D9AE0DF4-F21D-A3FA-D60D-173D8DCF7E35}"/>
+              </a:ext>
+            </a:extLst>
+          </p:cNvPr>
+          <p:cNvSpPr/>
+          <p:nvPr/>
+        </p:nvSpPr>
+        <p:spPr>
+          <a:xfrm rot="16200000">
+            <a:off x="855663" y="-854869"/>
+            <a:ext cx="5129213" cy="6838950"/>
+          </a:xfrm>
+          <a:prstGeom prst="rect">
+            <a:avLst/>
+          </a:prstGeom>
+          <a:solidFill>
+            <a:srgbClr val="ABBCA9"/>
+          </a:solidFill>
+          <a:ln>
+            <a:noFill/>
+          </a:ln>
+        </p:spPr>
+        <p:style>
+          <a:lnRef idx="2">
+            <a:schemeClr val="accent1">
+              <a:shade val="15000"/>
+            </a:schemeClr>
+          </a:lnRef>
+          <a:fillRef idx="1">
+            <a:schemeClr val="accent1"/>
+          </a:fillRef>
+          <a:effectRef idx="0">
+            <a:schemeClr val="accent1"/>
+          </a:effectRef>
+          <a:fontRef idx="minor">
+            <a:schemeClr val="lt1"/>
+          </a:fontRef>
+        </p:style>
+        <p:txBody>
+          <a:bodyPr rtlCol="0" anchor="ctr"/>
+          <a:lstStyle/>
+          <a:p>
+            <a:pPr algn="ctr"/>
+            <a:endParaRPr lang="ko-KR" altLang="en-US" sz="2081"/>
+          </a:p>
+        </p:txBody>
+      </p:sp>
+      <p:pic>
+        <p:nvPicPr>
+          <p:cNvPr id="5" name="그림 4">
+            <a:extLst>
+              <a:ext uri="{FF2B5EF4-FFF2-40B4-BE49-F238E27FC236}">
+                <a16:creationId xmlns:a16="http://schemas.microsoft.com/office/drawing/2014/main" id="{3CB842A6-E900-33CD-23BF-6A4A9FF85617}"/>
+              </a:ext>
+            </a:extLst>
+          </p:cNvPr>
+          <p:cNvPicPr>
+            <a:picLocks noChangeAspect="1"/>
+          </p:cNvPicPr>
+          <p:nvPr/>
+        </p:nvPicPr>
+        <p:blipFill>
+          <a:blip r:embed="rId2">
+            <a:extLst>
+              <a:ext uri="{28A0092B-C50C-407E-A947-70E740481C1C}">
+                <a14:useLocalDpi xmlns:a14="http://schemas.microsoft.com/office/drawing/2010/main" val="0"/>
+              </a:ext>
+            </a:extLst>
+          </a:blip>
+          <a:stretch>
+            <a:fillRect/>
+          </a:stretch>
+        </p:blipFill>
+        <p:spPr>
+          <a:xfrm>
+            <a:off x="3163615" y="-189669"/>
+            <a:ext cx="3672368" cy="5508551"/>
+          </a:xfrm>
+          <a:prstGeom prst="rect">
+            <a:avLst/>
+          </a:prstGeom>
+        </p:spPr>
+      </p:pic>
+      <p:sp>
+        <p:nvSpPr>
+          <p:cNvPr id="7" name="TextBox 6">
+            <a:extLst>
+              <a:ext uri="{FF2B5EF4-FFF2-40B4-BE49-F238E27FC236}">
+                <a16:creationId xmlns:a16="http://schemas.microsoft.com/office/drawing/2014/main" id="{90A112B7-0351-9C37-A356-E7793DA8B933}"/>
+              </a:ext>
+            </a:extLst>
+          </p:cNvPr>
+          <p:cNvSpPr txBox="1"/>
+          <p:nvPr/>
+        </p:nvSpPr>
+        <p:spPr>
+          <a:xfrm>
+            <a:off x="310266" y="1039261"/>
+            <a:ext cx="4351732" cy="1243289"/>
+          </a:xfrm>
+          <a:prstGeom prst="rect">
+            <a:avLst/>
+          </a:prstGeom>
+          <a:noFill/>
+        </p:spPr>
+        <p:txBody>
+          <a:bodyPr wrap="square">
+            <a:spAutoFit/>
+          </a:bodyPr>
+          <a:lstStyle>
+            <a:defPPr>
+              <a:defRPr lang="en-US"/>
+            </a:defPPr>
+            <a:lvl1pPr marL="0" algn="l" defTabSz="457200" rtl="0" eaLnBrk="1" latinLnBrk="0" hangingPunct="1">
+              <a:defRPr sz="1800" kern="1200">
+                <a:solidFill>
+                  <a:schemeClr val="tx1"/>
+                </a:solidFill>
+                <a:latin typeface="+mn-lt"/>
+                <a:ea typeface="+mn-ea"/>
+                <a:cs typeface="+mn-cs"/>
+              </a:defRPr>
+            </a:lvl1pPr>
+            <a:lvl2pPr marL="457200" algn="l" defTabSz="457200" rtl="0" eaLnBrk="1" latinLnBrk="0" hangingPunct="1">
+              <a:defRPr sz="1800" kern="1200">
+                <a:solidFill>
+                  <a:schemeClr val="tx1"/>
+                </a:solidFill>
+                <a:latin typeface="+mn-lt"/>
+                <a:ea typeface="+mn-ea"/>
+                <a:cs typeface="+mn-cs"/>
+              </a:defRPr>
+            </a:lvl2pPr>
+            <a:lvl3pPr marL="914400" algn="l" defTabSz="457200" rtl="0" eaLnBrk="1" latinLnBrk="0" hangingPunct="1">
+              <a:defRPr sz="1800" kern="1200">
+                <a:solidFill>
+                  <a:schemeClr val="tx1"/>
+                </a:solidFill>
+                <a:latin typeface="+mn-lt"/>
+                <a:ea typeface="+mn-ea"/>
+                <a:cs typeface="+mn-cs"/>
+              </a:defRPr>
+            </a:lvl3pPr>
+            <a:lvl4pPr marL="1371600" algn="l" defTabSz="457200" rtl="0" eaLnBrk="1" latinLnBrk="0" hangingPunct="1">
+              <a:defRPr sz="1800" kern="1200">
+                <a:solidFill>
+                  <a:schemeClr val="tx1"/>
+                </a:solidFill>
+                <a:latin typeface="+mn-lt"/>
+                <a:ea typeface="+mn-ea"/>
+                <a:cs typeface="+mn-cs"/>
+              </a:defRPr>
+            </a:lvl4pPr>
+            <a:lvl5pPr marL="1828800" algn="l" defTabSz="457200" rtl="0" eaLnBrk="1" latinLnBrk="0" hangingPunct="1">
+              <a:defRPr sz="1800" kern="1200">
+                <a:solidFill>
+                  <a:schemeClr val="tx1"/>
+                </a:solidFill>
+                <a:latin typeface="+mn-lt"/>
+                <a:ea typeface="+mn-ea"/>
+                <a:cs typeface="+mn-cs"/>
+              </a:defRPr>
+            </a:lvl5pPr>
+            <a:lvl6pPr marL="2286000" algn="l" defTabSz="457200" rtl="0" eaLnBrk="1" latinLnBrk="0" hangingPunct="1">
+              <a:defRPr sz="1800" kern="1200">
+                <a:solidFill>
+                  <a:schemeClr val="tx1"/>
+                </a:solidFill>
+                <a:latin typeface="+mn-lt"/>
+                <a:ea typeface="+mn-ea"/>
+                <a:cs typeface="+mn-cs"/>
+              </a:defRPr>
+            </a:lvl6pPr>
+            <a:lvl7pPr marL="2743200" algn="l" defTabSz="457200" rtl="0" eaLnBrk="1" latinLnBrk="0" hangingPunct="1">
+              <a:defRPr sz="1800" kern="1200">
+                <a:solidFill>
+                  <a:schemeClr val="tx1"/>
+                </a:solidFill>
+                <a:latin typeface="+mn-lt"/>
+                <a:ea typeface="+mn-ea"/>
+                <a:cs typeface="+mn-cs"/>
+              </a:defRPr>
+            </a:lvl7pPr>
+            <a:lvl8pPr marL="3200400" algn="l" defTabSz="457200" rtl="0" eaLnBrk="1" latinLnBrk="0" hangingPunct="1">
+              <a:defRPr sz="1800" kern="1200">
+                <a:solidFill>
+                  <a:schemeClr val="tx1"/>
+                </a:solidFill>
+                <a:latin typeface="+mn-lt"/>
+                <a:ea typeface="+mn-ea"/>
+                <a:cs typeface="+mn-cs"/>
+              </a:defRPr>
+            </a:lvl8pPr>
+            <a:lvl9pPr marL="3657600" algn="l" defTabSz="457200" rtl="0" eaLnBrk="1" latinLnBrk="0" hangingPunct="1">
+              <a:defRPr sz="1800" kern="1200">
+                <a:solidFill>
+                  <a:schemeClr val="tx1"/>
+                </a:solidFill>
+                <a:latin typeface="+mn-lt"/>
+                <a:ea typeface="+mn-ea"/>
+                <a:cs typeface="+mn-cs"/>
+              </a:defRPr>
+            </a:lvl9pPr>
+          </a:lstStyle>
+          <a:p>
+            <a:r>
+              <a:rPr lang="en-US" altLang="ko-KR" sz="7500" dirty="0">
+                <a:solidFill>
+                  <a:schemeClr val="tx1">
+                    <a:lumMod val="95000"/>
+                    <a:lumOff val="5000"/>
+                  </a:schemeClr>
+                </a:solidFill>
+                <a:latin typeface="Cavorting" panose="000B0504000000000004" pitchFamily="34" charset="0"/>
+              </a:rPr>
+              <a:t>Daily sketch</a:t>
+            </a:r>
+            <a:endParaRPr lang="ko-KR" altLang="en-US" sz="7500" dirty="0">
+              <a:solidFill>
+                <a:schemeClr val="tx1">
+                  <a:lumMod val="95000"/>
+                  <a:lumOff val="5000"/>
+                </a:schemeClr>
+              </a:solidFill>
+              <a:latin typeface="Cavorting" panose="000B0504000000000004" pitchFamily="34" charset="0"/>
+            </a:endParaRPr>
+          </a:p>
+        </p:txBody>
+      </p:sp>
+      <p:sp>
+        <p:nvSpPr>
+          <p:cNvPr id="9" name="TextBox 8">
+            <a:extLst>
+              <a:ext uri="{FF2B5EF4-FFF2-40B4-BE49-F238E27FC236}">
+                <a16:creationId xmlns:a16="http://schemas.microsoft.com/office/drawing/2014/main" id="{BA33C54D-E7EC-D044-5943-F7D7B158DABE}"/>
+              </a:ext>
+            </a:extLst>
+          </p:cNvPr>
+          <p:cNvSpPr txBox="1"/>
+          <p:nvPr/>
+        </p:nvSpPr>
+        <p:spPr>
+          <a:xfrm>
+            <a:off x="310266" y="2164496"/>
+            <a:ext cx="4351732" cy="400110"/>
+          </a:xfrm>
+          <a:prstGeom prst="rect">
+            <a:avLst/>
+          </a:prstGeom>
+          <a:noFill/>
+        </p:spPr>
+        <p:txBody>
+          <a:bodyPr wrap="square">
+            <a:spAutoFit/>
+          </a:bodyPr>
+          <a:lstStyle>
+            <a:defPPr>
+              <a:defRPr lang="en-US"/>
+            </a:defPPr>
+            <a:lvl1pPr marL="0" algn="l" defTabSz="457200" rtl="0" eaLnBrk="1" latinLnBrk="0" hangingPunct="1">
+              <a:defRPr sz="1800" kern="1200">
+                <a:solidFill>
+                  <a:schemeClr val="tx1"/>
+                </a:solidFill>
+                <a:latin typeface="+mn-lt"/>
+                <a:ea typeface="+mn-ea"/>
+                <a:cs typeface="+mn-cs"/>
+              </a:defRPr>
+            </a:lvl1pPr>
+            <a:lvl2pPr marL="457200" algn="l" defTabSz="457200" rtl="0" eaLnBrk="1" latinLnBrk="0" hangingPunct="1">
+              <a:defRPr sz="1800" kern="1200">
+                <a:solidFill>
+                  <a:schemeClr val="tx1"/>
+                </a:solidFill>
+                <a:latin typeface="+mn-lt"/>
+                <a:ea typeface="+mn-ea"/>
+                <a:cs typeface="+mn-cs"/>
+              </a:defRPr>
+            </a:lvl2pPr>
+            <a:lvl3pPr marL="914400" algn="l" defTabSz="457200" rtl="0" eaLnBrk="1" latinLnBrk="0" hangingPunct="1">
+              <a:defRPr sz="1800" kern="1200">
+                <a:solidFill>
+                  <a:schemeClr val="tx1"/>
+                </a:solidFill>
+                <a:latin typeface="+mn-lt"/>
+                <a:ea typeface="+mn-ea"/>
+                <a:cs typeface="+mn-cs"/>
+              </a:defRPr>
+            </a:lvl3pPr>
+            <a:lvl4pPr marL="1371600" algn="l" defTabSz="457200" rtl="0" eaLnBrk="1" latinLnBrk="0" hangingPunct="1">
+              <a:defRPr sz="1800" kern="1200">
+                <a:solidFill>
+                  <a:schemeClr val="tx1"/>
+                </a:solidFill>
+                <a:latin typeface="+mn-lt"/>
+                <a:ea typeface="+mn-ea"/>
+                <a:cs typeface="+mn-cs"/>
+              </a:defRPr>
+            </a:lvl4pPr>
+            <a:lvl5pPr marL="1828800" algn="l" defTabSz="457200" rtl="0" eaLnBrk="1" latinLnBrk="0" hangingPunct="1">
+              <a:defRPr sz="1800" kern="1200">
+                <a:solidFill>
+                  <a:schemeClr val="tx1"/>
+                </a:solidFill>
+                <a:latin typeface="+mn-lt"/>
+                <a:ea typeface="+mn-ea"/>
+                <a:cs typeface="+mn-cs"/>
+              </a:defRPr>
+            </a:lvl5pPr>
+            <a:lvl6pPr marL="2286000" algn="l" defTabSz="457200" rtl="0" eaLnBrk="1" latinLnBrk="0" hangingPunct="1">
+              <a:defRPr sz="1800" kern="1200">
+                <a:solidFill>
+                  <a:schemeClr val="tx1"/>
+                </a:solidFill>
+                <a:latin typeface="+mn-lt"/>
+                <a:ea typeface="+mn-ea"/>
+                <a:cs typeface="+mn-cs"/>
+              </a:defRPr>
+            </a:lvl6pPr>
+            <a:lvl7pPr marL="2743200" algn="l" defTabSz="457200" rtl="0" eaLnBrk="1" latinLnBrk="0" hangingPunct="1">
+              <a:defRPr sz="1800" kern="1200">
+                <a:solidFill>
+                  <a:schemeClr val="tx1"/>
+                </a:solidFill>
+                <a:latin typeface="+mn-lt"/>
+                <a:ea typeface="+mn-ea"/>
+                <a:cs typeface="+mn-cs"/>
+              </a:defRPr>
+            </a:lvl7pPr>
+            <a:lvl8pPr marL="3200400" algn="l" defTabSz="457200" rtl="0" eaLnBrk="1" latinLnBrk="0" hangingPunct="1">
+              <a:defRPr sz="1800" kern="1200">
+                <a:solidFill>
+                  <a:schemeClr val="tx1"/>
+                </a:solidFill>
+                <a:latin typeface="+mn-lt"/>
+                <a:ea typeface="+mn-ea"/>
+                <a:cs typeface="+mn-cs"/>
+              </a:defRPr>
+            </a:lvl8pPr>
+            <a:lvl9pPr marL="3657600" algn="l" defTabSz="457200" rtl="0" eaLnBrk="1" latinLnBrk="0" hangingPunct="1">
+              <a:defRPr sz="1800" kern="1200">
+                <a:solidFill>
+                  <a:schemeClr val="tx1"/>
+                </a:solidFill>
+                <a:latin typeface="+mn-lt"/>
+                <a:ea typeface="+mn-ea"/>
+                <a:cs typeface="+mn-cs"/>
+              </a:defRPr>
+            </a:lvl9pPr>
+          </a:lstStyle>
+          <a:p>
+            <a:r>
+              <a:rPr lang="en-US" altLang="ko-KR" sz="2000" dirty="0">
+                <a:solidFill>
+                  <a:schemeClr val="tx1">
+                    <a:lumMod val="95000"/>
+                    <a:lumOff val="5000"/>
+                  </a:schemeClr>
+                </a:solidFill>
+                <a:latin typeface="Cavorting" panose="000B0504000000000004" pitchFamily="34" charset="0"/>
+              </a:rPr>
+              <a:t>Draw together, keep the little days</a:t>
+            </a:r>
+            <a:endParaRPr lang="ko-KR" altLang="en-US" sz="2000" dirty="0">
+              <a:solidFill>
+                <a:schemeClr val="tx1">
+                  <a:lumMod val="95000"/>
+                  <a:lumOff val="5000"/>
+                </a:schemeClr>
+              </a:solidFill>
+              <a:latin typeface="Cavorting" panose="000B0504000000000004" pitchFamily="34" charset="0"/>
+            </a:endParaRPr>
+          </a:p>
+        </p:txBody>
+      </p:sp>
+    </p:spTree>
+    <p:extLst>
+      <p:ext uri="{BB962C8B-B14F-4D97-AF65-F5344CB8AC3E}">
+        <p14:creationId xmlns:p14="http://schemas.microsoft.com/office/powerpoint/2010/main" val="1684079366"/>
+      </p:ext>
+    </p:extLst>
+  </p:cSld>
+  <p:clrMapOvr>
+    <a:masterClrMapping/>
+  </p:clrMapOvr>
+</p:sld>
+</file>
+
+<file path=ppt/slides/slide2.xml><?xml version="1.0" encoding="utf-8"?>
+<p:sld xmlns:a="http://schemas.openxmlformats.org/drawingml/2006/main" xmlns:r="http://schemas.openxmlformats.org/officeDocument/2006/relationships" xmlns:p="http://schemas.openxmlformats.org/presentationml/2006/main">
+  <p:cSld>
+    <p:bg>
+      <p:bgPr>
+        <a:solidFill>
+          <a:srgbClr val="E6E9DE"/>
+        </a:solidFill>
+        <a:effectLst/>
+      </p:bgPr>
+    </p:bg>
+    <p:spTree>
+      <p:nvGrpSpPr>
+        <p:cNvPr id="1" name="">
+          <a:extLst>
+            <a:ext uri="{FF2B5EF4-FFF2-40B4-BE49-F238E27FC236}">
+              <a16:creationId xmlns:a16="http://schemas.microsoft.com/office/drawing/2014/main" id="{A4DD0260-AFB1-44AB-7DE0-F64234ACCEEB}"/>
+            </a:ext>
+          </a:extLst>
+        </p:cNvPr>
+        <p:cNvGrpSpPr/>
+        <p:nvPr/>
+      </p:nvGrpSpPr>
+      <p:grpSpPr>
+        <a:xfrm>
+          <a:off x="0" y="0"/>
+          <a:ext cx="0" cy="0"/>
+          <a:chOff x="0" y="0"/>
+          <a:chExt cx="0" cy="0"/>
+        </a:xfrm>
+      </p:grpSpPr>
+      <p:sp>
+        <p:nvSpPr>
+          <p:cNvPr id="40" name="사각형: 둥근 위쪽 모서리 39">
+            <a:extLst>
+              <a:ext uri="{FF2B5EF4-FFF2-40B4-BE49-F238E27FC236}">
+                <a16:creationId xmlns:a16="http://schemas.microsoft.com/office/drawing/2014/main" id="{B9710111-474E-774B-B255-DEE81A65DEC0}"/>
+              </a:ext>
+            </a:extLst>
+          </p:cNvPr>
+          <p:cNvSpPr/>
+          <p:nvPr/>
+        </p:nvSpPr>
+        <p:spPr>
+          <a:xfrm rot="16200000">
+            <a:off x="1107282" y="-604048"/>
+            <a:ext cx="5129214" cy="6337302"/>
+          </a:xfrm>
+          <a:prstGeom prst="round2SameRect">
+            <a:avLst>
+              <a:gd name="adj1" fmla="val 5525"/>
+              <a:gd name="adj2" fmla="val 0"/>
+            </a:avLst>
+          </a:prstGeom>
+          <a:solidFill>
+            <a:srgbClr val="FAF8F4"/>
+          </a:solidFill>
+          <a:ln>
+            <a:noFill/>
+          </a:ln>
+        </p:spPr>
+        <p:style>
+          <a:lnRef idx="2">
+            <a:schemeClr val="accent1">
+              <a:shade val="15000"/>
+            </a:schemeClr>
+          </a:lnRef>
+          <a:fillRef idx="1">
+            <a:schemeClr val="accent1"/>
+          </a:fillRef>
+          <a:effectRef idx="0">
+            <a:schemeClr val="accent1"/>
+          </a:effectRef>
+          <a:fontRef idx="minor">
+            <a:schemeClr val="lt1"/>
+          </a:fontRef>
+        </p:style>
+        <p:txBody>
+          <a:bodyPr rtlCol="0" anchor="ctr"/>
+          <a:lstStyle/>
+          <a:p>
+            <a:pPr algn="ctr"/>
+            <a:endParaRPr lang="ko-KR" altLang="en-US" sz="2081"/>
+          </a:p>
+        </p:txBody>
+      </p:sp>
+      <p:grpSp>
+        <p:nvGrpSpPr>
+          <p:cNvPr id="5" name="그룹 4">
+            <a:extLst>
+              <a:ext uri="{FF2B5EF4-FFF2-40B4-BE49-F238E27FC236}">
+                <a16:creationId xmlns:a16="http://schemas.microsoft.com/office/drawing/2014/main" id="{EC24AA38-BD30-F467-86DE-B4FD334123BD}"/>
+              </a:ext>
+            </a:extLst>
+          </p:cNvPr>
+          <p:cNvGrpSpPr/>
+          <p:nvPr/>
+        </p:nvGrpSpPr>
+        <p:grpSpPr>
+          <a:xfrm>
+            <a:off x="7267073" y="795"/>
+            <a:ext cx="766682" cy="5503044"/>
+            <a:chOff x="7197291" y="1354369"/>
+            <a:chExt cx="1025090" cy="7357831"/>
+          </a:xfrm>
+        </p:grpSpPr>
+        <p:sp>
+          <p:nvSpPr>
+            <p:cNvPr id="6" name="직사각형 5">
+              <a:extLst>
+                <a:ext uri="{FF2B5EF4-FFF2-40B4-BE49-F238E27FC236}">
+                  <a16:creationId xmlns:a16="http://schemas.microsoft.com/office/drawing/2014/main" id="{02ED0438-6AB4-642B-72F2-DFA60DBDC1B9}"/>
+                </a:ext>
+              </a:extLst>
+            </p:cNvPr>
+            <p:cNvSpPr/>
+            <p:nvPr/>
+          </p:nvSpPr>
+          <p:spPr>
+            <a:xfrm>
+              <a:off x="7197291" y="2616104"/>
+              <a:ext cx="1025090" cy="1049154"/>
+            </a:xfrm>
+            <a:prstGeom prst="rect">
+              <a:avLst/>
+            </a:prstGeom>
+            <a:solidFill>
+              <a:srgbClr val="ABBCA9"/>
+            </a:solidFill>
+            <a:ln>
+              <a:noFill/>
+            </a:ln>
+          </p:spPr>
+          <p:style>
+            <a:lnRef idx="2">
+              <a:schemeClr val="accent1">
+                <a:shade val="15000"/>
+              </a:schemeClr>
+            </a:lnRef>
+            <a:fillRef idx="1">
+              <a:schemeClr val="accent1"/>
+            </a:fillRef>
+            <a:effectRef idx="0">
+              <a:schemeClr val="accent1"/>
+            </a:effectRef>
+            <a:fontRef idx="minor">
+              <a:schemeClr val="lt1"/>
+            </a:fontRef>
+          </p:style>
+          <p:txBody>
+            <a:bodyPr rtlCol="0" anchor="ctr"/>
+            <a:lstStyle/>
+            <a:p>
+              <a:pPr algn="ctr"/>
+              <a:endParaRPr lang="ko-KR" altLang="en-US" sz="2081" dirty="0"/>
+            </a:p>
+          </p:txBody>
+        </p:sp>
+        <p:sp>
+          <p:nvSpPr>
+            <p:cNvPr id="7" name="직사각형 6">
+              <a:extLst>
+                <a:ext uri="{FF2B5EF4-FFF2-40B4-BE49-F238E27FC236}">
+                  <a16:creationId xmlns:a16="http://schemas.microsoft.com/office/drawing/2014/main" id="{C46B067F-88D6-E4A6-84BB-07F2A4D82489}"/>
+                </a:ext>
+              </a:extLst>
+            </p:cNvPr>
+            <p:cNvSpPr/>
+            <p:nvPr/>
+          </p:nvSpPr>
+          <p:spPr>
+            <a:xfrm>
+              <a:off x="7197291" y="6401309"/>
+              <a:ext cx="1025090" cy="1049154"/>
+            </a:xfrm>
+            <a:prstGeom prst="rect">
+              <a:avLst/>
+            </a:prstGeom>
+            <a:solidFill>
+              <a:srgbClr val="858585"/>
+            </a:solidFill>
+            <a:ln>
+              <a:noFill/>
+            </a:ln>
+          </p:spPr>
+          <p:style>
+            <a:lnRef idx="2">
+              <a:schemeClr val="accent1">
+                <a:shade val="15000"/>
+              </a:schemeClr>
+            </a:lnRef>
+            <a:fillRef idx="1">
+              <a:schemeClr val="accent1"/>
+            </a:fillRef>
+            <a:effectRef idx="0">
+              <a:schemeClr val="accent1"/>
+            </a:effectRef>
+            <a:fontRef idx="minor">
+              <a:schemeClr val="lt1"/>
+            </a:fontRef>
+          </p:style>
+          <p:txBody>
+            <a:bodyPr rtlCol="0" anchor="ctr"/>
+            <a:lstStyle/>
+            <a:p>
+              <a:pPr algn="ctr"/>
+              <a:endParaRPr lang="ko-KR" altLang="en-US" sz="2081"/>
+            </a:p>
+          </p:txBody>
+        </p:sp>
+        <p:sp>
+          <p:nvSpPr>
+            <p:cNvPr id="8" name="직사각형 7">
+              <a:extLst>
+                <a:ext uri="{FF2B5EF4-FFF2-40B4-BE49-F238E27FC236}">
+                  <a16:creationId xmlns:a16="http://schemas.microsoft.com/office/drawing/2014/main" id="{2E6904CF-E3C7-A6D2-A587-94FC0010F49C}"/>
+                </a:ext>
+              </a:extLst>
+            </p:cNvPr>
+            <p:cNvSpPr/>
+            <p:nvPr/>
+          </p:nvSpPr>
+          <p:spPr>
+            <a:xfrm>
+              <a:off x="7197291" y="7663046"/>
+              <a:ext cx="1025090" cy="1049154"/>
+            </a:xfrm>
+            <a:prstGeom prst="rect">
+              <a:avLst/>
+            </a:prstGeom>
+            <a:solidFill>
+              <a:srgbClr val="FAF8F4"/>
+            </a:solidFill>
+            <a:ln>
+              <a:noFill/>
+            </a:ln>
+          </p:spPr>
+          <p:style>
+            <a:lnRef idx="2">
+              <a:schemeClr val="accent1">
+                <a:shade val="15000"/>
+              </a:schemeClr>
+            </a:lnRef>
+            <a:fillRef idx="1">
+              <a:schemeClr val="accent1"/>
+            </a:fillRef>
+            <a:effectRef idx="0">
+              <a:schemeClr val="accent1"/>
+            </a:effectRef>
+            <a:fontRef idx="minor">
+              <a:schemeClr val="lt1"/>
+            </a:fontRef>
+          </p:style>
+          <p:txBody>
+            <a:bodyPr rtlCol="0" anchor="ctr"/>
+            <a:lstStyle/>
+            <a:p>
+              <a:pPr algn="ctr"/>
+              <a:endParaRPr lang="ko-KR" altLang="en-US" sz="2081"/>
+            </a:p>
+          </p:txBody>
+        </p:sp>
+        <p:sp>
+          <p:nvSpPr>
+            <p:cNvPr id="9" name="직사각형 8">
+              <a:extLst>
+                <a:ext uri="{FF2B5EF4-FFF2-40B4-BE49-F238E27FC236}">
+                  <a16:creationId xmlns:a16="http://schemas.microsoft.com/office/drawing/2014/main" id="{7986A018-DD98-E1CD-FA19-6636398142BB}"/>
+                </a:ext>
+              </a:extLst>
+            </p:cNvPr>
+            <p:cNvSpPr/>
+            <p:nvPr/>
+          </p:nvSpPr>
+          <p:spPr>
+            <a:xfrm>
+              <a:off x="7197291" y="3877839"/>
+              <a:ext cx="1025090" cy="1049154"/>
+            </a:xfrm>
+            <a:prstGeom prst="rect">
+              <a:avLst/>
+            </a:prstGeom>
+            <a:solidFill>
+              <a:srgbClr val="E6E9DE"/>
+            </a:solidFill>
+            <a:ln>
+              <a:noFill/>
+            </a:ln>
+          </p:spPr>
+          <p:style>
+            <a:lnRef idx="2">
+              <a:schemeClr val="accent1">
+                <a:shade val="15000"/>
+              </a:schemeClr>
+            </a:lnRef>
+            <a:fillRef idx="1">
+              <a:schemeClr val="accent1"/>
+            </a:fillRef>
+            <a:effectRef idx="0">
+              <a:schemeClr val="accent1"/>
+            </a:effectRef>
+            <a:fontRef idx="minor">
+              <a:schemeClr val="lt1"/>
+            </a:fontRef>
+          </p:style>
+          <p:txBody>
+            <a:bodyPr rtlCol="0" anchor="ctr"/>
+            <a:lstStyle/>
+            <a:p>
+              <a:pPr algn="ctr"/>
+              <a:endParaRPr lang="ko-KR" altLang="en-US" sz="2081"/>
+            </a:p>
+          </p:txBody>
+        </p:sp>
+        <p:sp>
+          <p:nvSpPr>
+            <p:cNvPr id="10" name="직사각형 9">
+              <a:extLst>
+                <a:ext uri="{FF2B5EF4-FFF2-40B4-BE49-F238E27FC236}">
+                  <a16:creationId xmlns:a16="http://schemas.microsoft.com/office/drawing/2014/main" id="{35CD42D5-9501-7D9A-EC1F-B41B14387B54}"/>
+                </a:ext>
+              </a:extLst>
+            </p:cNvPr>
+            <p:cNvSpPr/>
+            <p:nvPr/>
+          </p:nvSpPr>
+          <p:spPr>
+            <a:xfrm>
+              <a:off x="7197291" y="1354369"/>
+              <a:ext cx="1025090" cy="1049154"/>
+            </a:xfrm>
+            <a:prstGeom prst="rect">
+              <a:avLst/>
+            </a:prstGeom>
+            <a:solidFill>
+              <a:srgbClr val="CFC0BB"/>
+            </a:solidFill>
+            <a:ln>
+              <a:noFill/>
+            </a:ln>
+          </p:spPr>
+          <p:style>
+            <a:lnRef idx="2">
+              <a:schemeClr val="accent1">
+                <a:shade val="15000"/>
+              </a:schemeClr>
+            </a:lnRef>
+            <a:fillRef idx="1">
+              <a:schemeClr val="accent1"/>
+            </a:fillRef>
+            <a:effectRef idx="0">
+              <a:schemeClr val="accent1"/>
+            </a:effectRef>
+            <a:fontRef idx="minor">
+              <a:schemeClr val="lt1"/>
+            </a:fontRef>
+          </p:style>
+          <p:txBody>
+            <a:bodyPr rtlCol="0" anchor="ctr"/>
+            <a:lstStyle/>
+            <a:p>
+              <a:pPr algn="ctr"/>
+              <a:endParaRPr lang="ko-KR" altLang="en-US" sz="2081"/>
+            </a:p>
+          </p:txBody>
+        </p:sp>
+        <p:sp>
+          <p:nvSpPr>
+            <p:cNvPr id="11" name="직사각형 10">
+              <a:extLst>
+                <a:ext uri="{FF2B5EF4-FFF2-40B4-BE49-F238E27FC236}">
+                  <a16:creationId xmlns:a16="http://schemas.microsoft.com/office/drawing/2014/main" id="{3F6473B6-7B10-031E-47A3-B5D5D814B9CF}"/>
+                </a:ext>
+              </a:extLst>
+            </p:cNvPr>
+            <p:cNvSpPr/>
+            <p:nvPr/>
+          </p:nvSpPr>
+          <p:spPr>
+            <a:xfrm>
+              <a:off x="7197291" y="5139574"/>
+              <a:ext cx="1025090" cy="1049154"/>
+            </a:xfrm>
+            <a:prstGeom prst="rect">
+              <a:avLst/>
+            </a:prstGeom>
+            <a:solidFill>
+              <a:srgbClr val="1D2E4C"/>
+            </a:solidFill>
+            <a:ln>
+              <a:noFill/>
+            </a:ln>
+          </p:spPr>
+          <p:style>
+            <a:lnRef idx="2">
+              <a:schemeClr val="accent1">
+                <a:shade val="15000"/>
+              </a:schemeClr>
+            </a:lnRef>
+            <a:fillRef idx="1">
+              <a:schemeClr val="accent1"/>
+            </a:fillRef>
+            <a:effectRef idx="0">
+              <a:schemeClr val="accent1"/>
+            </a:effectRef>
+            <a:fontRef idx="minor">
+              <a:schemeClr val="lt1"/>
+            </a:fontRef>
+          </p:style>
+          <p:txBody>
+            <a:bodyPr rtlCol="0" anchor="ctr"/>
+            <a:lstStyle/>
+            <a:p>
+              <a:pPr algn="ctr"/>
+              <a:endParaRPr lang="ko-KR" altLang="en-US" sz="2081"/>
+            </a:p>
+          </p:txBody>
+        </p:sp>
+      </p:grpSp>
+      <p:sp>
+        <p:nvSpPr>
+          <p:cNvPr id="14" name="타원 13">
+            <a:extLst>
+              <a:ext uri="{FF2B5EF4-FFF2-40B4-BE49-F238E27FC236}">
+                <a16:creationId xmlns:a16="http://schemas.microsoft.com/office/drawing/2014/main" id="{60847759-EEC3-9A08-7F75-EA25B2E573AA}"/>
+              </a:ext>
+            </a:extLst>
+          </p:cNvPr>
+          <p:cNvSpPr/>
+          <p:nvPr/>
+        </p:nvSpPr>
+        <p:spPr>
+          <a:xfrm>
+            <a:off x="107950" y="1203458"/>
+            <a:ext cx="266700" cy="266700"/>
+          </a:xfrm>
+          <a:prstGeom prst="ellipse">
+            <a:avLst/>
+          </a:prstGeom>
+          <a:solidFill>
+            <a:srgbClr val="CFC0BB"/>
+          </a:solidFill>
+          <a:ln>
+            <a:noFill/>
+          </a:ln>
+        </p:spPr>
+        <p:style>
+          <a:lnRef idx="2">
+            <a:schemeClr val="accent1">
+              <a:shade val="15000"/>
+            </a:schemeClr>
+          </a:lnRef>
+          <a:fillRef idx="1">
+            <a:schemeClr val="accent1"/>
+          </a:fillRef>
+          <a:effectRef idx="0">
+            <a:schemeClr val="accent1"/>
+          </a:effectRef>
+          <a:fontRef idx="minor">
+            <a:schemeClr val="lt1"/>
+          </a:fontRef>
+        </p:style>
+        <p:txBody>
+          <a:bodyPr rtlCol="0" anchor="ctr"/>
+          <a:lstStyle/>
+          <a:p>
+            <a:pPr algn="ctr"/>
+            <a:endParaRPr lang="ko-KR" altLang="en-US" sz="2081"/>
+          </a:p>
+        </p:txBody>
+      </p:sp>
+      <p:sp>
+        <p:nvSpPr>
+          <p:cNvPr id="17" name="타원 16">
+            <a:extLst>
+              <a:ext uri="{FF2B5EF4-FFF2-40B4-BE49-F238E27FC236}">
+                <a16:creationId xmlns:a16="http://schemas.microsoft.com/office/drawing/2014/main" id="{CC426AE9-E2C5-D159-1DF5-56601B3D9606}"/>
+              </a:ext>
+            </a:extLst>
+          </p:cNvPr>
+          <p:cNvSpPr/>
+          <p:nvPr/>
+        </p:nvSpPr>
+        <p:spPr>
+          <a:xfrm>
+            <a:off x="107950" y="1729148"/>
+            <a:ext cx="266700" cy="266700"/>
+          </a:xfrm>
+          <a:prstGeom prst="ellipse">
+            <a:avLst/>
+          </a:prstGeom>
+          <a:solidFill>
+            <a:srgbClr val="CFC0BB"/>
+          </a:solidFill>
+          <a:ln>
+            <a:noFill/>
+          </a:ln>
+        </p:spPr>
+        <p:style>
+          <a:lnRef idx="2">
+            <a:schemeClr val="accent1">
+              <a:shade val="15000"/>
+            </a:schemeClr>
+          </a:lnRef>
+          <a:fillRef idx="1">
+            <a:schemeClr val="accent1"/>
+          </a:fillRef>
+          <a:effectRef idx="0">
+            <a:schemeClr val="accent1"/>
+          </a:effectRef>
+          <a:fontRef idx="minor">
+            <a:schemeClr val="lt1"/>
+          </a:fontRef>
+        </p:style>
+        <p:txBody>
+          <a:bodyPr rtlCol="0" anchor="ctr"/>
+          <a:lstStyle/>
+          <a:p>
+            <a:pPr algn="ctr"/>
+            <a:endParaRPr lang="ko-KR" altLang="en-US" sz="2081"/>
+          </a:p>
+        </p:txBody>
+      </p:sp>
+      <p:sp>
+        <p:nvSpPr>
+          <p:cNvPr id="18" name="타원 17">
+            <a:extLst>
+              <a:ext uri="{FF2B5EF4-FFF2-40B4-BE49-F238E27FC236}">
+                <a16:creationId xmlns:a16="http://schemas.microsoft.com/office/drawing/2014/main" id="{E10ED31C-2422-3134-75BB-3CB393518D27}"/>
+              </a:ext>
+            </a:extLst>
+          </p:cNvPr>
+          <p:cNvSpPr/>
+          <p:nvPr/>
+        </p:nvSpPr>
+        <p:spPr>
+          <a:xfrm>
+            <a:off x="107950" y="2254838"/>
+            <a:ext cx="266700" cy="266700"/>
+          </a:xfrm>
+          <a:prstGeom prst="ellipse">
+            <a:avLst/>
+          </a:prstGeom>
+          <a:solidFill>
+            <a:srgbClr val="CFC0BB"/>
+          </a:solidFill>
+          <a:ln>
+            <a:noFill/>
+          </a:ln>
+        </p:spPr>
+        <p:style>
+          <a:lnRef idx="2">
+            <a:schemeClr val="accent1">
+              <a:shade val="15000"/>
+            </a:schemeClr>
+          </a:lnRef>
+          <a:fillRef idx="1">
+            <a:schemeClr val="accent1"/>
+          </a:fillRef>
+          <a:effectRef idx="0">
+            <a:schemeClr val="accent1"/>
+          </a:effectRef>
+          <a:fontRef idx="minor">
+            <a:schemeClr val="lt1"/>
+          </a:fontRef>
+        </p:style>
+        <p:txBody>
+          <a:bodyPr rtlCol="0" anchor="ctr"/>
+          <a:lstStyle/>
+          <a:p>
+            <a:pPr algn="ctr"/>
+            <a:endParaRPr lang="ko-KR" altLang="en-US" sz="2081"/>
+          </a:p>
+        </p:txBody>
+      </p:sp>
+      <p:sp>
+        <p:nvSpPr>
+          <p:cNvPr id="19" name="타원 18">
+            <a:extLst>
+              <a:ext uri="{FF2B5EF4-FFF2-40B4-BE49-F238E27FC236}">
+                <a16:creationId xmlns:a16="http://schemas.microsoft.com/office/drawing/2014/main" id="{1A6E8F9A-E0DD-E539-CECA-79DC3A7AB6C0}"/>
+              </a:ext>
+            </a:extLst>
+          </p:cNvPr>
+          <p:cNvSpPr/>
+          <p:nvPr/>
+        </p:nvSpPr>
+        <p:spPr>
+          <a:xfrm>
+            <a:off x="107950" y="2780528"/>
+            <a:ext cx="266700" cy="266700"/>
+          </a:xfrm>
+          <a:prstGeom prst="ellipse">
+            <a:avLst/>
+          </a:prstGeom>
+          <a:solidFill>
+            <a:srgbClr val="CFC0BB"/>
+          </a:solidFill>
+          <a:ln>
+            <a:noFill/>
+          </a:ln>
+        </p:spPr>
+        <p:style>
+          <a:lnRef idx="2">
+            <a:schemeClr val="accent1">
+              <a:shade val="15000"/>
+            </a:schemeClr>
+          </a:lnRef>
+          <a:fillRef idx="1">
+            <a:schemeClr val="accent1"/>
+          </a:fillRef>
+          <a:effectRef idx="0">
+            <a:schemeClr val="accent1"/>
+          </a:effectRef>
+          <a:fontRef idx="minor">
+            <a:schemeClr val="lt1"/>
+          </a:fontRef>
+        </p:style>
+        <p:txBody>
+          <a:bodyPr rtlCol="0" anchor="ctr"/>
+          <a:lstStyle/>
+          <a:p>
+            <a:pPr algn="ctr"/>
+            <a:endParaRPr lang="ko-KR" altLang="en-US" sz="2081"/>
+          </a:p>
+        </p:txBody>
+      </p:sp>
+      <p:sp>
+        <p:nvSpPr>
+          <p:cNvPr id="20" name="타원 19">
+            <a:extLst>
+              <a:ext uri="{FF2B5EF4-FFF2-40B4-BE49-F238E27FC236}">
+                <a16:creationId xmlns:a16="http://schemas.microsoft.com/office/drawing/2014/main" id="{24E37979-4B32-CE93-D3EF-C75C51F9EBAF}"/>
+              </a:ext>
+            </a:extLst>
+          </p:cNvPr>
+          <p:cNvSpPr/>
+          <p:nvPr/>
+        </p:nvSpPr>
+        <p:spPr>
+          <a:xfrm>
+            <a:off x="107950" y="3306218"/>
+            <a:ext cx="266700" cy="266700"/>
+          </a:xfrm>
+          <a:prstGeom prst="ellipse">
+            <a:avLst/>
+          </a:prstGeom>
+          <a:solidFill>
+            <a:srgbClr val="CFC0BB"/>
+          </a:solidFill>
+          <a:ln>
+            <a:noFill/>
+          </a:ln>
+        </p:spPr>
+        <p:style>
+          <a:lnRef idx="2">
+            <a:schemeClr val="accent1">
+              <a:shade val="15000"/>
+            </a:schemeClr>
+          </a:lnRef>
+          <a:fillRef idx="1">
+            <a:schemeClr val="accent1"/>
+          </a:fillRef>
+          <a:effectRef idx="0">
+            <a:schemeClr val="accent1"/>
+          </a:effectRef>
+          <a:fontRef idx="minor">
+            <a:schemeClr val="lt1"/>
+          </a:fontRef>
+        </p:style>
+        <p:txBody>
+          <a:bodyPr rtlCol="0" anchor="ctr"/>
+          <a:lstStyle/>
+          <a:p>
+            <a:pPr algn="ctr"/>
+            <a:endParaRPr lang="ko-KR" altLang="en-US" sz="2081"/>
+          </a:p>
+        </p:txBody>
+      </p:sp>
+      <p:grpSp>
+        <p:nvGrpSpPr>
+          <p:cNvPr id="22" name="그룹 21">
+            <a:extLst>
+              <a:ext uri="{FF2B5EF4-FFF2-40B4-BE49-F238E27FC236}">
+                <a16:creationId xmlns:a16="http://schemas.microsoft.com/office/drawing/2014/main" id="{A2DAAB3C-5FFD-379B-9C8F-6D258400D416}"/>
+              </a:ext>
+            </a:extLst>
+          </p:cNvPr>
+          <p:cNvGrpSpPr/>
+          <p:nvPr/>
+        </p:nvGrpSpPr>
+        <p:grpSpPr>
+          <a:xfrm>
+            <a:off x="859075" y="1417073"/>
+            <a:ext cx="7848713" cy="4996937"/>
+            <a:chOff x="-368301" y="2963709"/>
+            <a:chExt cx="10494101" cy="6681142"/>
+          </a:xfrm>
+        </p:grpSpPr>
+        <p:grpSp>
+          <p:nvGrpSpPr>
+            <p:cNvPr id="23" name="그룹 22">
+              <a:extLst>
+                <a:ext uri="{FF2B5EF4-FFF2-40B4-BE49-F238E27FC236}">
+                  <a16:creationId xmlns:a16="http://schemas.microsoft.com/office/drawing/2014/main" id="{358A68BF-B735-BA39-2C3C-FFB7A15910CA}"/>
+                </a:ext>
+              </a:extLst>
+            </p:cNvPr>
+            <p:cNvGrpSpPr/>
+            <p:nvPr/>
+          </p:nvGrpSpPr>
+          <p:grpSpPr>
+            <a:xfrm>
+              <a:off x="-368301" y="3592092"/>
+              <a:ext cx="5025779" cy="5424374"/>
+              <a:chOff x="10151764" y="1692275"/>
+              <a:chExt cx="5832309" cy="6294869"/>
+            </a:xfrm>
+          </p:grpSpPr>
+          <p:sp>
+            <p:nvSpPr>
+              <p:cNvPr id="34" name="자유형: 도형 33">
+                <a:extLst>
+                  <a:ext uri="{FF2B5EF4-FFF2-40B4-BE49-F238E27FC236}">
+                    <a16:creationId xmlns:a16="http://schemas.microsoft.com/office/drawing/2014/main" id="{DD516E9A-FB8B-C763-08FB-F81651413E8C}"/>
+                  </a:ext>
+                </a:extLst>
+              </p:cNvPr>
+              <p:cNvSpPr/>
+              <p:nvPr/>
+            </p:nvSpPr>
+            <p:spPr>
+              <a:xfrm>
+                <a:off x="10151764" y="1758248"/>
+                <a:ext cx="5832309" cy="6228896"/>
+              </a:xfrm>
+              <a:custGeom>
+                <a:avLst/>
+                <a:gdLst>
+                  <a:gd name="csX0" fmla="*/ 0 w 6358466"/>
+                  <a:gd name="csY0" fmla="*/ 3716867 h 6739467"/>
+                  <a:gd name="csX1" fmla="*/ 3022600 w 6358466"/>
+                  <a:gd name="csY1" fmla="*/ 6739467 h 6739467"/>
+                  <a:gd name="csX2" fmla="*/ 6358466 w 6358466"/>
+                  <a:gd name="csY2" fmla="*/ 6739467 h 6739467"/>
+                  <a:gd name="csX3" fmla="*/ 6358466 w 6358466"/>
+                  <a:gd name="csY3" fmla="*/ 3742267 h 6739467"/>
+                  <a:gd name="csX4" fmla="*/ 2616199 w 6358466"/>
+                  <a:gd name="csY4" fmla="*/ 0 h 6739467"/>
+                  <a:gd name="csX5" fmla="*/ 0 w 6358466"/>
+                  <a:gd name="csY5" fmla="*/ 3716867 h 6739467"/>
+                  <a:gd name="csX0" fmla="*/ 0 w 6310373"/>
+                  <a:gd name="csY0" fmla="*/ 3854277 h 6739467"/>
+                  <a:gd name="csX1" fmla="*/ 2974507 w 6310373"/>
+                  <a:gd name="csY1" fmla="*/ 6739467 h 6739467"/>
+                  <a:gd name="csX2" fmla="*/ 6310373 w 6310373"/>
+                  <a:gd name="csY2" fmla="*/ 6739467 h 6739467"/>
+                  <a:gd name="csX3" fmla="*/ 6310373 w 6310373"/>
+                  <a:gd name="csY3" fmla="*/ 3742267 h 6739467"/>
+                  <a:gd name="csX4" fmla="*/ 2568106 w 6310373"/>
+                  <a:gd name="csY4" fmla="*/ 0 h 6739467"/>
+                  <a:gd name="csX5" fmla="*/ 0 w 6310373"/>
+                  <a:gd name="csY5" fmla="*/ 3854277 h 6739467"/>
+                </a:gdLst>
+                <a:ahLst/>
+                <a:cxnLst>
+                  <a:cxn ang="0">
+                    <a:pos x="csX0" y="csY0"/>
+                  </a:cxn>
+                  <a:cxn ang="0">
+                    <a:pos x="csX1" y="csY1"/>
+                  </a:cxn>
+                  <a:cxn ang="0">
+                    <a:pos x="csX2" y="csY2"/>
+                  </a:cxn>
+                  <a:cxn ang="0">
+                    <a:pos x="csX3" y="csY3"/>
+                  </a:cxn>
+                  <a:cxn ang="0">
+                    <a:pos x="csX4" y="csY4"/>
+                  </a:cxn>
+                  <a:cxn ang="0">
+                    <a:pos x="csX5" y="csY5"/>
+                  </a:cxn>
+                </a:cxnLst>
+                <a:rect l="l" t="t" r="r" b="b"/>
+                <a:pathLst>
+                  <a:path w="6310373" h="6739467">
+                    <a:moveTo>
+                      <a:pt x="0" y="3854277"/>
+                    </a:moveTo>
+                    <a:lnTo>
+                      <a:pt x="2974507" y="6739467"/>
+                    </a:lnTo>
+                    <a:lnTo>
+                      <a:pt x="6310373" y="6739467"/>
+                    </a:lnTo>
+                    <a:lnTo>
+                      <a:pt x="6310373" y="3742267"/>
+                    </a:lnTo>
+                    <a:lnTo>
+                      <a:pt x="2568106" y="0"/>
+                    </a:lnTo>
+                    <a:lnTo>
+                      <a:pt x="0" y="3854277"/>
+                    </a:lnTo>
+                    <a:close/>
+                  </a:path>
+                </a:pathLst>
+              </a:custGeom>
+              <a:gradFill>
+                <a:gsLst>
+                  <a:gs pos="63000">
+                    <a:schemeClr val="tx1">
+                      <a:lumMod val="50000"/>
+                      <a:lumOff val="50000"/>
+                      <a:alpha val="0"/>
+                    </a:schemeClr>
+                  </a:gs>
+                  <a:gs pos="0">
+                    <a:schemeClr val="bg1">
+                      <a:lumMod val="75000"/>
+                      <a:alpha val="50000"/>
+                    </a:schemeClr>
+                  </a:gs>
+                </a:gsLst>
+                <a:lin ang="2400000" scaled="0"/>
+              </a:gradFill>
+              <a:ln>
+                <a:noFill/>
+              </a:ln>
+            </p:spPr>
+            <p:style>
+              <a:lnRef idx="2">
+                <a:schemeClr val="accent1">
+                  <a:shade val="15000"/>
+                </a:schemeClr>
+              </a:lnRef>
+              <a:fillRef idx="1">
+                <a:schemeClr val="accent1"/>
+              </a:fillRef>
+              <a:effectRef idx="0">
+                <a:schemeClr val="accent1"/>
+              </a:effectRef>
+              <a:fontRef idx="minor">
+                <a:schemeClr val="lt1"/>
+              </a:fontRef>
+            </p:style>
+            <p:txBody>
+              <a:bodyPr rtlCol="0" anchor="ctr"/>
+              <a:lstStyle/>
+              <a:p>
+                <a:pPr algn="ctr"/>
+                <a:endParaRPr lang="ko-KR" altLang="en-US" sz="2081" dirty="0"/>
+              </a:p>
+            </p:txBody>
+          </p:sp>
+          <p:grpSp>
+            <p:nvGrpSpPr>
+              <p:cNvPr id="35" name="그룹 34">
+                <a:extLst>
+                  <a:ext uri="{FF2B5EF4-FFF2-40B4-BE49-F238E27FC236}">
+                    <a16:creationId xmlns:a16="http://schemas.microsoft.com/office/drawing/2014/main" id="{5B206C4D-8736-F996-1886-95F4185BAA08}"/>
+                  </a:ext>
+                </a:extLst>
+              </p:cNvPr>
+              <p:cNvGrpSpPr/>
+              <p:nvPr/>
+            </p:nvGrpSpPr>
+            <p:grpSpPr>
+              <a:xfrm>
+                <a:off x="10167769" y="1692275"/>
+                <a:ext cx="2425965" cy="3651137"/>
+                <a:chOff x="2138045" y="3527386"/>
+                <a:chExt cx="2425965" cy="3651137"/>
+              </a:xfrm>
+            </p:grpSpPr>
+            <p:sp>
+              <p:nvSpPr>
+                <p:cNvPr id="36" name="사각형: 둥근 위쪽 모서리 35">
+                  <a:extLst>
+                    <a:ext uri="{FF2B5EF4-FFF2-40B4-BE49-F238E27FC236}">
+                      <a16:creationId xmlns:a16="http://schemas.microsoft.com/office/drawing/2014/main" id="{817DED0C-D87E-E6E7-08A9-2CAA0E59FE5E}"/>
+                    </a:ext>
+                  </a:extLst>
+                </p:cNvPr>
+                <p:cNvSpPr/>
+                <p:nvPr/>
+              </p:nvSpPr>
+              <p:spPr>
+                <a:xfrm rot="5400000">
+                  <a:off x="1525460" y="4139972"/>
+                  <a:ext cx="3651136" cy="2425965"/>
+                </a:xfrm>
+                <a:prstGeom prst="round2SameRect">
+                  <a:avLst>
+                    <a:gd name="adj1" fmla="val 7938"/>
+                    <a:gd name="adj2" fmla="val 0"/>
+                  </a:avLst>
+                </a:prstGeom>
+                <a:solidFill>
+                  <a:srgbClr val="305683"/>
+                </a:solidFill>
+                <a:ln>
+                  <a:noFill/>
+                </a:ln>
+                <a:effectLst>
+                  <a:outerShdw blurRad="38100" dist="38100" dir="2700000" algn="tl" rotWithShape="0">
+                    <a:srgbClr val="27466B">
+                      <a:alpha val="80000"/>
+                    </a:srgbClr>
+                  </a:outerShdw>
+                </a:effectLst>
+              </p:spPr>
+              <p:style>
+                <a:lnRef idx="2">
+                  <a:schemeClr val="accent1">
+                    <a:shade val="15000"/>
+                  </a:schemeClr>
+                </a:lnRef>
+                <a:fillRef idx="1">
+                  <a:schemeClr val="accent1"/>
+                </a:fillRef>
+                <a:effectRef idx="0">
+                  <a:schemeClr val="accent1"/>
+                </a:effectRef>
+                <a:fontRef idx="minor">
+                  <a:schemeClr val="lt1"/>
+                </a:fontRef>
+              </p:style>
+              <p:txBody>
+                <a:bodyPr rtlCol="0" anchor="ctr"/>
+                <a:lstStyle/>
+                <a:p>
+                  <a:pPr algn="ctr"/>
+                  <a:endParaRPr lang="ko-KR" altLang="en-US" sz="2081"/>
+                </a:p>
+              </p:txBody>
+            </p:sp>
+            <p:sp>
+              <p:nvSpPr>
+                <p:cNvPr id="37" name="직사각형 36">
+                  <a:extLst>
+                    <a:ext uri="{FF2B5EF4-FFF2-40B4-BE49-F238E27FC236}">
+                      <a16:creationId xmlns:a16="http://schemas.microsoft.com/office/drawing/2014/main" id="{38E35DD5-FE66-9425-9542-10018F949449}"/>
+                    </a:ext>
+                  </a:extLst>
+                </p:cNvPr>
+                <p:cNvSpPr/>
+                <p:nvPr/>
+              </p:nvSpPr>
+              <p:spPr>
+                <a:xfrm>
+                  <a:off x="2138045" y="3527386"/>
+                  <a:ext cx="235894" cy="3651136"/>
+                </a:xfrm>
+                <a:prstGeom prst="rect">
+                  <a:avLst/>
+                </a:prstGeom>
+                <a:solidFill>
+                  <a:srgbClr val="27466B"/>
+                </a:solidFill>
+                <a:ln>
+                  <a:noFill/>
+                </a:ln>
+              </p:spPr>
+              <p:style>
+                <a:lnRef idx="2">
+                  <a:schemeClr val="accent1">
+                    <a:shade val="15000"/>
+                  </a:schemeClr>
+                </a:lnRef>
+                <a:fillRef idx="1">
+                  <a:schemeClr val="accent1"/>
+                </a:fillRef>
+                <a:effectRef idx="0">
+                  <a:schemeClr val="accent1"/>
+                </a:effectRef>
+                <a:fontRef idx="minor">
+                  <a:schemeClr val="lt1"/>
+                </a:fontRef>
+              </p:style>
+              <p:txBody>
+                <a:bodyPr rtlCol="0" anchor="ctr"/>
+                <a:lstStyle/>
+                <a:p>
+                  <a:pPr algn="ctr"/>
+                  <a:endParaRPr lang="ko-KR" altLang="en-US" sz="2081"/>
+                </a:p>
+              </p:txBody>
+            </p:sp>
+          </p:grpSp>
+        </p:grpSp>
+        <p:grpSp>
+          <p:nvGrpSpPr>
+            <p:cNvPr id="24" name="그룹 23">
+              <a:extLst>
+                <a:ext uri="{FF2B5EF4-FFF2-40B4-BE49-F238E27FC236}">
+                  <a16:creationId xmlns:a16="http://schemas.microsoft.com/office/drawing/2014/main" id="{C090897C-F10A-34E2-A69E-C977C84638BC}"/>
+                </a:ext>
+              </a:extLst>
+            </p:cNvPr>
+            <p:cNvGrpSpPr/>
+            <p:nvPr/>
+          </p:nvGrpSpPr>
+          <p:grpSpPr>
+            <a:xfrm>
+              <a:off x="5100021" y="3592092"/>
+              <a:ext cx="5025779" cy="5424374"/>
+              <a:chOff x="10151764" y="1692275"/>
+              <a:chExt cx="5832309" cy="6294869"/>
+            </a:xfrm>
+          </p:grpSpPr>
+          <p:sp>
+            <p:nvSpPr>
+              <p:cNvPr id="30" name="자유형: 도형 29">
+                <a:extLst>
+                  <a:ext uri="{FF2B5EF4-FFF2-40B4-BE49-F238E27FC236}">
+                    <a16:creationId xmlns:a16="http://schemas.microsoft.com/office/drawing/2014/main" id="{90EF37E2-13D7-BE2B-3A2C-CBDE71C8FFF2}"/>
+                  </a:ext>
+                </a:extLst>
+              </p:cNvPr>
+              <p:cNvSpPr/>
+              <p:nvPr/>
+            </p:nvSpPr>
+            <p:spPr>
+              <a:xfrm>
+                <a:off x="10151764" y="1758248"/>
+                <a:ext cx="5832309" cy="6228896"/>
+              </a:xfrm>
+              <a:custGeom>
+                <a:avLst/>
+                <a:gdLst>
+                  <a:gd name="csX0" fmla="*/ 0 w 6358466"/>
+                  <a:gd name="csY0" fmla="*/ 3716867 h 6739467"/>
+                  <a:gd name="csX1" fmla="*/ 3022600 w 6358466"/>
+                  <a:gd name="csY1" fmla="*/ 6739467 h 6739467"/>
+                  <a:gd name="csX2" fmla="*/ 6358466 w 6358466"/>
+                  <a:gd name="csY2" fmla="*/ 6739467 h 6739467"/>
+                  <a:gd name="csX3" fmla="*/ 6358466 w 6358466"/>
+                  <a:gd name="csY3" fmla="*/ 3742267 h 6739467"/>
+                  <a:gd name="csX4" fmla="*/ 2616199 w 6358466"/>
+                  <a:gd name="csY4" fmla="*/ 0 h 6739467"/>
+                  <a:gd name="csX5" fmla="*/ 0 w 6358466"/>
+                  <a:gd name="csY5" fmla="*/ 3716867 h 6739467"/>
+                  <a:gd name="csX0" fmla="*/ 0 w 6310373"/>
+                  <a:gd name="csY0" fmla="*/ 3854277 h 6739467"/>
+                  <a:gd name="csX1" fmla="*/ 2974507 w 6310373"/>
+                  <a:gd name="csY1" fmla="*/ 6739467 h 6739467"/>
+                  <a:gd name="csX2" fmla="*/ 6310373 w 6310373"/>
+                  <a:gd name="csY2" fmla="*/ 6739467 h 6739467"/>
+                  <a:gd name="csX3" fmla="*/ 6310373 w 6310373"/>
+                  <a:gd name="csY3" fmla="*/ 3742267 h 6739467"/>
+                  <a:gd name="csX4" fmla="*/ 2568106 w 6310373"/>
+                  <a:gd name="csY4" fmla="*/ 0 h 6739467"/>
+                  <a:gd name="csX5" fmla="*/ 0 w 6310373"/>
+                  <a:gd name="csY5" fmla="*/ 3854277 h 6739467"/>
+                </a:gdLst>
+                <a:ahLst/>
+                <a:cxnLst>
+                  <a:cxn ang="0">
+                    <a:pos x="csX0" y="csY0"/>
+                  </a:cxn>
+                  <a:cxn ang="0">
+                    <a:pos x="csX1" y="csY1"/>
+                  </a:cxn>
+                  <a:cxn ang="0">
+                    <a:pos x="csX2" y="csY2"/>
+                  </a:cxn>
+                  <a:cxn ang="0">
+                    <a:pos x="csX3" y="csY3"/>
+                  </a:cxn>
+                  <a:cxn ang="0">
+                    <a:pos x="csX4" y="csY4"/>
+                  </a:cxn>
+                  <a:cxn ang="0">
+                    <a:pos x="csX5" y="csY5"/>
+                  </a:cxn>
+                </a:cxnLst>
+                <a:rect l="l" t="t" r="r" b="b"/>
+                <a:pathLst>
+                  <a:path w="6310373" h="6739467">
+                    <a:moveTo>
+                      <a:pt x="0" y="3854277"/>
+                    </a:moveTo>
+                    <a:lnTo>
+                      <a:pt x="2974507" y="6739467"/>
+                    </a:lnTo>
+                    <a:lnTo>
+                      <a:pt x="6310373" y="6739467"/>
+                    </a:lnTo>
+                    <a:lnTo>
+                      <a:pt x="6310373" y="3742267"/>
+                    </a:lnTo>
+                    <a:lnTo>
+                      <a:pt x="2568106" y="0"/>
+                    </a:lnTo>
+                    <a:lnTo>
+                      <a:pt x="0" y="3854277"/>
+                    </a:lnTo>
+                    <a:close/>
+                  </a:path>
+                </a:pathLst>
+              </a:custGeom>
+              <a:gradFill>
+                <a:gsLst>
+                  <a:gs pos="63000">
+                    <a:schemeClr val="tx1">
+                      <a:lumMod val="50000"/>
+                      <a:lumOff val="50000"/>
+                      <a:alpha val="0"/>
+                    </a:schemeClr>
+                  </a:gs>
+                  <a:gs pos="0">
+                    <a:schemeClr val="bg1">
+                      <a:lumMod val="75000"/>
+                      <a:alpha val="50000"/>
+                    </a:schemeClr>
+                  </a:gs>
+                </a:gsLst>
+                <a:lin ang="2400000" scaled="0"/>
+              </a:gradFill>
+              <a:ln>
+                <a:noFill/>
+              </a:ln>
+            </p:spPr>
+            <p:style>
+              <a:lnRef idx="2">
+                <a:schemeClr val="accent1">
+                  <a:shade val="15000"/>
+                </a:schemeClr>
+              </a:lnRef>
+              <a:fillRef idx="1">
+                <a:schemeClr val="accent1"/>
+              </a:fillRef>
+              <a:effectRef idx="0">
+                <a:schemeClr val="accent1"/>
+              </a:effectRef>
+              <a:fontRef idx="minor">
+                <a:schemeClr val="lt1"/>
+              </a:fontRef>
+            </p:style>
+            <p:txBody>
+              <a:bodyPr rtlCol="0" anchor="ctr"/>
+              <a:lstStyle/>
+              <a:p>
+                <a:pPr algn="ctr"/>
+                <a:endParaRPr lang="ko-KR" altLang="en-US" sz="2081" dirty="0"/>
+              </a:p>
+            </p:txBody>
+          </p:sp>
+          <p:grpSp>
+            <p:nvGrpSpPr>
+              <p:cNvPr id="31" name="그룹 30">
+                <a:extLst>
+                  <a:ext uri="{FF2B5EF4-FFF2-40B4-BE49-F238E27FC236}">
+                    <a16:creationId xmlns:a16="http://schemas.microsoft.com/office/drawing/2014/main" id="{08EBC575-7DF1-80C4-A86A-77C4DCB9AFE7}"/>
+                  </a:ext>
+                </a:extLst>
+              </p:cNvPr>
+              <p:cNvGrpSpPr/>
+              <p:nvPr/>
+            </p:nvGrpSpPr>
+            <p:grpSpPr>
+              <a:xfrm>
+                <a:off x="10167769" y="1692275"/>
+                <a:ext cx="2425965" cy="3651137"/>
+                <a:chOff x="2138045" y="3527386"/>
+                <a:chExt cx="2425965" cy="3651137"/>
+              </a:xfrm>
+            </p:grpSpPr>
+            <p:sp>
+              <p:nvSpPr>
+                <p:cNvPr id="32" name="사각형: 둥근 위쪽 모서리 31">
+                  <a:extLst>
+                    <a:ext uri="{FF2B5EF4-FFF2-40B4-BE49-F238E27FC236}">
+                      <a16:creationId xmlns:a16="http://schemas.microsoft.com/office/drawing/2014/main" id="{2AD3F469-6D38-CECE-0E9F-C9E2409957F9}"/>
+                    </a:ext>
+                  </a:extLst>
+                </p:cNvPr>
+                <p:cNvSpPr/>
+                <p:nvPr/>
+              </p:nvSpPr>
+              <p:spPr>
+                <a:xfrm rot="5400000">
+                  <a:off x="1525460" y="4139972"/>
+                  <a:ext cx="3651136" cy="2425965"/>
+                </a:xfrm>
+                <a:prstGeom prst="round2SameRect">
+                  <a:avLst>
+                    <a:gd name="adj1" fmla="val 7938"/>
+                    <a:gd name="adj2" fmla="val 0"/>
+                  </a:avLst>
+                </a:prstGeom>
+                <a:solidFill>
+                  <a:srgbClr val="E05036"/>
+                </a:solidFill>
+                <a:ln>
+                  <a:noFill/>
+                </a:ln>
+                <a:effectLst>
+                  <a:outerShdw blurRad="38100" dist="38100" dir="2700000" algn="tl" rotWithShape="0">
+                    <a:srgbClr val="C00000">
+                      <a:alpha val="80000"/>
+                    </a:srgbClr>
+                  </a:outerShdw>
+                </a:effectLst>
+              </p:spPr>
+              <p:style>
+                <a:lnRef idx="2">
+                  <a:schemeClr val="accent1">
+                    <a:shade val="15000"/>
+                  </a:schemeClr>
+                </a:lnRef>
+                <a:fillRef idx="1">
+                  <a:schemeClr val="accent1"/>
+                </a:fillRef>
+                <a:effectRef idx="0">
+                  <a:schemeClr val="accent1"/>
+                </a:effectRef>
+                <a:fontRef idx="minor">
+                  <a:schemeClr val="lt1"/>
+                </a:fontRef>
+              </p:style>
+              <p:txBody>
+                <a:bodyPr rtlCol="0" anchor="ctr"/>
+                <a:lstStyle/>
+                <a:p>
+                  <a:pPr algn="ctr"/>
+                  <a:endParaRPr lang="ko-KR" altLang="en-US" sz="2081"/>
+                </a:p>
+              </p:txBody>
+            </p:sp>
+            <p:sp>
+              <p:nvSpPr>
+                <p:cNvPr id="33" name="직사각형 32">
+                  <a:extLst>
+                    <a:ext uri="{FF2B5EF4-FFF2-40B4-BE49-F238E27FC236}">
+                      <a16:creationId xmlns:a16="http://schemas.microsoft.com/office/drawing/2014/main" id="{61AC413E-D9A7-4A61-8440-984522FF989A}"/>
+                    </a:ext>
+                  </a:extLst>
+                </p:cNvPr>
+                <p:cNvSpPr/>
+                <p:nvPr/>
+              </p:nvSpPr>
+              <p:spPr>
+                <a:xfrm>
+                  <a:off x="2138045" y="3527386"/>
+                  <a:ext cx="235894" cy="3651136"/>
+                </a:xfrm>
+                <a:prstGeom prst="rect">
+                  <a:avLst/>
+                </a:prstGeom>
+                <a:solidFill>
+                  <a:srgbClr val="BD341D"/>
+                </a:solidFill>
+                <a:ln>
+                  <a:noFill/>
+                </a:ln>
+              </p:spPr>
+              <p:style>
+                <a:lnRef idx="2">
+                  <a:schemeClr val="accent1">
+                    <a:shade val="15000"/>
+                  </a:schemeClr>
+                </a:lnRef>
+                <a:fillRef idx="1">
+                  <a:schemeClr val="accent1"/>
+                </a:fillRef>
+                <a:effectRef idx="0">
+                  <a:schemeClr val="accent1"/>
+                </a:effectRef>
+                <a:fontRef idx="minor">
+                  <a:schemeClr val="lt1"/>
+                </a:fontRef>
+              </p:style>
+              <p:txBody>
+                <a:bodyPr rtlCol="0" anchor="ctr"/>
+                <a:lstStyle/>
+                <a:p>
+                  <a:pPr algn="ctr"/>
+                  <a:endParaRPr lang="ko-KR" altLang="en-US" sz="2081"/>
+                </a:p>
+              </p:txBody>
+            </p:sp>
+          </p:grpSp>
+        </p:grpSp>
+        <p:grpSp>
+          <p:nvGrpSpPr>
+            <p:cNvPr id="25" name="그룹 24">
+              <a:extLst>
+                <a:ext uri="{FF2B5EF4-FFF2-40B4-BE49-F238E27FC236}">
+                  <a16:creationId xmlns:a16="http://schemas.microsoft.com/office/drawing/2014/main" id="{B6EF0808-FDE0-4860-02B6-F29704430569}"/>
+                </a:ext>
+              </a:extLst>
+            </p:cNvPr>
+            <p:cNvGrpSpPr/>
+            <p:nvPr/>
+          </p:nvGrpSpPr>
+          <p:grpSpPr>
+            <a:xfrm>
+              <a:off x="2113887" y="2963709"/>
+              <a:ext cx="6190201" cy="6681142"/>
+              <a:chOff x="10151764" y="1692275"/>
+              <a:chExt cx="5832309" cy="6294869"/>
+            </a:xfrm>
+          </p:grpSpPr>
+          <p:sp>
+            <p:nvSpPr>
+              <p:cNvPr id="26" name="자유형: 도형 25">
+                <a:extLst>
+                  <a:ext uri="{FF2B5EF4-FFF2-40B4-BE49-F238E27FC236}">
+                    <a16:creationId xmlns:a16="http://schemas.microsoft.com/office/drawing/2014/main" id="{6DBE4B59-D374-9670-AAD5-49EE46432624}"/>
+                  </a:ext>
+                </a:extLst>
+              </p:cNvPr>
+              <p:cNvSpPr/>
+              <p:nvPr/>
+            </p:nvSpPr>
+            <p:spPr>
+              <a:xfrm>
+                <a:off x="10151764" y="1758248"/>
+                <a:ext cx="5832309" cy="6228896"/>
+              </a:xfrm>
+              <a:custGeom>
+                <a:avLst/>
+                <a:gdLst>
+                  <a:gd name="csX0" fmla="*/ 0 w 6358466"/>
+                  <a:gd name="csY0" fmla="*/ 3716867 h 6739467"/>
+                  <a:gd name="csX1" fmla="*/ 3022600 w 6358466"/>
+                  <a:gd name="csY1" fmla="*/ 6739467 h 6739467"/>
+                  <a:gd name="csX2" fmla="*/ 6358466 w 6358466"/>
+                  <a:gd name="csY2" fmla="*/ 6739467 h 6739467"/>
+                  <a:gd name="csX3" fmla="*/ 6358466 w 6358466"/>
+                  <a:gd name="csY3" fmla="*/ 3742267 h 6739467"/>
+                  <a:gd name="csX4" fmla="*/ 2616199 w 6358466"/>
+                  <a:gd name="csY4" fmla="*/ 0 h 6739467"/>
+                  <a:gd name="csX5" fmla="*/ 0 w 6358466"/>
+                  <a:gd name="csY5" fmla="*/ 3716867 h 6739467"/>
+                  <a:gd name="csX0" fmla="*/ 0 w 6310373"/>
+                  <a:gd name="csY0" fmla="*/ 3854277 h 6739467"/>
+                  <a:gd name="csX1" fmla="*/ 2974507 w 6310373"/>
+                  <a:gd name="csY1" fmla="*/ 6739467 h 6739467"/>
+                  <a:gd name="csX2" fmla="*/ 6310373 w 6310373"/>
+                  <a:gd name="csY2" fmla="*/ 6739467 h 6739467"/>
+                  <a:gd name="csX3" fmla="*/ 6310373 w 6310373"/>
+                  <a:gd name="csY3" fmla="*/ 3742267 h 6739467"/>
+                  <a:gd name="csX4" fmla="*/ 2568106 w 6310373"/>
+                  <a:gd name="csY4" fmla="*/ 0 h 6739467"/>
+                  <a:gd name="csX5" fmla="*/ 0 w 6310373"/>
+                  <a:gd name="csY5" fmla="*/ 3854277 h 6739467"/>
+                </a:gdLst>
+                <a:ahLst/>
+                <a:cxnLst>
+                  <a:cxn ang="0">
+                    <a:pos x="csX0" y="csY0"/>
+                  </a:cxn>
+                  <a:cxn ang="0">
+                    <a:pos x="csX1" y="csY1"/>
+                  </a:cxn>
+                  <a:cxn ang="0">
+                    <a:pos x="csX2" y="csY2"/>
+                  </a:cxn>
+                  <a:cxn ang="0">
+                    <a:pos x="csX3" y="csY3"/>
+                  </a:cxn>
+                  <a:cxn ang="0">
+                    <a:pos x="csX4" y="csY4"/>
+                  </a:cxn>
+                  <a:cxn ang="0">
+                    <a:pos x="csX5" y="csY5"/>
+                  </a:cxn>
+                </a:cxnLst>
+                <a:rect l="l" t="t" r="r" b="b"/>
+                <a:pathLst>
+                  <a:path w="6310373" h="6739467">
+                    <a:moveTo>
+                      <a:pt x="0" y="3854277"/>
+                    </a:moveTo>
+                    <a:lnTo>
+                      <a:pt x="2974507" y="6739467"/>
+                    </a:lnTo>
+                    <a:lnTo>
+                      <a:pt x="6310373" y="6739467"/>
+                    </a:lnTo>
+                    <a:lnTo>
+                      <a:pt x="6310373" y="3742267"/>
+                    </a:lnTo>
+                    <a:lnTo>
+                      <a:pt x="2568106" y="0"/>
+                    </a:lnTo>
+                    <a:lnTo>
+                      <a:pt x="0" y="3854277"/>
+                    </a:lnTo>
+                    <a:close/>
+                  </a:path>
+                </a:pathLst>
+              </a:custGeom>
+              <a:gradFill>
+                <a:gsLst>
+                  <a:gs pos="63000">
+                    <a:schemeClr val="tx1">
+                      <a:lumMod val="50000"/>
+                      <a:lumOff val="50000"/>
+                      <a:alpha val="0"/>
+                    </a:schemeClr>
+                  </a:gs>
+                  <a:gs pos="0">
+                    <a:schemeClr val="bg1">
+                      <a:lumMod val="75000"/>
+                      <a:alpha val="50000"/>
+                    </a:schemeClr>
+                  </a:gs>
+                </a:gsLst>
+                <a:lin ang="2400000" scaled="0"/>
+              </a:gradFill>
+              <a:ln>
+                <a:noFill/>
+              </a:ln>
+            </p:spPr>
+            <p:style>
+              <a:lnRef idx="2">
+                <a:schemeClr val="accent1">
+                  <a:shade val="15000"/>
+                </a:schemeClr>
+              </a:lnRef>
+              <a:fillRef idx="1">
+                <a:schemeClr val="accent1"/>
+              </a:fillRef>
+              <a:effectRef idx="0">
+                <a:schemeClr val="accent1"/>
+              </a:effectRef>
+              <a:fontRef idx="minor">
+                <a:schemeClr val="lt1"/>
+              </a:fontRef>
+            </p:style>
+            <p:txBody>
+              <a:bodyPr rtlCol="0" anchor="ctr"/>
+              <a:lstStyle/>
+              <a:p>
+                <a:pPr algn="ctr"/>
+                <a:endParaRPr lang="ko-KR" altLang="en-US" sz="2081" dirty="0"/>
+              </a:p>
+            </p:txBody>
+          </p:sp>
+          <p:grpSp>
+            <p:nvGrpSpPr>
+              <p:cNvPr id="27" name="그룹 26">
+                <a:extLst>
+                  <a:ext uri="{FF2B5EF4-FFF2-40B4-BE49-F238E27FC236}">
+                    <a16:creationId xmlns:a16="http://schemas.microsoft.com/office/drawing/2014/main" id="{2D6F7615-D37E-9B94-2E3E-1F08415E3FB5}"/>
+                  </a:ext>
+                </a:extLst>
+              </p:cNvPr>
+              <p:cNvGrpSpPr/>
+              <p:nvPr/>
+            </p:nvGrpSpPr>
+            <p:grpSpPr>
+              <a:xfrm>
+                <a:off x="10167769" y="1692275"/>
+                <a:ext cx="2425965" cy="3651137"/>
+                <a:chOff x="2138045" y="3527386"/>
+                <a:chExt cx="2425965" cy="3651137"/>
+              </a:xfrm>
+            </p:grpSpPr>
+            <p:sp>
+              <p:nvSpPr>
+                <p:cNvPr id="28" name="사각형: 둥근 위쪽 모서리 27">
+                  <a:extLst>
+                    <a:ext uri="{FF2B5EF4-FFF2-40B4-BE49-F238E27FC236}">
+                      <a16:creationId xmlns:a16="http://schemas.microsoft.com/office/drawing/2014/main" id="{9CF7A5A6-2EB3-C191-83A3-2AE92462C531}"/>
+                    </a:ext>
+                  </a:extLst>
+                </p:cNvPr>
+                <p:cNvSpPr/>
+                <p:nvPr/>
+              </p:nvSpPr>
+              <p:spPr>
+                <a:xfrm rot="5400000">
+                  <a:off x="1525460" y="4139972"/>
+                  <a:ext cx="3651136" cy="2425965"/>
+                </a:xfrm>
+                <a:prstGeom prst="round2SameRect">
+                  <a:avLst>
+                    <a:gd name="adj1" fmla="val 7938"/>
+                    <a:gd name="adj2" fmla="val 0"/>
+                  </a:avLst>
+                </a:prstGeom>
+                <a:solidFill>
+                  <a:srgbClr val="FFBF2A"/>
+                </a:solidFill>
+                <a:ln>
+                  <a:noFill/>
+                </a:ln>
+                <a:effectLst>
+                  <a:outerShdw blurRad="38100" dist="38100" dir="2700000" algn="tl" rotWithShape="0">
+                    <a:srgbClr val="825A00">
+                      <a:alpha val="80000"/>
+                    </a:srgbClr>
+                  </a:outerShdw>
+                </a:effectLst>
+              </p:spPr>
+              <p:style>
+                <a:lnRef idx="2">
+                  <a:schemeClr val="accent1">
+                    <a:shade val="15000"/>
+                  </a:schemeClr>
+                </a:lnRef>
+                <a:fillRef idx="1">
+                  <a:schemeClr val="accent1"/>
+                </a:fillRef>
+                <a:effectRef idx="0">
+                  <a:schemeClr val="accent1"/>
+                </a:effectRef>
+                <a:fontRef idx="minor">
+                  <a:schemeClr val="lt1"/>
+                </a:fontRef>
+              </p:style>
+              <p:txBody>
+                <a:bodyPr rtlCol="0" anchor="ctr"/>
+                <a:lstStyle/>
+                <a:p>
+                  <a:pPr algn="ctr"/>
+                  <a:endParaRPr lang="ko-KR" altLang="en-US" sz="2081" dirty="0"/>
+                </a:p>
+              </p:txBody>
+            </p:sp>
+            <p:sp>
+              <p:nvSpPr>
+                <p:cNvPr id="29" name="직사각형 28">
+                  <a:extLst>
+                    <a:ext uri="{FF2B5EF4-FFF2-40B4-BE49-F238E27FC236}">
+                      <a16:creationId xmlns:a16="http://schemas.microsoft.com/office/drawing/2014/main" id="{D346AEFC-9717-811D-F97F-42E68FF80A37}"/>
+                    </a:ext>
+                  </a:extLst>
+                </p:cNvPr>
+                <p:cNvSpPr/>
+                <p:nvPr/>
+              </p:nvSpPr>
+              <p:spPr>
+                <a:xfrm>
+                  <a:off x="2138045" y="3527386"/>
+                  <a:ext cx="235894" cy="3651136"/>
+                </a:xfrm>
+                <a:prstGeom prst="rect">
+                  <a:avLst/>
+                </a:prstGeom>
+                <a:solidFill>
+                  <a:srgbClr val="E7A400"/>
+                </a:solidFill>
+                <a:ln>
+                  <a:noFill/>
+                </a:ln>
+              </p:spPr>
+              <p:style>
+                <a:lnRef idx="2">
+                  <a:schemeClr val="accent1">
+                    <a:shade val="15000"/>
+                  </a:schemeClr>
+                </a:lnRef>
+                <a:fillRef idx="1">
+                  <a:schemeClr val="accent1"/>
+                </a:fillRef>
+                <a:effectRef idx="0">
+                  <a:schemeClr val="accent1"/>
+                </a:effectRef>
+                <a:fontRef idx="minor">
+                  <a:schemeClr val="lt1"/>
+                </a:fontRef>
+              </p:style>
+              <p:txBody>
+                <a:bodyPr rtlCol="0" anchor="ctr"/>
+                <a:lstStyle/>
+                <a:p>
+                  <a:pPr algn="ctr"/>
+                  <a:endParaRPr lang="ko-KR" altLang="en-US" sz="2081"/>
+                </a:p>
+              </p:txBody>
+            </p:sp>
+          </p:grpSp>
+        </p:grpSp>
+      </p:grpSp>
+      <p:sp>
+        <p:nvSpPr>
+          <p:cNvPr id="39" name="TextBox 38">
+            <a:extLst>
+              <a:ext uri="{FF2B5EF4-FFF2-40B4-BE49-F238E27FC236}">
+                <a16:creationId xmlns:a16="http://schemas.microsoft.com/office/drawing/2014/main" id="{E0CB5F5E-9683-544C-C9C8-955E96649D3A}"/>
+              </a:ext>
+            </a:extLst>
+          </p:cNvPr>
+          <p:cNvSpPr txBox="1"/>
+          <p:nvPr/>
+        </p:nvSpPr>
+        <p:spPr>
+          <a:xfrm>
+            <a:off x="1496022" y="345500"/>
+            <a:ext cx="4351732" cy="784830"/>
+          </a:xfrm>
+          <a:prstGeom prst="rect">
+            <a:avLst/>
+          </a:prstGeom>
+          <a:noFill/>
+        </p:spPr>
+        <p:txBody>
+          <a:bodyPr wrap="square">
+            <a:spAutoFit/>
+          </a:bodyPr>
+          <a:lstStyle>
+            <a:defPPr>
+              <a:defRPr lang="en-US"/>
+            </a:defPPr>
+            <a:lvl1pPr marL="0" algn="l" defTabSz="457200" rtl="0" eaLnBrk="1" latinLnBrk="0" hangingPunct="1">
+              <a:defRPr sz="1800" kern="1200">
+                <a:solidFill>
+                  <a:schemeClr val="tx1"/>
+                </a:solidFill>
+                <a:latin typeface="+mn-lt"/>
+                <a:ea typeface="+mn-ea"/>
+                <a:cs typeface="+mn-cs"/>
+              </a:defRPr>
+            </a:lvl1pPr>
+            <a:lvl2pPr marL="457200" algn="l" defTabSz="457200" rtl="0" eaLnBrk="1" latinLnBrk="0" hangingPunct="1">
+              <a:defRPr sz="1800" kern="1200">
+                <a:solidFill>
+                  <a:schemeClr val="tx1"/>
+                </a:solidFill>
+                <a:latin typeface="+mn-lt"/>
+                <a:ea typeface="+mn-ea"/>
+                <a:cs typeface="+mn-cs"/>
+              </a:defRPr>
+            </a:lvl2pPr>
+            <a:lvl3pPr marL="914400" algn="l" defTabSz="457200" rtl="0" eaLnBrk="1" latinLnBrk="0" hangingPunct="1">
+              <a:defRPr sz="1800" kern="1200">
+                <a:solidFill>
+                  <a:schemeClr val="tx1"/>
+                </a:solidFill>
+                <a:latin typeface="+mn-lt"/>
+                <a:ea typeface="+mn-ea"/>
+                <a:cs typeface="+mn-cs"/>
+              </a:defRPr>
+            </a:lvl3pPr>
+            <a:lvl4pPr marL="1371600" algn="l" defTabSz="457200" rtl="0" eaLnBrk="1" latinLnBrk="0" hangingPunct="1">
+              <a:defRPr sz="1800" kern="1200">
+                <a:solidFill>
+                  <a:schemeClr val="tx1"/>
+                </a:solidFill>
+                <a:latin typeface="+mn-lt"/>
+                <a:ea typeface="+mn-ea"/>
+                <a:cs typeface="+mn-cs"/>
+              </a:defRPr>
+            </a:lvl4pPr>
+            <a:lvl5pPr marL="1828800" algn="l" defTabSz="457200" rtl="0" eaLnBrk="1" latinLnBrk="0" hangingPunct="1">
+              <a:defRPr sz="1800" kern="1200">
+                <a:solidFill>
+                  <a:schemeClr val="tx1"/>
+                </a:solidFill>
+                <a:latin typeface="+mn-lt"/>
+                <a:ea typeface="+mn-ea"/>
+                <a:cs typeface="+mn-cs"/>
+              </a:defRPr>
+            </a:lvl5pPr>
+            <a:lvl6pPr marL="2286000" algn="l" defTabSz="457200" rtl="0" eaLnBrk="1" latinLnBrk="0" hangingPunct="1">
+              <a:defRPr sz="1800" kern="1200">
+                <a:solidFill>
+                  <a:schemeClr val="tx1"/>
+                </a:solidFill>
+                <a:latin typeface="+mn-lt"/>
+                <a:ea typeface="+mn-ea"/>
+                <a:cs typeface="+mn-cs"/>
+              </a:defRPr>
+            </a:lvl6pPr>
+            <a:lvl7pPr marL="2743200" algn="l" defTabSz="457200" rtl="0" eaLnBrk="1" latinLnBrk="0" hangingPunct="1">
+              <a:defRPr sz="1800" kern="1200">
+                <a:solidFill>
+                  <a:schemeClr val="tx1"/>
+                </a:solidFill>
+                <a:latin typeface="+mn-lt"/>
+                <a:ea typeface="+mn-ea"/>
+                <a:cs typeface="+mn-cs"/>
+              </a:defRPr>
+            </a:lvl7pPr>
+            <a:lvl8pPr marL="3200400" algn="l" defTabSz="457200" rtl="0" eaLnBrk="1" latinLnBrk="0" hangingPunct="1">
+              <a:defRPr sz="1800" kern="1200">
+                <a:solidFill>
+                  <a:schemeClr val="tx1"/>
+                </a:solidFill>
+                <a:latin typeface="+mn-lt"/>
+                <a:ea typeface="+mn-ea"/>
+                <a:cs typeface="+mn-cs"/>
+              </a:defRPr>
+            </a:lvl8pPr>
+            <a:lvl9pPr marL="3657600" algn="l" defTabSz="457200" rtl="0" eaLnBrk="1" latinLnBrk="0" hangingPunct="1">
+              <a:defRPr sz="1800" kern="1200">
+                <a:solidFill>
+                  <a:schemeClr val="tx1"/>
+                </a:solidFill>
+                <a:latin typeface="+mn-lt"/>
+                <a:ea typeface="+mn-ea"/>
+                <a:cs typeface="+mn-cs"/>
+              </a:defRPr>
+            </a:lvl9pPr>
+          </a:lstStyle>
+          <a:p>
+            <a:pPr algn="ctr"/>
+            <a:r>
+              <a:rPr lang="en-US" altLang="ko-KR" sz="4500" dirty="0">
+                <a:solidFill>
+                  <a:schemeClr val="tx1">
+                    <a:lumMod val="95000"/>
+                    <a:lumOff val="5000"/>
+                  </a:schemeClr>
+                </a:solidFill>
+                <a:latin typeface="Cavorting" panose="000B0504000000000004" pitchFamily="34" charset="0"/>
+              </a:rPr>
+              <a:t>Draw your time</a:t>
+            </a:r>
+            <a:endParaRPr lang="ko-KR" altLang="en-US" sz="4500" dirty="0">
+              <a:solidFill>
+                <a:schemeClr val="tx1">
+                  <a:lumMod val="95000"/>
+                  <a:lumOff val="5000"/>
+                </a:schemeClr>
+              </a:solidFill>
+              <a:latin typeface="Cavorting" panose="000B0504000000000004" pitchFamily="34" charset="0"/>
+            </a:endParaRPr>
+          </a:p>
+        </p:txBody>
+      </p:sp>
+    </p:spTree>
+    <p:extLst>
+      <p:ext uri="{BB962C8B-B14F-4D97-AF65-F5344CB8AC3E}">
+        <p14:creationId xmlns:p14="http://schemas.microsoft.com/office/powerpoint/2010/main" val="890712429"/>
+      </p:ext>
+    </p:extLst>
+  </p:cSld>
+  <p:clrMapOvr>
+    <a:masterClrMapping/>
+  </p:clrMapOvr>
+</p:sld>
+</file>
+
+<file path=ppt/slides/slide3.xml><?xml version="1.0" encoding="utf-8"?>
+<p:sld xmlns:a="http://schemas.openxmlformats.org/drawingml/2006/main" xmlns:r="http://schemas.openxmlformats.org/officeDocument/2006/relationships" xmlns:p="http://schemas.openxmlformats.org/presentationml/2006/main">
+  <p:cSld>
+    <p:spTree>
+      <p:nvGrpSpPr>
+        <p:cNvPr id="1" name="">
+          <a:extLst>
+            <a:ext uri="{FF2B5EF4-FFF2-40B4-BE49-F238E27FC236}">
+              <a16:creationId xmlns:a16="http://schemas.microsoft.com/office/drawing/2014/main" id="{1EE1824E-12BD-EAE7-F3B5-25D20243441A}"/>
+            </a:ext>
+          </a:extLst>
+        </p:cNvPr>
+        <p:cNvGrpSpPr/>
+        <p:nvPr/>
+      </p:nvGrpSpPr>
+      <p:grpSpPr>
+        <a:xfrm>
+          <a:off x="0" y="0"/>
+          <a:ext cx="0" cy="0"/>
+          <a:chOff x="0" y="0"/>
+          <a:chExt cx="0" cy="0"/>
+        </a:xfrm>
+      </p:grpSpPr>
+    </p:spTree>
+    <p:extLst>
+      <p:ext uri="{BB962C8B-B14F-4D97-AF65-F5344CB8AC3E}">
+        <p14:creationId xmlns:p14="http://schemas.microsoft.com/office/powerpoint/2010/main" val="935815411"/>
+      </p:ext>
+    </p:extLst>
+  </p:cSld>
+  <p:clrMapOvr>
+    <a:masterClrMapping/>
+  </p:clrMapOvr>
+</p:sld>
+</file>
+
+<file path=ppt/slides/slide4.xml><?xml version="1.0" encoding="utf-8"?>
+<p:sld xmlns:a="http://schemas.openxmlformats.org/drawingml/2006/main" xmlns:r="http://schemas.openxmlformats.org/officeDocument/2006/relationships" xmlns:p="http://schemas.openxmlformats.org/presentationml/2006/main">
+  <p:cSld>
+    <p:spTree>
+      <p:nvGrpSpPr>
+        <p:cNvPr id="1" name="">
+          <a:extLst>
+            <a:ext uri="{FF2B5EF4-FFF2-40B4-BE49-F238E27FC236}">
+              <a16:creationId xmlns:a16="http://schemas.microsoft.com/office/drawing/2014/main" id="{44D27726-4E37-2ACB-F9A7-9A3A77858BCC}"/>
+            </a:ext>
+          </a:extLst>
+        </p:cNvPr>
+        <p:cNvGrpSpPr/>
+        <p:nvPr/>
+      </p:nvGrpSpPr>
+      <p:grpSpPr>
+        <a:xfrm>
+          <a:off x="0" y="0"/>
+          <a:ext cx="0" cy="0"/>
+          <a:chOff x="0" y="0"/>
+          <a:chExt cx="0" cy="0"/>
+        </a:xfrm>
+      </p:grpSpPr>
+      <p:pic>
+        <p:nvPicPr>
+          <p:cNvPr id="3" name="그림 2">
+            <a:extLst>
+              <a:ext uri="{FF2B5EF4-FFF2-40B4-BE49-F238E27FC236}">
+                <a16:creationId xmlns:a16="http://schemas.microsoft.com/office/drawing/2014/main" id="{27417B98-3C8B-96DE-740D-1F2626F52093}"/>
+              </a:ext>
+            </a:extLst>
+          </p:cNvPr>
+          <p:cNvPicPr>
+            <a:picLocks noChangeAspect="1"/>
+          </p:cNvPicPr>
+          <p:nvPr/>
+        </p:nvPicPr>
+        <p:blipFill>
+          <a:blip r:embed="rId2">
+            <a:extLst>
+              <a:ext uri="{28A0092B-C50C-407E-A947-70E740481C1C}">
+                <a14:useLocalDpi xmlns:a14="http://schemas.microsoft.com/office/drawing/2010/main" val="0"/>
+              </a:ext>
+            </a:extLst>
+          </a:blip>
+          <a:stretch>
+            <a:fillRect/>
+          </a:stretch>
+        </p:blipFill>
+        <p:spPr>
+          <a:xfrm>
+            <a:off x="0" y="4052"/>
+            <a:ext cx="6840538" cy="5121109"/>
+          </a:xfrm>
+          <a:prstGeom prst="rect">
+            <a:avLst/>
+          </a:prstGeom>
+        </p:spPr>
+      </p:pic>
+    </p:spTree>
+    <p:extLst>
+      <p:ext uri="{BB962C8B-B14F-4D97-AF65-F5344CB8AC3E}">
+        <p14:creationId xmlns:p14="http://schemas.microsoft.com/office/powerpoint/2010/main" val="2552114969"/>
+      </p:ext>
+    </p:extLst>
+  </p:cSld>
+  <p:clrMapOvr>
+    <a:masterClrMapping/>
+  </p:clrMapOvr>
+</p:sld>
+</file>
+
+<file path=ppt/slides/slide5.xml><?xml version="1.0" encoding="utf-8"?>
+<p:sld xmlns:a="http://schemas.openxmlformats.org/drawingml/2006/main" xmlns:r="http://schemas.openxmlformats.org/officeDocument/2006/relationships" xmlns:p="http://schemas.openxmlformats.org/presentationml/2006/main">
+  <p:cSld>
+    <p:spTree>
+      <p:nvGrpSpPr>
+        <p:cNvPr id="1" name="">
+          <a:extLst>
+            <a:ext uri="{FF2B5EF4-FFF2-40B4-BE49-F238E27FC236}">
+              <a16:creationId xmlns:a16="http://schemas.microsoft.com/office/drawing/2014/main" id="{908CC51D-A762-C644-E09D-537B28CC8888}"/>
+            </a:ext>
+          </a:extLst>
+        </p:cNvPr>
+        <p:cNvGrpSpPr/>
+        <p:nvPr/>
+      </p:nvGrpSpPr>
+      <p:grpSpPr>
+        <a:xfrm>
+          <a:off x="0" y="0"/>
+          <a:ext cx="0" cy="0"/>
+          <a:chOff x="0" y="0"/>
+          <a:chExt cx="0" cy="0"/>
+        </a:xfrm>
+      </p:grpSpPr>
+    </p:spTree>
+    <p:extLst>
+      <p:ext uri="{BB962C8B-B14F-4D97-AF65-F5344CB8AC3E}">
+        <p14:creationId xmlns:p14="http://schemas.microsoft.com/office/powerpoint/2010/main" val="1302125061"/>
+      </p:ext>
+    </p:extLst>
+  </p:cSld>
+  <p:clrMapOvr>
+    <a:masterClrMapping/>
+  </p:clrMapOvr>
+</p:sld>
+</file>
+
+<file path=ppt/slides/slide6.xml><?xml version="1.0" encoding="utf-8"?>
 <p:sld xmlns:a="http://schemas.openxmlformats.org/drawingml/2006/main" xmlns:r="http://schemas.openxmlformats.org/officeDocument/2006/relationships" xmlns:p="http://schemas.openxmlformats.org/presentationml/2006/main">
   <p:cSld>
     <p:spTree>
@@ -3005,8 +5332,8 @@
           </p:nvPr>
         </p:nvGraphicFramePr>
         <p:xfrm>
-          <a:off x="258555" y="1396997"/>
-          <a:ext cx="4218851" cy="4928127"/>
+          <a:off x="194172" y="1044838"/>
+          <a:ext cx="3155349" cy="3685828"/>
         </p:xfrm>
         <a:graphic>
           <a:graphicData uri="http://schemas.openxmlformats.org/drawingml/2006/table">
@@ -3015,49 +5342,49 @@
                 <a:tableStyleId>{5C22544A-7EE6-4342-B048-85BDC9FD1C3A}</a:tableStyleId>
               </a:tblPr>
               <a:tblGrid>
-                <a:gridCol w="602693">
+                <a:gridCol w="450764">
                   <a:extLst>
                     <a:ext uri="{9D8B030D-6E8A-4147-A177-3AD203B41FA5}">
                       <a16:colId xmlns:a16="http://schemas.microsoft.com/office/drawing/2014/main" val="2056030249"/>
                     </a:ext>
                   </a:extLst>
                 </a:gridCol>
-                <a:gridCol w="602693">
+                <a:gridCol w="450764">
                   <a:extLst>
                     <a:ext uri="{9D8B030D-6E8A-4147-A177-3AD203B41FA5}">
                       <a16:colId xmlns:a16="http://schemas.microsoft.com/office/drawing/2014/main" val="3566604318"/>
                     </a:ext>
                   </a:extLst>
                 </a:gridCol>
-                <a:gridCol w="602693">
+                <a:gridCol w="450764">
                   <a:extLst>
                     <a:ext uri="{9D8B030D-6E8A-4147-A177-3AD203B41FA5}">
                       <a16:colId xmlns:a16="http://schemas.microsoft.com/office/drawing/2014/main" val="2125247123"/>
                     </a:ext>
                   </a:extLst>
                 </a:gridCol>
-                <a:gridCol w="602693">
+                <a:gridCol w="450764">
                   <a:extLst>
                     <a:ext uri="{9D8B030D-6E8A-4147-A177-3AD203B41FA5}">
                       <a16:colId xmlns:a16="http://schemas.microsoft.com/office/drawing/2014/main" val="372100949"/>
                     </a:ext>
                   </a:extLst>
                 </a:gridCol>
-                <a:gridCol w="602693">
+                <a:gridCol w="450764">
                   <a:extLst>
                     <a:ext uri="{9D8B030D-6E8A-4147-A177-3AD203B41FA5}">
                       <a16:colId xmlns:a16="http://schemas.microsoft.com/office/drawing/2014/main" val="584385140"/>
                     </a:ext>
                   </a:extLst>
                 </a:gridCol>
-                <a:gridCol w="602693">
+                <a:gridCol w="450764">
                   <a:extLst>
                     <a:ext uri="{9D8B030D-6E8A-4147-A177-3AD203B41FA5}">
                       <a16:colId xmlns:a16="http://schemas.microsoft.com/office/drawing/2014/main" val="3427679242"/>
                     </a:ext>
                   </a:extLst>
                 </a:gridCol>
-                <a:gridCol w="602693">
+                <a:gridCol w="450764">
                   <a:extLst>
                     <a:ext uri="{9D8B030D-6E8A-4147-A177-3AD203B41FA5}">
                       <a16:colId xmlns:a16="http://schemas.microsoft.com/office/drawing/2014/main" val="3367657603"/>
@@ -3065,7 +5392,7 @@
                   </a:extLst>
                 </a:gridCol>
               </a:tblGrid>
-              <a:tr h="306603">
+              <a:tr h="229313">
                 <a:tc>
                   <a:txBody>
                     <a:bodyPr/>
@@ -3073,7 +5400,7 @@
                     <a:p>
                       <a:pPr algn="ctr" latinLnBrk="1"/>
                       <a:r>
-                        <a:rPr lang="en-US" altLang="ko-KR" sz="1400" b="0" dirty="0">
+                        <a:rPr lang="en-US" altLang="ko-KR" sz="1000" b="0" dirty="0">
                           <a:solidFill>
                             <a:schemeClr val="tx1">
                               <a:lumMod val="75000"/>
@@ -3084,7 +5411,7 @@
                         </a:rPr>
                         <a:t>Sun</a:t>
                       </a:r>
-                      <a:endParaRPr lang="ko-KR" altLang="en-US" sz="1400" b="0" dirty="0">
+                      <a:endParaRPr lang="ko-KR" altLang="en-US" sz="1000" b="0" dirty="0">
                         <a:solidFill>
                           <a:schemeClr val="tx1">
                             <a:lumMod val="75000"/>
@@ -3095,7 +5422,7 @@
                       </a:endParaRPr>
                     </a:p>
                   </a:txBody>
-                  <a:tcPr anchor="ctr">
+                  <a:tcPr marL="68390" marR="68390" marT="34195" marB="34195" anchor="ctr">
                     <a:lnL w="6350" cap="flat" cmpd="sng" algn="ctr">
                       <a:solidFill>
                         <a:schemeClr val="tx1"/>
@@ -3142,7 +5469,7 @@
                     <a:p>
                       <a:pPr algn="ctr" latinLnBrk="1"/>
                       <a:r>
-                        <a:rPr lang="en-US" altLang="ko-KR" sz="1400" b="0" dirty="0">
+                        <a:rPr lang="en-US" altLang="ko-KR" sz="1000" b="0" dirty="0">
                           <a:solidFill>
                             <a:schemeClr val="tx1">
                               <a:lumMod val="75000"/>
@@ -3153,7 +5480,7 @@
                         </a:rPr>
                         <a:t>Mon </a:t>
                       </a:r>
-                      <a:endParaRPr lang="ko-KR" altLang="en-US" sz="1400" b="0" dirty="0">
+                      <a:endParaRPr lang="ko-KR" altLang="en-US" sz="1000" b="0" dirty="0">
                         <a:solidFill>
                           <a:schemeClr val="tx1">
                             <a:lumMod val="75000"/>
@@ -3164,7 +5491,7 @@
                       </a:endParaRPr>
                     </a:p>
                   </a:txBody>
-                  <a:tcPr anchor="ctr">
+                  <a:tcPr marL="68390" marR="68390" marT="34195" marB="34195" anchor="ctr">
                     <a:lnL w="6350" cap="flat" cmpd="sng" algn="ctr">
                       <a:solidFill>
                         <a:schemeClr val="tx1"/>
@@ -3211,7 +5538,7 @@
                     <a:p>
                       <a:pPr algn="ctr" latinLnBrk="1"/>
                       <a:r>
-                        <a:rPr lang="en-US" altLang="ko-KR" sz="1400" b="0" dirty="0">
+                        <a:rPr lang="en-US" altLang="ko-KR" sz="1000" b="0" dirty="0">
                           <a:solidFill>
                             <a:schemeClr val="tx1">
                               <a:lumMod val="75000"/>
@@ -3223,7 +5550,7 @@
                         <a:t>Tue</a:t>
                       </a:r>
                       <a:r>
-                        <a:rPr lang="ko-KR" altLang="en-US" sz="1400" b="0" dirty="0">
+                        <a:rPr lang="ko-KR" altLang="en-US" sz="1000" b="0" dirty="0">
                           <a:solidFill>
                             <a:schemeClr val="tx1">
                               <a:lumMod val="75000"/>
@@ -3236,7 +5563,7 @@
                       </a:r>
                     </a:p>
                   </a:txBody>
-                  <a:tcPr anchor="ctr">
+                  <a:tcPr marL="68390" marR="68390" marT="34195" marB="34195" anchor="ctr">
                     <a:lnL w="6350" cap="flat" cmpd="sng" algn="ctr">
                       <a:solidFill>
                         <a:schemeClr val="tx1"/>
@@ -3283,7 +5610,7 @@
                     <a:p>
                       <a:pPr algn="ctr" latinLnBrk="1"/>
                       <a:r>
-                        <a:rPr lang="en-US" altLang="ko-KR" sz="1400" b="0" dirty="0">
+                        <a:rPr lang="en-US" altLang="ko-KR" sz="1000" b="0" dirty="0">
                           <a:solidFill>
                             <a:schemeClr val="tx1">
                               <a:lumMod val="75000"/>
@@ -3296,7 +5623,7 @@
                       </a:r>
                     </a:p>
                   </a:txBody>
-                  <a:tcPr anchor="ctr">
+                  <a:tcPr marL="68390" marR="68390" marT="34195" marB="34195" anchor="ctr">
                     <a:lnL w="6350" cap="flat" cmpd="sng" algn="ctr">
                       <a:solidFill>
                         <a:schemeClr val="tx1"/>
@@ -3343,7 +5670,7 @@
                     <a:p>
                       <a:pPr algn="ctr" latinLnBrk="1"/>
                       <a:r>
-                        <a:rPr lang="en-US" altLang="ko-KR" sz="1400" b="0" dirty="0">
+                        <a:rPr lang="en-US" altLang="ko-KR" sz="1000" b="0" dirty="0">
                           <a:solidFill>
                             <a:schemeClr val="tx1">
                               <a:lumMod val="75000"/>
@@ -3354,7 +5681,7 @@
                         </a:rPr>
                         <a:t>Thu </a:t>
                       </a:r>
-                      <a:endParaRPr lang="ko-KR" altLang="en-US" sz="1400" b="0" dirty="0">
+                      <a:endParaRPr lang="ko-KR" altLang="en-US" sz="1000" b="0" dirty="0">
                         <a:solidFill>
                           <a:schemeClr val="tx1">
                             <a:lumMod val="75000"/>
@@ -3365,7 +5692,7 @@
                       </a:endParaRPr>
                     </a:p>
                   </a:txBody>
-                  <a:tcPr anchor="ctr">
+                  <a:tcPr marL="68390" marR="68390" marT="34195" marB="34195" anchor="ctr">
                     <a:lnL w="6350" cap="flat" cmpd="sng" algn="ctr">
                       <a:solidFill>
                         <a:schemeClr val="tx1"/>
@@ -3412,7 +5739,7 @@
                     <a:p>
                       <a:pPr algn="ctr" latinLnBrk="1"/>
                       <a:r>
-                        <a:rPr lang="en-US" altLang="ko-KR" sz="1400" b="0" dirty="0">
+                        <a:rPr lang="en-US" altLang="ko-KR" sz="1000" b="0" dirty="0">
                           <a:solidFill>
                             <a:schemeClr val="tx1">
                               <a:lumMod val="75000"/>
@@ -3423,7 +5750,7 @@
                         </a:rPr>
                         <a:t>Fri </a:t>
                       </a:r>
-                      <a:endParaRPr lang="ko-KR" altLang="en-US" sz="1400" b="0" dirty="0">
+                      <a:endParaRPr lang="ko-KR" altLang="en-US" sz="1000" b="0" dirty="0">
                         <a:solidFill>
                           <a:schemeClr val="tx1">
                             <a:lumMod val="75000"/>
@@ -3434,7 +5761,7 @@
                       </a:endParaRPr>
                     </a:p>
                   </a:txBody>
-                  <a:tcPr anchor="ctr">
+                  <a:tcPr marL="68390" marR="68390" marT="34195" marB="34195" anchor="ctr">
                     <a:lnL w="6350" cap="flat" cmpd="sng" algn="ctr">
                       <a:solidFill>
                         <a:schemeClr val="tx1"/>
@@ -3481,7 +5808,7 @@
                     <a:p>
                       <a:pPr algn="ctr" latinLnBrk="1"/>
                       <a:r>
-                        <a:rPr lang="en-US" altLang="ko-KR" sz="1400" b="0" dirty="0">
+                        <a:rPr lang="en-US" altLang="ko-KR" sz="1000" b="0" dirty="0">
                           <a:solidFill>
                             <a:schemeClr val="tx1">
                               <a:lumMod val="75000"/>
@@ -3492,7 +5819,7 @@
                         </a:rPr>
                         <a:t>Sat </a:t>
                       </a:r>
-                      <a:endParaRPr lang="ko-KR" altLang="en-US" sz="1400" b="0" dirty="0">
+                      <a:endParaRPr lang="ko-KR" altLang="en-US" sz="1000" b="0" dirty="0">
                         <a:solidFill>
                           <a:schemeClr val="tx1">
                             <a:lumMod val="75000"/>
@@ -3503,7 +5830,7 @@
                       </a:endParaRPr>
                     </a:p>
                   </a:txBody>
-                  <a:tcPr anchor="ctr">
+                  <a:tcPr marL="68390" marR="68390" marT="34195" marB="34195" anchor="ctr">
                     <a:lnL w="6350" cap="flat" cmpd="sng" algn="ctr">
                       <a:solidFill>
                         <a:schemeClr val="tx1"/>
@@ -3549,14 +5876,14 @@
                   </a:ext>
                 </a:extLst>
               </a:tr>
-              <a:tr h="770254">
+              <a:tr h="576086">
                 <a:tc>
                   <a:txBody>
                     <a:bodyPr/>
                     <a:lstStyle/>
                     <a:p>
                       <a:pPr algn="r" latinLnBrk="1"/>
-                      <a:endParaRPr lang="ko-KR" altLang="en-US" sz="1000" b="0" kern="1200" dirty="0">
+                      <a:endParaRPr lang="ko-KR" altLang="en-US" sz="700" b="0" kern="1200" dirty="0">
                         <a:solidFill>
                           <a:schemeClr val="tx1">
                             <a:lumMod val="75000"/>
@@ -3569,7 +5896,7 @@
                       </a:endParaRPr>
                     </a:p>
                   </a:txBody>
-                  <a:tcPr>
+                  <a:tcPr marL="68390" marR="68390" marT="34195" marB="34195">
                     <a:lnL w="6350" cap="flat" cmpd="sng" algn="ctr">
                       <a:solidFill>
                         <a:schemeClr val="tx1"/>
@@ -3615,7 +5942,7 @@
                     <a:lstStyle/>
                     <a:p>
                       <a:pPr algn="r" latinLnBrk="1"/>
-                      <a:endParaRPr lang="ko-KR" altLang="en-US" sz="1000" b="0" kern="1200" dirty="0">
+                      <a:endParaRPr lang="ko-KR" altLang="en-US" sz="700" b="0" kern="1200" dirty="0">
                         <a:solidFill>
                           <a:schemeClr val="tx1">
                             <a:lumMod val="75000"/>
@@ -3628,7 +5955,7 @@
                       </a:endParaRPr>
                     </a:p>
                   </a:txBody>
-                  <a:tcPr>
+                  <a:tcPr marL="68390" marR="68390" marT="34195" marB="34195">
                     <a:lnL w="6350" cap="flat" cmpd="sng" algn="ctr">
                       <a:solidFill>
                         <a:schemeClr val="tx1"/>
@@ -3674,7 +6001,7 @@
                     <a:lstStyle/>
                     <a:p>
                       <a:pPr algn="r" latinLnBrk="1"/>
-                      <a:endParaRPr lang="ko-KR" altLang="en-US" sz="1000" b="0" kern="1200" dirty="0">
+                      <a:endParaRPr lang="ko-KR" altLang="en-US" sz="700" b="0" kern="1200" dirty="0">
                         <a:solidFill>
                           <a:schemeClr val="tx1">
                             <a:lumMod val="75000"/>
@@ -3687,7 +6014,7 @@
                       </a:endParaRPr>
                     </a:p>
                   </a:txBody>
-                  <a:tcPr>
+                  <a:tcPr marL="68390" marR="68390" marT="34195" marB="34195">
                     <a:lnL w="6350" cap="flat" cmpd="sng" algn="ctr">
                       <a:solidFill>
                         <a:schemeClr val="tx1"/>
@@ -3733,7 +6060,7 @@
                     <a:lstStyle/>
                     <a:p>
                       <a:pPr algn="r" latinLnBrk="1"/>
-                      <a:endParaRPr lang="ko-KR" altLang="en-US" sz="1000" b="0" kern="1200" dirty="0">
+                      <a:endParaRPr lang="ko-KR" altLang="en-US" sz="700" b="0" kern="1200" dirty="0">
                         <a:solidFill>
                           <a:schemeClr val="tx1">
                             <a:lumMod val="75000"/>
@@ -3746,7 +6073,7 @@
                       </a:endParaRPr>
                     </a:p>
                   </a:txBody>
-                  <a:tcPr>
+                  <a:tcPr marL="68390" marR="68390" marT="34195" marB="34195">
                     <a:lnL w="6350" cap="flat" cmpd="sng" algn="ctr">
                       <a:solidFill>
                         <a:schemeClr val="tx1"/>
@@ -3793,7 +6120,7 @@
                     <a:p>
                       <a:pPr algn="r" latinLnBrk="1"/>
                       <a:r>
-                        <a:rPr lang="en-US" altLang="ko-KR" sz="1000" b="0" kern="1200" dirty="0">
+                        <a:rPr lang="en-US" altLang="ko-KR" sz="700" b="0" kern="1200" dirty="0">
                           <a:solidFill>
                             <a:schemeClr val="tx1">
                               <a:lumMod val="75000"/>
@@ -3806,7 +6133,7 @@
                         </a:rPr>
                         <a:t>1</a:t>
                       </a:r>
-                      <a:endParaRPr lang="ko-KR" altLang="en-US" sz="1000" b="0" kern="1200" dirty="0">
+                      <a:endParaRPr lang="ko-KR" altLang="en-US" sz="700" b="0" kern="1200" dirty="0">
                         <a:solidFill>
                           <a:schemeClr val="tx1">
                             <a:lumMod val="75000"/>
@@ -3819,7 +6146,7 @@
                       </a:endParaRPr>
                     </a:p>
                   </a:txBody>
-                  <a:tcPr>
+                  <a:tcPr marL="68390" marR="68390" marT="34195" marB="34195">
                     <a:lnL w="6350" cap="flat" cmpd="sng" algn="ctr">
                       <a:solidFill>
                         <a:schemeClr val="tx1"/>
@@ -3866,7 +6193,7 @@
                     <a:p>
                       <a:pPr algn="r" latinLnBrk="1"/>
                       <a:r>
-                        <a:rPr lang="en-US" altLang="ko-KR" sz="1000" b="0" kern="1200" dirty="0">
+                        <a:rPr lang="en-US" altLang="ko-KR" sz="700" b="0" kern="1200" dirty="0">
                           <a:solidFill>
                             <a:schemeClr val="tx1">
                               <a:lumMod val="75000"/>
@@ -3879,7 +6206,7 @@
                         </a:rPr>
                         <a:t>2</a:t>
                       </a:r>
-                      <a:endParaRPr lang="ko-KR" altLang="en-US" sz="1000" b="0" kern="1200" dirty="0">
+                      <a:endParaRPr lang="ko-KR" altLang="en-US" sz="700" b="0" kern="1200" dirty="0">
                         <a:solidFill>
                           <a:schemeClr val="tx1">
                             <a:lumMod val="75000"/>
@@ -3892,7 +6219,7 @@
                       </a:endParaRPr>
                     </a:p>
                   </a:txBody>
-                  <a:tcPr>
+                  <a:tcPr marL="68390" marR="68390" marT="34195" marB="34195">
                     <a:lnL w="6350" cap="flat" cmpd="sng" algn="ctr">
                       <a:solidFill>
                         <a:schemeClr val="tx1"/>
@@ -3939,7 +6266,7 @@
                     <a:p>
                       <a:pPr algn="r" latinLnBrk="1"/>
                       <a:r>
-                        <a:rPr lang="en-US" altLang="ko-KR" sz="1000" b="0" kern="1200" dirty="0">
+                        <a:rPr lang="en-US" altLang="ko-KR" sz="700" b="0" kern="1200" dirty="0">
                           <a:solidFill>
                             <a:schemeClr val="tx1">
                               <a:lumMod val="75000"/>
@@ -3952,7 +6279,7 @@
                         </a:rPr>
                         <a:t>3</a:t>
                       </a:r>
-                      <a:endParaRPr lang="ko-KR" altLang="en-US" sz="1000" b="0" kern="1200" dirty="0">
+                      <a:endParaRPr lang="ko-KR" altLang="en-US" sz="700" b="0" kern="1200" dirty="0">
                         <a:solidFill>
                           <a:schemeClr val="tx1">
                             <a:lumMod val="75000"/>
@@ -3965,7 +6292,7 @@
                       </a:endParaRPr>
                     </a:p>
                   </a:txBody>
-                  <a:tcPr>
+                  <a:tcPr marL="68390" marR="68390" marT="34195" marB="34195">
                     <a:lnL w="6350" cap="flat" cmpd="sng" algn="ctr">
                       <a:solidFill>
                         <a:schemeClr val="tx1"/>
@@ -4011,7 +6338,7 @@
                   </a:ext>
                 </a:extLst>
               </a:tr>
-              <a:tr h="770254">
+              <a:tr h="576086">
                 <a:tc>
                   <a:txBody>
                     <a:bodyPr/>
@@ -4019,7 +6346,7 @@
                     <a:p>
                       <a:pPr algn="r" latinLnBrk="1"/>
                       <a:r>
-                        <a:rPr lang="en-US" altLang="ko-KR" sz="1000" b="0" kern="1200" dirty="0">
+                        <a:rPr lang="en-US" altLang="ko-KR" sz="700" b="0" kern="1200" dirty="0">
                           <a:solidFill>
                             <a:schemeClr val="tx1">
                               <a:lumMod val="75000"/>
@@ -4032,7 +6359,7 @@
                         </a:rPr>
                         <a:t>4</a:t>
                       </a:r>
-                      <a:endParaRPr lang="ko-KR" altLang="en-US" sz="1000" b="0" kern="1200" dirty="0">
+                      <a:endParaRPr lang="ko-KR" altLang="en-US" sz="700" b="0" kern="1200" dirty="0">
                         <a:solidFill>
                           <a:schemeClr val="tx1">
                             <a:lumMod val="75000"/>
@@ -4045,7 +6372,7 @@
                       </a:endParaRPr>
                     </a:p>
                   </a:txBody>
-                  <a:tcPr>
+                  <a:tcPr marL="68390" marR="68390" marT="34195" marB="34195">
                     <a:lnL w="6350" cap="flat" cmpd="sng" algn="ctr">
                       <a:solidFill>
                         <a:schemeClr val="tx1"/>
@@ -4092,7 +6419,7 @@
                     <a:p>
                       <a:pPr algn="r" latinLnBrk="1"/>
                       <a:r>
-                        <a:rPr lang="en-US" altLang="ko-KR" sz="1000" b="0" kern="1200" dirty="0">
+                        <a:rPr lang="en-US" altLang="ko-KR" sz="700" b="0" kern="1200" dirty="0">
                           <a:solidFill>
                             <a:schemeClr val="tx1">
                               <a:lumMod val="75000"/>
@@ -4105,7 +6432,7 @@
                         </a:rPr>
                         <a:t>5</a:t>
                       </a:r>
-                      <a:endParaRPr lang="ko-KR" altLang="en-US" sz="1000" b="0" kern="1200" dirty="0">
+                      <a:endParaRPr lang="ko-KR" altLang="en-US" sz="700" b="0" kern="1200" dirty="0">
                         <a:solidFill>
                           <a:schemeClr val="tx1">
                             <a:lumMod val="75000"/>
@@ -4118,7 +6445,7 @@
                       </a:endParaRPr>
                     </a:p>
                   </a:txBody>
-                  <a:tcPr>
+                  <a:tcPr marL="68390" marR="68390" marT="34195" marB="34195">
                     <a:lnL w="6350" cap="flat" cmpd="sng" algn="ctr">
                       <a:solidFill>
                         <a:schemeClr val="tx1"/>
@@ -4165,7 +6492,7 @@
                     <a:p>
                       <a:pPr algn="r" latinLnBrk="1"/>
                       <a:r>
-                        <a:rPr lang="en-US" altLang="ko-KR" sz="1000" b="0" kern="1200" dirty="0">
+                        <a:rPr lang="en-US" altLang="ko-KR" sz="700" b="0" kern="1200" dirty="0">
                           <a:solidFill>
                             <a:schemeClr val="tx1">
                               <a:lumMod val="75000"/>
@@ -4178,7 +6505,7 @@
                         </a:rPr>
                         <a:t>6</a:t>
                       </a:r>
-                      <a:endParaRPr lang="ko-KR" altLang="en-US" sz="1000" b="0" kern="1200" dirty="0">
+                      <a:endParaRPr lang="ko-KR" altLang="en-US" sz="700" b="0" kern="1200" dirty="0">
                         <a:solidFill>
                           <a:schemeClr val="tx1">
                             <a:lumMod val="75000"/>
@@ -4191,7 +6518,7 @@
                       </a:endParaRPr>
                     </a:p>
                   </a:txBody>
-                  <a:tcPr>
+                  <a:tcPr marL="68390" marR="68390" marT="34195" marB="34195">
                     <a:lnL w="6350" cap="flat" cmpd="sng" algn="ctr">
                       <a:solidFill>
                         <a:schemeClr val="tx1"/>
@@ -4238,7 +6565,7 @@
                     <a:p>
                       <a:pPr algn="r" latinLnBrk="1"/>
                       <a:r>
-                        <a:rPr lang="en-US" altLang="ko-KR" sz="1000" b="0" kern="1200" dirty="0">
+                        <a:rPr lang="en-US" altLang="ko-KR" sz="700" b="0" kern="1200" dirty="0">
                           <a:solidFill>
                             <a:schemeClr val="tx1">
                               <a:lumMod val="75000"/>
@@ -4251,7 +6578,7 @@
                         </a:rPr>
                         <a:t>7</a:t>
                       </a:r>
-                      <a:endParaRPr lang="ko-KR" altLang="en-US" sz="1000" b="0" kern="1200" dirty="0">
+                      <a:endParaRPr lang="ko-KR" altLang="en-US" sz="700" b="0" kern="1200" dirty="0">
                         <a:solidFill>
                           <a:schemeClr val="tx1">
                             <a:lumMod val="75000"/>
@@ -4264,7 +6591,7 @@
                       </a:endParaRPr>
                     </a:p>
                   </a:txBody>
-                  <a:tcPr>
+                  <a:tcPr marL="68390" marR="68390" marT="34195" marB="34195">
                     <a:lnL w="6350" cap="flat" cmpd="sng" algn="ctr">
                       <a:solidFill>
                         <a:schemeClr val="tx1"/>
@@ -4311,7 +6638,7 @@
                     <a:p>
                       <a:pPr algn="r" latinLnBrk="1"/>
                       <a:r>
-                        <a:rPr lang="en-US" altLang="ko-KR" sz="1000" b="0" kern="1200" dirty="0">
+                        <a:rPr lang="en-US" altLang="ko-KR" sz="700" b="0" kern="1200" dirty="0">
                           <a:solidFill>
                             <a:schemeClr val="tx1">
                               <a:lumMod val="75000"/>
@@ -4324,7 +6651,7 @@
                         </a:rPr>
                         <a:t>8</a:t>
                       </a:r>
-                      <a:endParaRPr lang="ko-KR" altLang="en-US" sz="1000" b="0" kern="1200" dirty="0">
+                      <a:endParaRPr lang="ko-KR" altLang="en-US" sz="700" b="0" kern="1200" dirty="0">
                         <a:solidFill>
                           <a:schemeClr val="tx1">
                             <a:lumMod val="75000"/>
@@ -4337,7 +6664,7 @@
                       </a:endParaRPr>
                     </a:p>
                   </a:txBody>
-                  <a:tcPr>
+                  <a:tcPr marL="68390" marR="68390" marT="34195" marB="34195">
                     <a:lnL w="6350" cap="flat" cmpd="sng" algn="ctr">
                       <a:solidFill>
                         <a:schemeClr val="tx1"/>
@@ -4384,7 +6711,7 @@
                     <a:p>
                       <a:pPr algn="r" latinLnBrk="1"/>
                       <a:r>
-                        <a:rPr lang="en-US" altLang="ko-KR" sz="1000" b="0" kern="1200" dirty="0">
+                        <a:rPr lang="en-US" altLang="ko-KR" sz="700" b="0" kern="1200" dirty="0">
                           <a:solidFill>
                             <a:schemeClr val="tx1">
                               <a:lumMod val="75000"/>
@@ -4397,7 +6724,7 @@
                         </a:rPr>
                         <a:t>9</a:t>
                       </a:r>
-                      <a:endParaRPr lang="ko-KR" altLang="en-US" sz="1000" b="0" kern="1200" dirty="0">
+                      <a:endParaRPr lang="ko-KR" altLang="en-US" sz="700" b="0" kern="1200" dirty="0">
                         <a:solidFill>
                           <a:schemeClr val="tx1">
                             <a:lumMod val="75000"/>
@@ -4410,7 +6737,7 @@
                       </a:endParaRPr>
                     </a:p>
                   </a:txBody>
-                  <a:tcPr>
+                  <a:tcPr marL="68390" marR="68390" marT="34195" marB="34195">
                     <a:lnL w="6350" cap="flat" cmpd="sng" algn="ctr">
                       <a:solidFill>
                         <a:schemeClr val="tx1"/>
@@ -4457,7 +6784,7 @@
                     <a:p>
                       <a:pPr algn="r" latinLnBrk="1"/>
                       <a:r>
-                        <a:rPr lang="en-US" altLang="ko-KR" sz="1000" b="0" kern="1200" dirty="0">
+                        <a:rPr lang="en-US" altLang="ko-KR" sz="700" b="0" kern="1200" dirty="0">
                           <a:solidFill>
                             <a:schemeClr val="tx1">
                               <a:lumMod val="75000"/>
@@ -4470,7 +6797,7 @@
                         </a:rPr>
                         <a:t>10</a:t>
                       </a:r>
-                      <a:endParaRPr lang="ko-KR" altLang="en-US" sz="1000" b="0" kern="1200" dirty="0">
+                      <a:endParaRPr lang="ko-KR" altLang="en-US" sz="700" b="0" kern="1200" dirty="0">
                         <a:solidFill>
                           <a:schemeClr val="tx1">
                             <a:lumMod val="75000"/>
@@ -4483,7 +6810,7 @@
                       </a:endParaRPr>
                     </a:p>
                   </a:txBody>
-                  <a:tcPr>
+                  <a:tcPr marL="68390" marR="68390" marT="34195" marB="34195">
                     <a:lnL w="6350" cap="flat" cmpd="sng" algn="ctr">
                       <a:solidFill>
                         <a:schemeClr val="tx1"/>
@@ -4529,7 +6856,7 @@
                   </a:ext>
                 </a:extLst>
               </a:tr>
-              <a:tr h="770254">
+              <a:tr h="576086">
                 <a:tc>
                   <a:txBody>
                     <a:bodyPr/>
@@ -4537,7 +6864,7 @@
                     <a:p>
                       <a:pPr algn="r" latinLnBrk="1"/>
                       <a:r>
-                        <a:rPr lang="en-US" altLang="ko-KR" sz="1000" b="0" kern="1200" dirty="0">
+                        <a:rPr lang="en-US" altLang="ko-KR" sz="700" b="0" kern="1200" dirty="0">
                           <a:solidFill>
                             <a:schemeClr val="tx1">
                               <a:lumMod val="75000"/>
@@ -4550,7 +6877,7 @@
                         </a:rPr>
                         <a:t>11</a:t>
                       </a:r>
-                      <a:endParaRPr lang="ko-KR" altLang="en-US" sz="1000" b="0" kern="1200" dirty="0">
+                      <a:endParaRPr lang="ko-KR" altLang="en-US" sz="700" b="0" kern="1200" dirty="0">
                         <a:solidFill>
                           <a:schemeClr val="tx1">
                             <a:lumMod val="75000"/>
@@ -4563,7 +6890,7 @@
                       </a:endParaRPr>
                     </a:p>
                   </a:txBody>
-                  <a:tcPr>
+                  <a:tcPr marL="68390" marR="68390" marT="34195" marB="34195">
                     <a:lnL w="6350" cap="flat" cmpd="sng" algn="ctr">
                       <a:solidFill>
                         <a:schemeClr val="tx1"/>
@@ -4610,7 +6937,7 @@
                     <a:p>
                       <a:pPr algn="r" latinLnBrk="1"/>
                       <a:r>
-                        <a:rPr lang="en-US" altLang="ko-KR" sz="1000" b="0" kern="1200" dirty="0">
+                        <a:rPr lang="en-US" altLang="ko-KR" sz="700" b="0" kern="1200" dirty="0">
                           <a:solidFill>
                             <a:schemeClr val="tx1">
                               <a:lumMod val="75000"/>
@@ -4623,7 +6950,7 @@
                         </a:rPr>
                         <a:t>12</a:t>
                       </a:r>
-                      <a:endParaRPr lang="ko-KR" altLang="en-US" sz="1000" b="0" kern="1200" dirty="0">
+                      <a:endParaRPr lang="ko-KR" altLang="en-US" sz="700" b="0" kern="1200" dirty="0">
                         <a:solidFill>
                           <a:schemeClr val="tx1">
                             <a:lumMod val="75000"/>
@@ -4636,7 +6963,7 @@
                       </a:endParaRPr>
                     </a:p>
                   </a:txBody>
-                  <a:tcPr>
+                  <a:tcPr marL="68390" marR="68390" marT="34195" marB="34195">
                     <a:lnL w="6350" cap="flat" cmpd="sng" algn="ctr">
                       <a:solidFill>
                         <a:schemeClr val="tx1"/>
@@ -4683,7 +7010,7 @@
                     <a:p>
                       <a:pPr algn="r" latinLnBrk="1"/>
                       <a:r>
-                        <a:rPr lang="en-US" altLang="ko-KR" sz="1000" b="0" kern="1200" dirty="0">
+                        <a:rPr lang="en-US" altLang="ko-KR" sz="700" b="0" kern="1200" dirty="0">
                           <a:solidFill>
                             <a:schemeClr val="tx1">
                               <a:lumMod val="75000"/>
@@ -4696,7 +7023,7 @@
                         </a:rPr>
                         <a:t>13</a:t>
                       </a:r>
-                      <a:endParaRPr lang="ko-KR" altLang="en-US" sz="1000" b="0" kern="1200" dirty="0">
+                      <a:endParaRPr lang="ko-KR" altLang="en-US" sz="700" b="0" kern="1200" dirty="0">
                         <a:solidFill>
                           <a:schemeClr val="tx1">
                             <a:lumMod val="75000"/>
@@ -4709,7 +7036,7 @@
                       </a:endParaRPr>
                     </a:p>
                   </a:txBody>
-                  <a:tcPr>
+                  <a:tcPr marL="68390" marR="68390" marT="34195" marB="34195">
                     <a:lnL w="6350" cap="flat" cmpd="sng" algn="ctr">
                       <a:solidFill>
                         <a:schemeClr val="tx1"/>
@@ -4756,7 +7083,7 @@
                     <a:p>
                       <a:pPr algn="r" latinLnBrk="1"/>
                       <a:r>
-                        <a:rPr lang="en-US" altLang="ko-KR" sz="1000" b="0" kern="1200" dirty="0">
+                        <a:rPr lang="en-US" altLang="ko-KR" sz="700" b="0" kern="1200" dirty="0">
                           <a:solidFill>
                             <a:schemeClr val="tx1">
                               <a:lumMod val="75000"/>
@@ -4769,7 +7096,7 @@
                         </a:rPr>
                         <a:t>14</a:t>
                       </a:r>
-                      <a:endParaRPr lang="ko-KR" altLang="en-US" sz="1000" b="0" kern="1200" dirty="0">
+                      <a:endParaRPr lang="ko-KR" altLang="en-US" sz="700" b="0" kern="1200" dirty="0">
                         <a:solidFill>
                           <a:schemeClr val="tx1">
                             <a:lumMod val="75000"/>
@@ -4782,7 +7109,7 @@
                       </a:endParaRPr>
                     </a:p>
                   </a:txBody>
-                  <a:tcPr>
+                  <a:tcPr marL="68390" marR="68390" marT="34195" marB="34195">
                     <a:lnL w="6350" cap="flat" cmpd="sng" algn="ctr">
                       <a:solidFill>
                         <a:schemeClr val="tx1"/>
@@ -4829,7 +7156,7 @@
                     <a:p>
                       <a:pPr algn="r" latinLnBrk="1"/>
                       <a:r>
-                        <a:rPr lang="en-US" altLang="ko-KR" sz="1000" b="0" kern="1200" dirty="0">
+                        <a:rPr lang="en-US" altLang="ko-KR" sz="700" b="0" kern="1200" dirty="0">
                           <a:solidFill>
                             <a:schemeClr val="tx1">
                               <a:lumMod val="75000"/>
@@ -4842,7 +7169,7 @@
                         </a:rPr>
                         <a:t>15</a:t>
                       </a:r>
-                      <a:endParaRPr lang="ko-KR" altLang="en-US" sz="1000" b="0" kern="1200" dirty="0">
+                      <a:endParaRPr lang="ko-KR" altLang="en-US" sz="700" b="0" kern="1200" dirty="0">
                         <a:solidFill>
                           <a:schemeClr val="tx1">
                             <a:lumMod val="75000"/>
@@ -4855,7 +7182,7 @@
                       </a:endParaRPr>
                     </a:p>
                   </a:txBody>
-                  <a:tcPr>
+                  <a:tcPr marL="68390" marR="68390" marT="34195" marB="34195">
                     <a:lnL w="6350" cap="flat" cmpd="sng" algn="ctr">
                       <a:solidFill>
                         <a:schemeClr val="tx1"/>
@@ -4902,7 +7229,7 @@
                     <a:p>
                       <a:pPr algn="r" latinLnBrk="1"/>
                       <a:r>
-                        <a:rPr lang="en-US" altLang="ko-KR" sz="1000" b="0" kern="1200" dirty="0">
+                        <a:rPr lang="en-US" altLang="ko-KR" sz="700" b="0" kern="1200" dirty="0">
                           <a:solidFill>
                             <a:schemeClr val="tx1">
                               <a:lumMod val="75000"/>
@@ -4915,7 +7242,7 @@
                         </a:rPr>
                         <a:t>16</a:t>
                       </a:r>
-                      <a:endParaRPr lang="ko-KR" altLang="en-US" sz="1000" b="0" kern="1200" dirty="0">
+                      <a:endParaRPr lang="ko-KR" altLang="en-US" sz="700" b="0" kern="1200" dirty="0">
                         <a:solidFill>
                           <a:schemeClr val="tx1">
                             <a:lumMod val="75000"/>
@@ -4928,7 +7255,7 @@
                       </a:endParaRPr>
                     </a:p>
                   </a:txBody>
-                  <a:tcPr>
+                  <a:tcPr marL="68390" marR="68390" marT="34195" marB="34195">
                     <a:lnL w="6350" cap="flat" cmpd="sng" algn="ctr">
                       <a:solidFill>
                         <a:schemeClr val="tx1"/>
@@ -4975,7 +7302,7 @@
                     <a:p>
                       <a:pPr algn="r" latinLnBrk="1"/>
                       <a:r>
-                        <a:rPr lang="en-US" altLang="ko-KR" sz="1000" b="0" kern="1200" dirty="0">
+                        <a:rPr lang="en-US" altLang="ko-KR" sz="700" b="0" kern="1200" dirty="0">
                           <a:solidFill>
                             <a:schemeClr val="tx1">
                               <a:lumMod val="75000"/>
@@ -4988,7 +7315,7 @@
                         </a:rPr>
                         <a:t>17</a:t>
                       </a:r>
-                      <a:endParaRPr lang="ko-KR" altLang="en-US" sz="1000" b="0" kern="1200" dirty="0">
+                      <a:endParaRPr lang="ko-KR" altLang="en-US" sz="700" b="0" kern="1200" dirty="0">
                         <a:solidFill>
                           <a:schemeClr val="tx1">
                             <a:lumMod val="75000"/>
@@ -5001,7 +7328,7 @@
                       </a:endParaRPr>
                     </a:p>
                   </a:txBody>
-                  <a:tcPr>
+                  <a:tcPr marL="68390" marR="68390" marT="34195" marB="34195">
                     <a:lnL w="6350" cap="flat" cmpd="sng" algn="ctr">
                       <a:solidFill>
                         <a:schemeClr val="tx1"/>
@@ -5047,7 +7374,7 @@
                   </a:ext>
                 </a:extLst>
               </a:tr>
-              <a:tr h="770254">
+              <a:tr h="576086">
                 <a:tc>
                   <a:txBody>
                     <a:bodyPr/>
@@ -5055,7 +7382,7 @@
                     <a:p>
                       <a:pPr algn="r" latinLnBrk="1"/>
                       <a:r>
-                        <a:rPr lang="en-US" altLang="ko-KR" sz="1000" b="0" kern="1200" dirty="0">
+                        <a:rPr lang="en-US" altLang="ko-KR" sz="700" b="0" kern="1200" dirty="0">
                           <a:solidFill>
                             <a:schemeClr val="tx1">
                               <a:lumMod val="75000"/>
@@ -5068,7 +7395,7 @@
                         </a:rPr>
                         <a:t>18</a:t>
                       </a:r>
-                      <a:endParaRPr lang="ko-KR" altLang="en-US" sz="1000" b="0" kern="1200" dirty="0">
+                      <a:endParaRPr lang="ko-KR" altLang="en-US" sz="700" b="0" kern="1200" dirty="0">
                         <a:solidFill>
                           <a:schemeClr val="tx1">
                             <a:lumMod val="75000"/>
@@ -5081,7 +7408,7 @@
                       </a:endParaRPr>
                     </a:p>
                   </a:txBody>
-                  <a:tcPr>
+                  <a:tcPr marL="68390" marR="68390" marT="34195" marB="34195">
                     <a:lnL w="6350" cap="flat" cmpd="sng" algn="ctr">
                       <a:solidFill>
                         <a:schemeClr val="tx1"/>
@@ -5128,7 +7455,7 @@
                     <a:p>
                       <a:pPr algn="r" latinLnBrk="1"/>
                       <a:r>
-                        <a:rPr lang="en-US" altLang="ko-KR" sz="1000" b="0" kern="1200" dirty="0">
+                        <a:rPr lang="en-US" altLang="ko-KR" sz="700" b="0" kern="1200" dirty="0">
                           <a:solidFill>
                             <a:schemeClr val="tx1">
                               <a:lumMod val="75000"/>
@@ -5141,7 +7468,7 @@
                         </a:rPr>
                         <a:t>19</a:t>
                       </a:r>
-                      <a:endParaRPr lang="ko-KR" altLang="en-US" sz="1000" b="0" kern="1200" dirty="0">
+                      <a:endParaRPr lang="ko-KR" altLang="en-US" sz="700" b="0" kern="1200" dirty="0">
                         <a:solidFill>
                           <a:schemeClr val="tx1">
                             <a:lumMod val="75000"/>
@@ -5154,7 +7481,7 @@
                       </a:endParaRPr>
                     </a:p>
                   </a:txBody>
-                  <a:tcPr>
+                  <a:tcPr marL="68390" marR="68390" marT="34195" marB="34195">
                     <a:lnL w="6350" cap="flat" cmpd="sng" algn="ctr">
                       <a:solidFill>
                         <a:schemeClr val="tx1"/>
@@ -5201,7 +7528,7 @@
                     <a:p>
                       <a:pPr algn="r" latinLnBrk="1"/>
                       <a:r>
-                        <a:rPr lang="en-US" altLang="ko-KR" sz="1000" b="0" kern="1200" dirty="0">
+                        <a:rPr lang="en-US" altLang="ko-KR" sz="700" b="0" kern="1200" dirty="0">
                           <a:solidFill>
                             <a:schemeClr val="tx1">
                               <a:lumMod val="75000"/>
@@ -5214,7 +7541,7 @@
                         </a:rPr>
                         <a:t>20</a:t>
                       </a:r>
-                      <a:endParaRPr lang="ko-KR" altLang="en-US" sz="1000" b="0" kern="1200" dirty="0">
+                      <a:endParaRPr lang="ko-KR" altLang="en-US" sz="700" b="0" kern="1200" dirty="0">
                         <a:solidFill>
                           <a:schemeClr val="tx1">
                             <a:lumMod val="75000"/>
@@ -5227,7 +7554,7 @@
                       </a:endParaRPr>
                     </a:p>
                   </a:txBody>
-                  <a:tcPr>
+                  <a:tcPr marL="68390" marR="68390" marT="34195" marB="34195">
                     <a:lnL w="6350" cap="flat" cmpd="sng" algn="ctr">
                       <a:solidFill>
                         <a:schemeClr val="tx1"/>
@@ -5274,7 +7601,7 @@
                     <a:p>
                       <a:pPr algn="r" latinLnBrk="1"/>
                       <a:r>
-                        <a:rPr lang="en-US" altLang="ko-KR" sz="1000" b="0" kern="1200" dirty="0">
+                        <a:rPr lang="en-US" altLang="ko-KR" sz="700" b="0" kern="1200" dirty="0">
                           <a:solidFill>
                             <a:schemeClr val="tx1">
                               <a:lumMod val="75000"/>
@@ -5287,7 +7614,7 @@
                         </a:rPr>
                         <a:t>21</a:t>
                       </a:r>
-                      <a:endParaRPr lang="ko-KR" altLang="en-US" sz="1000" b="0" kern="1200" dirty="0">
+                      <a:endParaRPr lang="ko-KR" altLang="en-US" sz="700" b="0" kern="1200" dirty="0">
                         <a:solidFill>
                           <a:schemeClr val="tx1">
                             <a:lumMod val="75000"/>
@@ -5300,7 +7627,7 @@
                       </a:endParaRPr>
                     </a:p>
                   </a:txBody>
-                  <a:tcPr>
+                  <a:tcPr marL="68390" marR="68390" marT="34195" marB="34195">
                     <a:lnL w="6350" cap="flat" cmpd="sng" algn="ctr">
                       <a:solidFill>
                         <a:schemeClr val="tx1"/>
@@ -5347,7 +7674,7 @@
                     <a:p>
                       <a:pPr algn="r" latinLnBrk="1"/>
                       <a:r>
-                        <a:rPr lang="en-US" altLang="ko-KR" sz="1000" b="0" kern="1200" dirty="0">
+                        <a:rPr lang="en-US" altLang="ko-KR" sz="700" b="0" kern="1200" dirty="0">
                           <a:solidFill>
                             <a:schemeClr val="tx1">
                               <a:lumMod val="75000"/>
@@ -5360,7 +7687,7 @@
                         </a:rPr>
                         <a:t>22</a:t>
                       </a:r>
-                      <a:endParaRPr lang="ko-KR" altLang="en-US" sz="1000" b="0" kern="1200" dirty="0">
+                      <a:endParaRPr lang="ko-KR" altLang="en-US" sz="700" b="0" kern="1200" dirty="0">
                         <a:solidFill>
                           <a:schemeClr val="tx1">
                             <a:lumMod val="75000"/>
@@ -5373,7 +7700,7 @@
                       </a:endParaRPr>
                     </a:p>
                   </a:txBody>
-                  <a:tcPr>
+                  <a:tcPr marL="68390" marR="68390" marT="34195" marB="34195">
                     <a:lnL w="6350" cap="flat" cmpd="sng" algn="ctr">
                       <a:solidFill>
                         <a:schemeClr val="tx1"/>
@@ -5420,7 +7747,7 @@
                     <a:p>
                       <a:pPr algn="r" latinLnBrk="1"/>
                       <a:r>
-                        <a:rPr lang="en-US" altLang="ko-KR" sz="1000" b="0" kern="1200" dirty="0">
+                        <a:rPr lang="en-US" altLang="ko-KR" sz="700" b="0" kern="1200" dirty="0">
                           <a:solidFill>
                             <a:schemeClr val="tx1">
                               <a:lumMod val="75000"/>
@@ -5433,7 +7760,7 @@
                         </a:rPr>
                         <a:t>23</a:t>
                       </a:r>
-                      <a:endParaRPr lang="ko-KR" altLang="en-US" sz="1000" b="0" kern="1200" dirty="0">
+                      <a:endParaRPr lang="ko-KR" altLang="en-US" sz="700" b="0" kern="1200" dirty="0">
                         <a:solidFill>
                           <a:schemeClr val="tx1">
                             <a:lumMod val="75000"/>
@@ -5446,7 +7773,7 @@
                       </a:endParaRPr>
                     </a:p>
                   </a:txBody>
-                  <a:tcPr>
+                  <a:tcPr marL="68390" marR="68390" marT="34195" marB="34195">
                     <a:lnL w="6350" cap="flat" cmpd="sng" algn="ctr">
                       <a:solidFill>
                         <a:schemeClr val="tx1"/>
@@ -5493,7 +7820,7 @@
                     <a:p>
                       <a:pPr algn="r" latinLnBrk="1"/>
                       <a:r>
-                        <a:rPr lang="en-US" altLang="ko-KR" sz="1000" b="0" kern="1200" dirty="0">
+                        <a:rPr lang="en-US" altLang="ko-KR" sz="700" b="0" kern="1200" dirty="0">
                           <a:solidFill>
                             <a:schemeClr val="tx1">
                               <a:lumMod val="75000"/>
@@ -5506,7 +7833,7 @@
                         </a:rPr>
                         <a:t>24</a:t>
                       </a:r>
-                      <a:endParaRPr lang="ko-KR" altLang="en-US" sz="1000" b="0" kern="1200" dirty="0">
+                      <a:endParaRPr lang="ko-KR" altLang="en-US" sz="700" b="0" kern="1200" dirty="0">
                         <a:solidFill>
                           <a:schemeClr val="tx1">
                             <a:lumMod val="75000"/>
@@ -5519,7 +7846,7 @@
                       </a:endParaRPr>
                     </a:p>
                   </a:txBody>
-                  <a:tcPr>
+                  <a:tcPr marL="68390" marR="68390" marT="34195" marB="34195">
                     <a:lnL w="6350" cap="flat" cmpd="sng" algn="ctr">
                       <a:solidFill>
                         <a:schemeClr val="tx1"/>
@@ -5565,7 +7892,7 @@
                   </a:ext>
                 </a:extLst>
               </a:tr>
-              <a:tr h="770254">
+              <a:tr h="576086">
                 <a:tc>
                   <a:txBody>
                     <a:bodyPr/>
@@ -5573,7 +7900,7 @@
                     <a:p>
                       <a:pPr algn="r" latinLnBrk="1"/>
                       <a:r>
-                        <a:rPr lang="en-US" altLang="ko-KR" sz="1000" b="0" kern="1200" dirty="0">
+                        <a:rPr lang="en-US" altLang="ko-KR" sz="700" b="0" kern="1200" dirty="0">
                           <a:solidFill>
                             <a:schemeClr val="tx1">
                               <a:lumMod val="75000"/>
@@ -5586,7 +7913,7 @@
                         </a:rPr>
                         <a:t>25</a:t>
                       </a:r>
-                      <a:endParaRPr lang="ko-KR" altLang="en-US" sz="1000" b="0" kern="1200" dirty="0">
+                      <a:endParaRPr lang="ko-KR" altLang="en-US" sz="700" b="0" kern="1200" dirty="0">
                         <a:solidFill>
                           <a:schemeClr val="tx1">
                             <a:lumMod val="75000"/>
@@ -5599,7 +7926,7 @@
                       </a:endParaRPr>
                     </a:p>
                   </a:txBody>
-                  <a:tcPr>
+                  <a:tcPr marL="68390" marR="68390" marT="34195" marB="34195">
                     <a:lnL w="6350" cap="flat" cmpd="sng" algn="ctr">
                       <a:solidFill>
                         <a:schemeClr val="tx1"/>
@@ -5646,7 +7973,7 @@
                     <a:p>
                       <a:pPr algn="r" latinLnBrk="1"/>
                       <a:r>
-                        <a:rPr lang="en-US" altLang="ko-KR" sz="1000" b="0" kern="1200" dirty="0">
+                        <a:rPr lang="en-US" altLang="ko-KR" sz="700" b="0" kern="1200" dirty="0">
                           <a:solidFill>
                             <a:schemeClr val="tx1">
                               <a:lumMod val="75000"/>
@@ -5659,7 +7986,7 @@
                         </a:rPr>
                         <a:t>26</a:t>
                       </a:r>
-                      <a:endParaRPr lang="ko-KR" altLang="en-US" sz="1000" b="0" kern="1200" dirty="0">
+                      <a:endParaRPr lang="ko-KR" altLang="en-US" sz="700" b="0" kern="1200" dirty="0">
                         <a:solidFill>
                           <a:schemeClr val="tx1">
                             <a:lumMod val="75000"/>
@@ -5672,7 +7999,7 @@
                       </a:endParaRPr>
                     </a:p>
                   </a:txBody>
-                  <a:tcPr>
+                  <a:tcPr marL="68390" marR="68390" marT="34195" marB="34195">
                     <a:lnL w="6350" cap="flat" cmpd="sng" algn="ctr">
                       <a:solidFill>
                         <a:schemeClr val="tx1"/>
@@ -5719,7 +8046,7 @@
                     <a:p>
                       <a:pPr algn="r" latinLnBrk="1"/>
                       <a:r>
-                        <a:rPr lang="en-US" altLang="ko-KR" sz="1000" b="0" kern="1200" dirty="0">
+                        <a:rPr lang="en-US" altLang="ko-KR" sz="700" b="0" kern="1200" dirty="0">
                           <a:solidFill>
                             <a:schemeClr val="tx1">
                               <a:lumMod val="75000"/>
@@ -5732,7 +8059,7 @@
                         </a:rPr>
                         <a:t>27</a:t>
                       </a:r>
-                      <a:endParaRPr lang="ko-KR" altLang="en-US" sz="1000" b="0" kern="1200" dirty="0">
+                      <a:endParaRPr lang="ko-KR" altLang="en-US" sz="700" b="0" kern="1200" dirty="0">
                         <a:solidFill>
                           <a:schemeClr val="tx1">
                             <a:lumMod val="75000"/>
@@ -5745,7 +8072,7 @@
                       </a:endParaRPr>
                     </a:p>
                   </a:txBody>
-                  <a:tcPr>
+                  <a:tcPr marL="68390" marR="68390" marT="34195" marB="34195">
                     <a:lnL w="6350" cap="flat" cmpd="sng" algn="ctr">
                       <a:solidFill>
                         <a:schemeClr val="tx1"/>
@@ -5792,7 +8119,7 @@
                     <a:p>
                       <a:pPr algn="r" latinLnBrk="1"/>
                       <a:r>
-                        <a:rPr lang="en-US" altLang="ko-KR" sz="1000" b="0" kern="1200" dirty="0">
+                        <a:rPr lang="en-US" altLang="ko-KR" sz="700" b="0" kern="1200" dirty="0">
                           <a:solidFill>
                             <a:schemeClr val="tx1">
                               <a:lumMod val="75000"/>
@@ -5805,7 +8132,7 @@
                         </a:rPr>
                         <a:t>28</a:t>
                       </a:r>
-                      <a:endParaRPr lang="ko-KR" altLang="en-US" sz="1000" b="0" kern="1200" dirty="0">
+                      <a:endParaRPr lang="ko-KR" altLang="en-US" sz="700" b="0" kern="1200" dirty="0">
                         <a:solidFill>
                           <a:schemeClr val="tx1">
                             <a:lumMod val="75000"/>
@@ -5818,7 +8145,7 @@
                       </a:endParaRPr>
                     </a:p>
                   </a:txBody>
-                  <a:tcPr>
+                  <a:tcPr marL="68390" marR="68390" marT="34195" marB="34195">
                     <a:lnL w="6350" cap="flat" cmpd="sng" algn="ctr">
                       <a:solidFill>
                         <a:schemeClr val="tx1"/>
@@ -5865,7 +8192,7 @@
                     <a:p>
                       <a:pPr algn="r" latinLnBrk="1"/>
                       <a:r>
-                        <a:rPr lang="en-US" altLang="ko-KR" sz="1000" b="0" kern="1200">
+                        <a:rPr lang="en-US" altLang="ko-KR" sz="700" b="0" kern="1200">
                           <a:solidFill>
                             <a:schemeClr val="tx1">
                               <a:lumMod val="75000"/>
@@ -5878,7 +8205,7 @@
                         </a:rPr>
                         <a:t>29</a:t>
                       </a:r>
-                      <a:endParaRPr lang="ko-KR" altLang="en-US" sz="1000" b="0" kern="1200" dirty="0">
+                      <a:endParaRPr lang="ko-KR" altLang="en-US" sz="700" b="0" kern="1200" dirty="0">
                         <a:solidFill>
                           <a:schemeClr val="tx1">
                             <a:lumMod val="75000"/>
@@ -5891,7 +8218,7 @@
                       </a:endParaRPr>
                     </a:p>
                   </a:txBody>
-                  <a:tcPr>
+                  <a:tcPr marL="68390" marR="68390" marT="34195" marB="34195">
                     <a:lnL w="6350" cap="flat" cmpd="sng" algn="ctr">
                       <a:solidFill>
                         <a:schemeClr val="tx1"/>
@@ -5938,7 +8265,7 @@
                     <a:p>
                       <a:pPr algn="r" latinLnBrk="1"/>
                       <a:r>
-                        <a:rPr lang="en-US" altLang="ko-KR" sz="1000" b="0" kern="1200" dirty="0">
+                        <a:rPr lang="en-US" altLang="ko-KR" sz="700" b="0" kern="1200" dirty="0">
                           <a:solidFill>
                             <a:schemeClr val="tx1">
                               <a:lumMod val="75000"/>
@@ -5951,7 +8278,7 @@
                         </a:rPr>
                         <a:t>30</a:t>
                       </a:r>
-                      <a:endParaRPr lang="ko-KR" altLang="en-US" sz="1000" b="0" kern="1200" dirty="0">
+                      <a:endParaRPr lang="ko-KR" altLang="en-US" sz="700" b="0" kern="1200" dirty="0">
                         <a:solidFill>
                           <a:schemeClr val="tx1">
                             <a:lumMod val="75000"/>
@@ -5964,7 +8291,7 @@
                       </a:endParaRPr>
                     </a:p>
                   </a:txBody>
-                  <a:tcPr>
+                  <a:tcPr marL="68390" marR="68390" marT="34195" marB="34195">
                     <a:lnL w="6350" cap="flat" cmpd="sng" algn="ctr">
                       <a:solidFill>
                         <a:schemeClr val="tx1"/>
@@ -6011,7 +8338,7 @@
                     <a:p>
                       <a:pPr algn="r" latinLnBrk="1"/>
                       <a:r>
-                        <a:rPr lang="en-US" altLang="ko-KR" sz="1000" b="0" kern="1200" dirty="0">
+                        <a:rPr lang="en-US" altLang="ko-KR" sz="700" b="0" kern="1200" dirty="0">
                           <a:solidFill>
                             <a:schemeClr val="tx1">
                               <a:lumMod val="75000"/>
@@ -6024,7 +8351,7 @@
                         </a:rPr>
                         <a:t>31</a:t>
                       </a:r>
-                      <a:endParaRPr lang="ko-KR" altLang="en-US" sz="1000" b="0" kern="1200" dirty="0">
+                      <a:endParaRPr lang="ko-KR" altLang="en-US" sz="700" b="0" kern="1200" dirty="0">
                         <a:solidFill>
                           <a:schemeClr val="tx1">
                             <a:lumMod val="75000"/>
@@ -6037,7 +8364,7 @@
                       </a:endParaRPr>
                     </a:p>
                   </a:txBody>
-                  <a:tcPr>
+                  <a:tcPr marL="68390" marR="68390" marT="34195" marB="34195">
                     <a:lnL w="6350" cap="flat" cmpd="sng" algn="ctr">
                       <a:solidFill>
                         <a:schemeClr val="tx1"/>
@@ -6083,14 +8410,14 @@
                   </a:ext>
                 </a:extLst>
               </a:tr>
-              <a:tr h="770254">
+              <a:tr h="576086">
                 <a:tc>
                   <a:txBody>
                     <a:bodyPr/>
                     <a:lstStyle/>
                     <a:p>
                       <a:pPr algn="r" latinLnBrk="1"/>
-                      <a:endParaRPr lang="ko-KR" altLang="en-US" sz="1000" b="0" kern="1200" dirty="0">
+                      <a:endParaRPr lang="ko-KR" altLang="en-US" sz="700" b="0" kern="1200" dirty="0">
                         <a:solidFill>
                           <a:schemeClr val="tx1">
                             <a:lumMod val="75000"/>
@@ -6103,7 +8430,7 @@
                       </a:endParaRPr>
                     </a:p>
                   </a:txBody>
-                  <a:tcPr>
+                  <a:tcPr marL="68390" marR="68390" marT="34195" marB="34195">
                     <a:lnL w="6350" cap="flat" cmpd="sng" algn="ctr">
                       <a:solidFill>
                         <a:schemeClr val="tx1"/>
@@ -6149,7 +8476,7 @@
                     <a:lstStyle/>
                     <a:p>
                       <a:pPr algn="r" latinLnBrk="1"/>
-                      <a:endParaRPr lang="ko-KR" altLang="en-US" sz="1000" b="0" kern="1200" dirty="0">
+                      <a:endParaRPr lang="ko-KR" altLang="en-US" sz="700" b="0" kern="1200" dirty="0">
                         <a:solidFill>
                           <a:schemeClr val="tx1">
                             <a:lumMod val="75000"/>
@@ -6162,7 +8489,7 @@
                       </a:endParaRPr>
                     </a:p>
                   </a:txBody>
-                  <a:tcPr>
+                  <a:tcPr marL="68390" marR="68390" marT="34195" marB="34195">
                     <a:lnL w="6350" cap="flat" cmpd="sng" algn="ctr">
                       <a:solidFill>
                         <a:schemeClr val="tx1"/>
@@ -6208,7 +8535,7 @@
                     <a:lstStyle/>
                     <a:p>
                       <a:pPr algn="r" latinLnBrk="1"/>
-                      <a:endParaRPr lang="ko-KR" altLang="en-US" sz="1000" b="0" kern="1200" dirty="0">
+                      <a:endParaRPr lang="ko-KR" altLang="en-US" sz="700" b="0" kern="1200" dirty="0">
                         <a:solidFill>
                           <a:schemeClr val="tx1">
                             <a:lumMod val="75000"/>
@@ -6221,7 +8548,7 @@
                       </a:endParaRPr>
                     </a:p>
                   </a:txBody>
-                  <a:tcPr>
+                  <a:tcPr marL="68390" marR="68390" marT="34195" marB="34195">
                     <a:lnL w="6350" cap="flat" cmpd="sng" algn="ctr">
                       <a:solidFill>
                         <a:schemeClr val="tx1"/>
@@ -6267,7 +8594,7 @@
                     <a:lstStyle/>
                     <a:p>
                       <a:pPr algn="r" latinLnBrk="1"/>
-                      <a:endParaRPr lang="ko-KR" altLang="en-US" sz="1000" b="0" kern="1200" dirty="0">
+                      <a:endParaRPr lang="ko-KR" altLang="en-US" sz="700" b="0" kern="1200" dirty="0">
                         <a:solidFill>
                           <a:schemeClr val="tx1">
                             <a:lumMod val="75000"/>
@@ -6280,7 +8607,7 @@
                       </a:endParaRPr>
                     </a:p>
                   </a:txBody>
-                  <a:tcPr>
+                  <a:tcPr marL="68390" marR="68390" marT="34195" marB="34195">
                     <a:lnL w="6350" cap="flat" cmpd="sng" algn="ctr">
                       <a:solidFill>
                         <a:schemeClr val="tx1"/>
@@ -6326,7 +8653,7 @@
                     <a:lstStyle/>
                     <a:p>
                       <a:pPr algn="r" latinLnBrk="1"/>
-                      <a:endParaRPr lang="ko-KR" altLang="en-US" sz="1000" b="0" kern="1200" dirty="0">
+                      <a:endParaRPr lang="ko-KR" altLang="en-US" sz="700" b="0" kern="1200" dirty="0">
                         <a:solidFill>
                           <a:schemeClr val="tx1">
                             <a:lumMod val="75000"/>
@@ -6339,7 +8666,7 @@
                       </a:endParaRPr>
                     </a:p>
                   </a:txBody>
-                  <a:tcPr>
+                  <a:tcPr marL="68390" marR="68390" marT="34195" marB="34195">
                     <a:lnL w="6350" cap="flat" cmpd="sng" algn="ctr">
                       <a:solidFill>
                         <a:schemeClr val="tx1"/>
@@ -6385,7 +8712,7 @@
                     <a:lstStyle/>
                     <a:p>
                       <a:pPr algn="r" latinLnBrk="1"/>
-                      <a:endParaRPr lang="ko-KR" altLang="en-US" sz="1000" b="0" kern="1200" dirty="0">
+                      <a:endParaRPr lang="ko-KR" altLang="en-US" sz="700" b="0" kern="1200" dirty="0">
                         <a:solidFill>
                           <a:schemeClr val="tx1">
                             <a:lumMod val="75000"/>
@@ -6398,7 +8725,7 @@
                       </a:endParaRPr>
                     </a:p>
                   </a:txBody>
-                  <a:tcPr>
+                  <a:tcPr marL="68390" marR="68390" marT="34195" marB="34195">
                     <a:lnL w="6350" cap="flat" cmpd="sng" algn="ctr">
                       <a:solidFill>
                         <a:schemeClr val="tx1"/>
@@ -6444,7 +8771,7 @@
                     <a:lstStyle/>
                     <a:p>
                       <a:pPr algn="r" latinLnBrk="1"/>
-                      <a:endParaRPr lang="ko-KR" altLang="en-US" sz="1000" b="0" kern="1200" dirty="0">
+                      <a:endParaRPr lang="ko-KR" altLang="en-US" sz="700" b="0" kern="1200" dirty="0">
                         <a:solidFill>
                           <a:schemeClr val="tx1">
                             <a:lumMod val="75000"/>
@@ -6457,7 +8784,7 @@
                       </a:endParaRPr>
                     </a:p>
                   </a:txBody>
-                  <a:tcPr>
+                  <a:tcPr marL="68390" marR="68390" marT="34195" marB="34195">
                     <a:lnL w="6350" cap="flat" cmpd="sng" algn="ctr">
                       <a:solidFill>
                         <a:schemeClr val="tx1"/>
@@ -6536,8 +8863,8 @@
         </p:blipFill>
         <p:spPr>
           <a:xfrm>
-            <a:off x="3270250" y="3246438"/>
-            <a:ext cx="600075" cy="765175"/>
+            <a:off x="2446669" y="2428065"/>
+            <a:ext cx="448806" cy="572287"/>
           </a:xfrm>
           <a:prstGeom prst="rect">
             <a:avLst/>
@@ -6572,8 +8899,8 @@
         </p:blipFill>
         <p:spPr>
           <a:xfrm>
-            <a:off x="4666591" y="771400"/>
-            <a:ext cx="4218852" cy="5553723"/>
+            <a:off x="3491015" y="576943"/>
+            <a:ext cx="3155350" cy="4153722"/>
           </a:xfrm>
           <a:prstGeom prst="rect">
             <a:avLst/>
@@ -6601,8 +8928,8 @@
           </p:nvPr>
         </p:nvGraphicFramePr>
         <p:xfrm>
-          <a:off x="4666592" y="771402"/>
-          <a:ext cx="4218851" cy="5553722"/>
+          <a:off x="3491016" y="576944"/>
+          <a:ext cx="3155349" cy="4153721"/>
         </p:xfrm>
         <a:graphic>
           <a:graphicData uri="http://schemas.openxmlformats.org/drawingml/2006/table">
@@ -6611,7 +8938,7 @@
                 <a:tableStyleId>{5C22544A-7EE6-4342-B048-85BDC9FD1C3A}</a:tableStyleId>
               </a:tblPr>
               <a:tblGrid>
-                <a:gridCol w="4218851">
+                <a:gridCol w="3155349">
                   <a:extLst>
                     <a:ext uri="{9D8B030D-6E8A-4147-A177-3AD203B41FA5}">
                       <a16:colId xmlns:a16="http://schemas.microsoft.com/office/drawing/2014/main" val="3874790930"/>
@@ -6619,21 +8946,21 @@
                   </a:extLst>
                 </a:gridCol>
               </a:tblGrid>
-              <a:tr h="5553722">
+              <a:tr h="4153721">
                 <a:tc>
                   <a:txBody>
                     <a:bodyPr/>
                     <a:lstStyle/>
                     <a:p>
                       <a:pPr algn="ctr" latinLnBrk="1"/>
-                      <a:endParaRPr lang="ko-KR" altLang="en-US" b="1" dirty="0">
+                      <a:endParaRPr lang="ko-KR" altLang="en-US" sz="1000" b="1" dirty="0">
                         <a:solidFill>
                           <a:schemeClr val="tx1"/>
                         </a:solidFill>
                       </a:endParaRPr>
                     </a:p>
                   </a:txBody>
-                  <a:tcPr>
+                  <a:tcPr marL="68390" marR="68390" marT="34195" marB="34195">
                     <a:lnL w="6350" cap="flat" cmpd="sng" algn="ctr">
                       <a:solidFill>
                         <a:schemeClr val="tx1"/>
@@ -6697,8 +9024,8 @@
         </p:nvSpPr>
         <p:spPr>
           <a:xfrm>
-            <a:off x="1194901" y="381336"/>
-            <a:ext cx="2346159" cy="1015663"/>
+            <a:off x="894481" y="285208"/>
+            <a:ext cx="1754731" cy="782843"/>
           </a:xfrm>
           <a:prstGeom prst="rect">
             <a:avLst/>
@@ -6713,7 +9040,7 @@
           <a:p>
             <a:pPr algn="ctr"/>
             <a:r>
-              <a:rPr lang="en-US" altLang="ko-KR" sz="6000" dirty="0" err="1">
+              <a:rPr lang="en-US" altLang="ko-KR" sz="4487" dirty="0" err="1">
                 <a:solidFill>
                   <a:schemeClr val="tx1">
                     <a:lumMod val="75000"/>
@@ -6724,7 +9051,7 @@
               </a:rPr>
               <a:t>Janualy</a:t>
             </a:r>
-            <a:endParaRPr lang="ko-KR" altLang="en-US" sz="6000" dirty="0">
+            <a:endParaRPr lang="ko-KR" altLang="en-US" sz="4487" dirty="0">
               <a:solidFill>
                 <a:schemeClr val="tx1">
                   <a:lumMod val="75000"/>
@@ -6750,8 +9077,8 @@
         </p:nvSpPr>
         <p:spPr>
           <a:xfrm>
-            <a:off x="1194901" y="371292"/>
-            <a:ext cx="2346159" cy="400110"/>
+            <a:off x="894481" y="277695"/>
+            <a:ext cx="1754731" cy="322524"/>
           </a:xfrm>
           <a:prstGeom prst="rect">
             <a:avLst/>
@@ -6766,7 +9093,7 @@
           <a:p>
             <a:pPr algn="ctr"/>
             <a:r>
-              <a:rPr lang="en-US" altLang="ko-KR" sz="2000" dirty="0">
+              <a:rPr lang="en-US" altLang="ko-KR" sz="1496" dirty="0">
                 <a:solidFill>
                   <a:schemeClr val="bg1">
                     <a:lumMod val="50000"/>
@@ -6776,7 +9103,7 @@
               </a:rPr>
               <a:t>2026</a:t>
             </a:r>
-            <a:endParaRPr lang="ko-KR" altLang="en-US" sz="2000" dirty="0">
+            <a:endParaRPr lang="ko-KR" altLang="en-US" sz="1496" dirty="0">
               <a:solidFill>
                 <a:schemeClr val="bg1">
                   <a:lumMod val="50000"/>
